--- a/presentation/Ulu_Lastra_slides_v8.pptx
+++ b/presentation/Ulu_Lastra_slides_v8.pptx
@@ -81,10 +81,10 @@
         <a:latin typeface="+mj-lt"/>
         <a:ea typeface="+mj-ea"/>
         <a:cs typeface="+mj-cs"/>
-        <a:sym typeface="Helvetica"/>
+        <a:sym typeface="Helvetica Neue"/>
       </a:defRPr>
     </a:lvl1pPr>
-    <a:lvl2pPr marL="0" marR="0" indent="457200" algn="l" defTabSz="914400" rtl="0" fontAlgn="auto" latinLnBrk="0" hangingPunct="0">
+    <a:lvl2pPr marL="0" marR="0" indent="0" algn="l" defTabSz="914400" rtl="0" fontAlgn="auto" latinLnBrk="0" hangingPunct="0">
       <a:lnSpc>
         <a:spcPct val="100000"/>
       </a:lnSpc>
@@ -111,10 +111,10 @@
         <a:latin typeface="+mj-lt"/>
         <a:ea typeface="+mj-ea"/>
         <a:cs typeface="+mj-cs"/>
-        <a:sym typeface="Helvetica"/>
+        <a:sym typeface="Helvetica Neue"/>
       </a:defRPr>
     </a:lvl2pPr>
-    <a:lvl3pPr marL="0" marR="0" indent="914400" algn="l" defTabSz="914400" rtl="0" fontAlgn="auto" latinLnBrk="0" hangingPunct="0">
+    <a:lvl3pPr marL="0" marR="0" indent="0" algn="l" defTabSz="914400" rtl="0" fontAlgn="auto" latinLnBrk="0" hangingPunct="0">
       <a:lnSpc>
         <a:spcPct val="100000"/>
       </a:lnSpc>
@@ -141,10 +141,10 @@
         <a:latin typeface="+mj-lt"/>
         <a:ea typeface="+mj-ea"/>
         <a:cs typeface="+mj-cs"/>
-        <a:sym typeface="Helvetica"/>
+        <a:sym typeface="Helvetica Neue"/>
       </a:defRPr>
     </a:lvl3pPr>
-    <a:lvl4pPr marL="0" marR="0" indent="1371600" algn="l" defTabSz="914400" rtl="0" fontAlgn="auto" latinLnBrk="0" hangingPunct="0">
+    <a:lvl4pPr marL="0" marR="0" indent="0" algn="l" defTabSz="914400" rtl="0" fontAlgn="auto" latinLnBrk="0" hangingPunct="0">
       <a:lnSpc>
         <a:spcPct val="100000"/>
       </a:lnSpc>
@@ -171,10 +171,10 @@
         <a:latin typeface="+mj-lt"/>
         <a:ea typeface="+mj-ea"/>
         <a:cs typeface="+mj-cs"/>
-        <a:sym typeface="Helvetica"/>
+        <a:sym typeface="Helvetica Neue"/>
       </a:defRPr>
     </a:lvl4pPr>
-    <a:lvl5pPr marL="0" marR="0" indent="1828800" algn="l" defTabSz="914400" rtl="0" fontAlgn="auto" latinLnBrk="0" hangingPunct="0">
+    <a:lvl5pPr marL="0" marR="0" indent="0" algn="l" defTabSz="914400" rtl="0" fontAlgn="auto" latinLnBrk="0" hangingPunct="0">
       <a:lnSpc>
         <a:spcPct val="100000"/>
       </a:lnSpc>
@@ -201,10 +201,10 @@
         <a:latin typeface="+mj-lt"/>
         <a:ea typeface="+mj-ea"/>
         <a:cs typeface="+mj-cs"/>
-        <a:sym typeface="Helvetica"/>
+        <a:sym typeface="Helvetica Neue"/>
       </a:defRPr>
     </a:lvl5pPr>
-    <a:lvl6pPr marL="0" marR="0" indent="2286000" algn="l" defTabSz="914400" rtl="0" fontAlgn="auto" latinLnBrk="0" hangingPunct="0">
+    <a:lvl6pPr marL="0" marR="0" indent="0" algn="l" defTabSz="914400" rtl="0" fontAlgn="auto" latinLnBrk="0" hangingPunct="0">
       <a:lnSpc>
         <a:spcPct val="100000"/>
       </a:lnSpc>
@@ -231,10 +231,10 @@
         <a:latin typeface="+mj-lt"/>
         <a:ea typeface="+mj-ea"/>
         <a:cs typeface="+mj-cs"/>
-        <a:sym typeface="Helvetica"/>
+        <a:sym typeface="Helvetica Neue"/>
       </a:defRPr>
     </a:lvl6pPr>
-    <a:lvl7pPr marL="0" marR="0" indent="2743200" algn="l" defTabSz="914400" rtl="0" fontAlgn="auto" latinLnBrk="0" hangingPunct="0">
+    <a:lvl7pPr marL="0" marR="0" indent="0" algn="l" defTabSz="914400" rtl="0" fontAlgn="auto" latinLnBrk="0" hangingPunct="0">
       <a:lnSpc>
         <a:spcPct val="100000"/>
       </a:lnSpc>
@@ -261,10 +261,10 @@
         <a:latin typeface="+mj-lt"/>
         <a:ea typeface="+mj-ea"/>
         <a:cs typeface="+mj-cs"/>
-        <a:sym typeface="Helvetica"/>
+        <a:sym typeface="Helvetica Neue"/>
       </a:defRPr>
     </a:lvl7pPr>
-    <a:lvl8pPr marL="0" marR="0" indent="3200400" algn="l" defTabSz="914400" rtl="0" fontAlgn="auto" latinLnBrk="0" hangingPunct="0">
+    <a:lvl8pPr marL="0" marR="0" indent="0" algn="l" defTabSz="914400" rtl="0" fontAlgn="auto" latinLnBrk="0" hangingPunct="0">
       <a:lnSpc>
         <a:spcPct val="100000"/>
       </a:lnSpc>
@@ -291,10 +291,10 @@
         <a:latin typeface="+mj-lt"/>
         <a:ea typeface="+mj-ea"/>
         <a:cs typeface="+mj-cs"/>
-        <a:sym typeface="Helvetica"/>
+        <a:sym typeface="Helvetica Neue"/>
       </a:defRPr>
     </a:lvl8pPr>
-    <a:lvl9pPr marL="0" marR="0" indent="3657600" algn="l" defTabSz="914400" rtl="0" fontAlgn="auto" latinLnBrk="0" hangingPunct="0">
+    <a:lvl9pPr marL="0" marR="0" indent="0" algn="l" defTabSz="914400" rtl="0" fontAlgn="auto" latinLnBrk="0" hangingPunct="0">
       <a:lnSpc>
         <a:spcPct val="100000"/>
       </a:lnSpc>
@@ -321,7 +321,7 @@
         <a:latin typeface="+mj-lt"/>
         <a:ea typeface="+mj-ea"/>
         <a:cs typeface="+mj-cs"/>
-        <a:sym typeface="Helvetica"/>
+        <a:sym typeface="Helvetica Neue"/>
       </a:defRPr>
     </a:lvl9pPr>
   </p:defaultTextStyle>
@@ -405,73 +405,73 @@
   <p:notesStyle>
     <a:lvl1pPr latinLnBrk="0">
       <a:defRPr sz="1200">
-        <a:latin typeface="+mn-lt"/>
-        <a:ea typeface="+mn-ea"/>
-        <a:cs typeface="+mn-cs"/>
+        <a:latin typeface="+mj-lt"/>
+        <a:ea typeface="+mj-ea"/>
+        <a:cs typeface="+mj-cs"/>
         <a:sym typeface="Helvetica Neue"/>
       </a:defRPr>
     </a:lvl1pPr>
     <a:lvl2pPr indent="228600" latinLnBrk="0">
       <a:defRPr sz="1200">
-        <a:latin typeface="+mn-lt"/>
-        <a:ea typeface="+mn-ea"/>
-        <a:cs typeface="+mn-cs"/>
+        <a:latin typeface="+mj-lt"/>
+        <a:ea typeface="+mj-ea"/>
+        <a:cs typeface="+mj-cs"/>
         <a:sym typeface="Helvetica Neue"/>
       </a:defRPr>
     </a:lvl2pPr>
     <a:lvl3pPr indent="457200" latinLnBrk="0">
       <a:defRPr sz="1200">
-        <a:latin typeface="+mn-lt"/>
-        <a:ea typeface="+mn-ea"/>
-        <a:cs typeface="+mn-cs"/>
+        <a:latin typeface="+mj-lt"/>
+        <a:ea typeface="+mj-ea"/>
+        <a:cs typeface="+mj-cs"/>
         <a:sym typeface="Helvetica Neue"/>
       </a:defRPr>
     </a:lvl3pPr>
     <a:lvl4pPr indent="685800" latinLnBrk="0">
       <a:defRPr sz="1200">
-        <a:latin typeface="+mn-lt"/>
-        <a:ea typeface="+mn-ea"/>
-        <a:cs typeface="+mn-cs"/>
+        <a:latin typeface="+mj-lt"/>
+        <a:ea typeface="+mj-ea"/>
+        <a:cs typeface="+mj-cs"/>
         <a:sym typeface="Helvetica Neue"/>
       </a:defRPr>
     </a:lvl4pPr>
     <a:lvl5pPr indent="914400" latinLnBrk="0">
       <a:defRPr sz="1200">
-        <a:latin typeface="+mn-lt"/>
-        <a:ea typeface="+mn-ea"/>
-        <a:cs typeface="+mn-cs"/>
+        <a:latin typeface="+mj-lt"/>
+        <a:ea typeface="+mj-ea"/>
+        <a:cs typeface="+mj-cs"/>
         <a:sym typeface="Helvetica Neue"/>
       </a:defRPr>
     </a:lvl5pPr>
     <a:lvl6pPr indent="1143000" latinLnBrk="0">
       <a:defRPr sz="1200">
-        <a:latin typeface="+mn-lt"/>
-        <a:ea typeface="+mn-ea"/>
-        <a:cs typeface="+mn-cs"/>
+        <a:latin typeface="+mj-lt"/>
+        <a:ea typeface="+mj-ea"/>
+        <a:cs typeface="+mj-cs"/>
         <a:sym typeface="Helvetica Neue"/>
       </a:defRPr>
     </a:lvl6pPr>
     <a:lvl7pPr indent="1371600" latinLnBrk="0">
       <a:defRPr sz="1200">
-        <a:latin typeface="+mn-lt"/>
-        <a:ea typeface="+mn-ea"/>
-        <a:cs typeface="+mn-cs"/>
+        <a:latin typeface="+mj-lt"/>
+        <a:ea typeface="+mj-ea"/>
+        <a:cs typeface="+mj-cs"/>
         <a:sym typeface="Helvetica Neue"/>
       </a:defRPr>
     </a:lvl7pPr>
     <a:lvl8pPr indent="1600200" latinLnBrk="0">
       <a:defRPr sz="1200">
-        <a:latin typeface="+mn-lt"/>
-        <a:ea typeface="+mn-ea"/>
-        <a:cs typeface="+mn-cs"/>
+        <a:latin typeface="+mj-lt"/>
+        <a:ea typeface="+mj-ea"/>
+        <a:cs typeface="+mj-cs"/>
         <a:sym typeface="Helvetica Neue"/>
       </a:defRPr>
     </a:lvl8pPr>
     <a:lvl9pPr indent="1828800" latinLnBrk="0">
       <a:defRPr sz="1200">
-        <a:latin typeface="+mn-lt"/>
-        <a:ea typeface="+mn-ea"/>
-        <a:cs typeface="+mn-cs"/>
+        <a:latin typeface="+mj-lt"/>
+        <a:ea typeface="+mj-ea"/>
+        <a:cs typeface="+mj-cs"/>
         <a:sym typeface="Helvetica Neue"/>
       </a:defRPr>
     </a:lvl9pPr>
@@ -1693,8 +1693,8 @@
         </p:nvSpPr>
         <p:spPr>
           <a:xfrm>
-            <a:off x="457200" y="69056"/>
-            <a:ext cx="8229600" cy="1131094"/>
+            <a:off x="1370012" y="577453"/>
+            <a:ext cx="7315201" cy="1251347"/>
           </a:xfrm>
           <a:prstGeom prst="rect">
             <a:avLst/>
@@ -1729,8 +1729,8 @@
         </p:nvSpPr>
         <p:spPr>
           <a:xfrm>
-            <a:off x="457200" y="1200150"/>
-            <a:ext cx="8229600" cy="3943350"/>
+            <a:off x="5103812" y="1828800"/>
+            <a:ext cx="3581401" cy="3314700"/>
           </a:xfrm>
           <a:prstGeom prst="rect">
             <a:avLst/>
@@ -1789,8 +1789,8 @@
         </p:nvSpPr>
         <p:spPr>
           <a:xfrm>
-            <a:off x="6279546" y="4632643"/>
-            <a:ext cx="273654" cy="269239"/>
+            <a:off x="6279548" y="4632644"/>
+            <a:ext cx="273653" cy="269237"/>
           </a:xfrm>
           <a:prstGeom prst="rect">
             <a:avLst/>
@@ -1805,7 +1805,12 @@
           </a:bodyPr>
           <a:lstStyle>
             <a:lvl1pPr algn="r">
-              <a:defRPr sz="1200"/>
+              <a:defRPr sz="1200">
+                <a:latin typeface="+mn-lt"/>
+                <a:ea typeface="+mn-ea"/>
+                <a:cs typeface="+mn-cs"/>
+                <a:sym typeface="Helvetica"/>
+              </a:defRPr>
             </a:lvl1pPr>
           </a:lstStyle>
           <a:p>
@@ -2321,7 +2326,7 @@
           <a:sym typeface="Helvetica"/>
         </a:defRPr>
       </a:lvl1pPr>
-      <a:lvl2pPr marL="0" marR="0" indent="457200" algn="r" defTabSz="914400" rtl="0" latinLnBrk="0">
+      <a:lvl2pPr marL="0" marR="0" indent="0" algn="r" defTabSz="914400" rtl="0" latinLnBrk="0">
         <a:lnSpc>
           <a:spcPct val="100000"/>
         </a:lnSpc>
@@ -2347,7 +2352,7 @@
           <a:sym typeface="Helvetica"/>
         </a:defRPr>
       </a:lvl2pPr>
-      <a:lvl3pPr marL="0" marR="0" indent="914400" algn="r" defTabSz="914400" rtl="0" latinLnBrk="0">
+      <a:lvl3pPr marL="0" marR="0" indent="0" algn="r" defTabSz="914400" rtl="0" latinLnBrk="0">
         <a:lnSpc>
           <a:spcPct val="100000"/>
         </a:lnSpc>
@@ -2373,7 +2378,7 @@
           <a:sym typeface="Helvetica"/>
         </a:defRPr>
       </a:lvl3pPr>
-      <a:lvl4pPr marL="0" marR="0" indent="1371600" algn="r" defTabSz="914400" rtl="0" latinLnBrk="0">
+      <a:lvl4pPr marL="0" marR="0" indent="0" algn="r" defTabSz="914400" rtl="0" latinLnBrk="0">
         <a:lnSpc>
           <a:spcPct val="100000"/>
         </a:lnSpc>
@@ -2399,7 +2404,7 @@
           <a:sym typeface="Helvetica"/>
         </a:defRPr>
       </a:lvl4pPr>
-      <a:lvl5pPr marL="0" marR="0" indent="1828800" algn="r" defTabSz="914400" rtl="0" latinLnBrk="0">
+      <a:lvl5pPr marL="0" marR="0" indent="0" algn="r" defTabSz="914400" rtl="0" latinLnBrk="0">
         <a:lnSpc>
           <a:spcPct val="100000"/>
         </a:lnSpc>
@@ -2425,7 +2430,7 @@
           <a:sym typeface="Helvetica"/>
         </a:defRPr>
       </a:lvl5pPr>
-      <a:lvl6pPr marL="0" marR="0" indent="2286000" algn="r" defTabSz="914400" rtl="0" latinLnBrk="0">
+      <a:lvl6pPr marL="0" marR="0" indent="0" algn="r" defTabSz="914400" rtl="0" latinLnBrk="0">
         <a:lnSpc>
           <a:spcPct val="100000"/>
         </a:lnSpc>
@@ -2451,7 +2456,7 @@
           <a:sym typeface="Helvetica"/>
         </a:defRPr>
       </a:lvl6pPr>
-      <a:lvl7pPr marL="0" marR="0" indent="2743200" algn="r" defTabSz="914400" rtl="0" latinLnBrk="0">
+      <a:lvl7pPr marL="0" marR="0" indent="0" algn="r" defTabSz="914400" rtl="0" latinLnBrk="0">
         <a:lnSpc>
           <a:spcPct val="100000"/>
         </a:lnSpc>
@@ -2477,7 +2482,7 @@
           <a:sym typeface="Helvetica"/>
         </a:defRPr>
       </a:lvl7pPr>
-      <a:lvl8pPr marL="0" marR="0" indent="3200400" algn="r" defTabSz="914400" rtl="0" latinLnBrk="0">
+      <a:lvl8pPr marL="0" marR="0" indent="0" algn="r" defTabSz="914400" rtl="0" latinLnBrk="0">
         <a:lnSpc>
           <a:spcPct val="100000"/>
         </a:lnSpc>
@@ -2503,7 +2508,7 @@
           <a:sym typeface="Helvetica"/>
         </a:defRPr>
       </a:lvl8pPr>
-      <a:lvl9pPr marL="0" marR="0" indent="3657600" algn="r" defTabSz="914400" rtl="0" latinLnBrk="0">
+      <a:lvl9pPr marL="0" marR="0" indent="0" algn="r" defTabSz="914400" rtl="0" latinLnBrk="0">
         <a:lnSpc>
           <a:spcPct val="100000"/>
         </a:lnSpc>
@@ -2576,7 +2581,14 @@
           <a:bodyPr lIns="0" tIns="0" rIns="0" bIns="0"/>
           <a:lstStyle/>
           <a:p>
-            <a:pPr/>
+            <a:pPr>
+              <a:defRPr>
+                <a:latin typeface="+mn-lt"/>
+                <a:ea typeface="+mn-ea"/>
+                <a:cs typeface="+mn-cs"/>
+                <a:sym typeface="Helvetica"/>
+              </a:defRPr>
+            </a:pPr>
           </a:p>
         </p:txBody>
       </p:sp>
@@ -2588,8 +2600,8 @@
         </p:nvSpPr>
         <p:spPr>
           <a:xfrm>
-            <a:off x="6400800" y="-822962"/>
-            <a:ext cx="3840480" cy="3840484"/>
+            <a:off x="6400800" y="-822963"/>
+            <a:ext cx="3840480" cy="3840486"/>
           </a:xfrm>
           <a:prstGeom prst="ellipse">
             <a:avLst/>
@@ -2607,7 +2619,14 @@
           <a:bodyPr lIns="0" tIns="0" rIns="0" bIns="0"/>
           <a:lstStyle/>
           <a:p>
-            <a:pPr/>
+            <a:pPr>
+              <a:defRPr>
+                <a:latin typeface="+mn-lt"/>
+                <a:ea typeface="+mn-ea"/>
+                <a:cs typeface="+mn-cs"/>
+                <a:sym typeface="Helvetica"/>
+              </a:defRPr>
+            </a:pPr>
           </a:p>
         </p:txBody>
       </p:sp>
@@ -2620,7 +2639,7 @@
         <p:spPr>
           <a:xfrm>
             <a:off x="7223759" y="2377439"/>
-            <a:ext cx="2286003" cy="2286002"/>
+            <a:ext cx="2286005" cy="2286002"/>
           </a:xfrm>
           <a:prstGeom prst="ellipse">
             <a:avLst/>
@@ -2638,7 +2657,14 @@
           <a:bodyPr lIns="0" tIns="0" rIns="0" bIns="0"/>
           <a:lstStyle/>
           <a:p>
-            <a:pPr/>
+            <a:pPr>
+              <a:defRPr>
+                <a:latin typeface="+mn-lt"/>
+                <a:ea typeface="+mn-ea"/>
+                <a:cs typeface="+mn-cs"/>
+                <a:sym typeface="Helvetica"/>
+              </a:defRPr>
+            </a:pPr>
           </a:p>
         </p:txBody>
       </p:sp>
@@ -2650,8 +2676,8 @@
         </p:nvSpPr>
         <p:spPr>
           <a:xfrm>
-            <a:off x="502918" y="1188718"/>
-            <a:ext cx="6400803" cy="1371601"/>
+            <a:off x="502917" y="1188718"/>
+            <a:ext cx="6400805" cy="1371601"/>
           </a:xfrm>
           <a:prstGeom prst="rect">
             <a:avLst/>
@@ -2712,8 +2738,8 @@
         </p:nvSpPr>
         <p:spPr>
           <a:xfrm>
-            <a:off x="502918" y="2903219"/>
-            <a:ext cx="5486403" cy="228601"/>
+            <a:off x="502917" y="2903218"/>
+            <a:ext cx="5486405" cy="228601"/>
           </a:xfrm>
           <a:prstGeom prst="rect">
             <a:avLst/>
@@ -2737,6 +2763,10 @@
                 <a:solidFill>
                   <a:srgbClr val="4A9EBA"/>
                 </a:solidFill>
+                <a:latin typeface="+mn-lt"/>
+                <a:ea typeface="+mn-ea"/>
+                <a:cs typeface="+mn-cs"/>
+                <a:sym typeface="Helvetica"/>
               </a:defRPr>
             </a:lvl1pPr>
           </a:lstStyle>
@@ -2756,8 +2786,8 @@
         </p:nvSpPr>
         <p:spPr>
           <a:xfrm>
-            <a:off x="502918" y="3245103"/>
-            <a:ext cx="5486403" cy="203201"/>
+            <a:off x="502917" y="3245103"/>
+            <a:ext cx="5486405" cy="203201"/>
           </a:xfrm>
           <a:prstGeom prst="rect">
             <a:avLst/>
@@ -2781,6 +2811,10 @@
                 <a:solidFill>
                   <a:srgbClr val="8FA5BB"/>
                 </a:solidFill>
+                <a:latin typeface="+mn-lt"/>
+                <a:ea typeface="+mn-ea"/>
+                <a:cs typeface="+mn-cs"/>
+                <a:sym typeface="Helvetica"/>
               </a:defRPr>
             </a:lvl1pPr>
           </a:lstStyle>
@@ -2800,7 +2834,7 @@
         </p:nvSpPr>
         <p:spPr>
           <a:xfrm>
-            <a:off x="502920" y="4715255"/>
+            <a:off x="502920" y="4715254"/>
             <a:ext cx="8138160" cy="152401"/>
           </a:xfrm>
           <a:prstGeom prst="rect">
@@ -2825,6 +2859,10 @@
                 <a:solidFill>
                   <a:srgbClr val="8FA5BB"/>
                 </a:solidFill>
+                <a:latin typeface="+mn-lt"/>
+                <a:ea typeface="+mn-ea"/>
+                <a:cs typeface="+mn-cs"/>
+                <a:sym typeface="Helvetica"/>
               </a:defRPr>
             </a:lvl1pPr>
           </a:lstStyle>
@@ -2870,8 +2908,8 @@
         </p:nvSpPr>
         <p:spPr>
           <a:xfrm>
-            <a:off x="0" y="-2"/>
-            <a:ext cx="9144001" cy="5143503"/>
+            <a:off x="0" y="-3"/>
+            <a:ext cx="9144001" cy="5143505"/>
           </a:xfrm>
           <a:prstGeom prst="rect">
             <a:avLst/>
@@ -2887,7 +2925,14 @@
           <a:bodyPr lIns="0" tIns="0" rIns="0" bIns="0"/>
           <a:lstStyle/>
           <a:p>
-            <a:pPr/>
+            <a:pPr>
+              <a:defRPr>
+                <a:latin typeface="+mn-lt"/>
+                <a:ea typeface="+mn-ea"/>
+                <a:cs typeface="+mn-cs"/>
+                <a:sym typeface="Helvetica"/>
+              </a:defRPr>
+            </a:pPr>
           </a:p>
         </p:txBody>
       </p:sp>
@@ -2968,7 +3013,14 @@
           <a:bodyPr lIns="0" tIns="0" rIns="0" bIns="0"/>
           <a:lstStyle/>
           <a:p>
-            <a:pPr/>
+            <a:pPr>
+              <a:defRPr>
+                <a:latin typeface="+mn-lt"/>
+                <a:ea typeface="+mn-ea"/>
+                <a:cs typeface="+mn-cs"/>
+                <a:sym typeface="Helvetica"/>
+              </a:defRPr>
+            </a:pPr>
           </a:p>
         </p:txBody>
       </p:sp>
@@ -2980,8 +3032,8 @@
         </p:nvSpPr>
         <p:spPr>
           <a:xfrm>
-            <a:off x="4195445" y="1149949"/>
-            <a:ext cx="2289812" cy="214700"/>
+            <a:off x="4195445" y="1149948"/>
+            <a:ext cx="2289813" cy="214698"/>
           </a:xfrm>
           <a:prstGeom prst="rect">
             <a:avLst/>
@@ -3045,7 +3097,14 @@
           <a:bodyPr lIns="0" tIns="0" rIns="0" bIns="0"/>
           <a:lstStyle/>
           <a:p>
-            <a:pPr/>
+            <a:pPr>
+              <a:defRPr>
+                <a:latin typeface="+mn-lt"/>
+                <a:ea typeface="+mn-ea"/>
+                <a:cs typeface="+mn-cs"/>
+                <a:sym typeface="Helvetica"/>
+              </a:defRPr>
+            </a:pPr>
           </a:p>
         </p:txBody>
       </p:sp>
@@ -3074,7 +3133,14 @@
           <a:bodyPr lIns="0" tIns="0" rIns="0" bIns="0"/>
           <a:lstStyle/>
           <a:p>
-            <a:pPr/>
+            <a:pPr>
+              <a:defRPr>
+                <a:latin typeface="+mn-lt"/>
+                <a:ea typeface="+mn-ea"/>
+                <a:cs typeface="+mn-cs"/>
+                <a:sym typeface="Helvetica"/>
+              </a:defRPr>
+            </a:pPr>
           </a:p>
         </p:txBody>
       </p:sp>
@@ -3103,7 +3169,14 @@
           <a:bodyPr lIns="0" tIns="0" rIns="0" bIns="0"/>
           <a:lstStyle/>
           <a:p>
-            <a:pPr/>
+            <a:pPr>
+              <a:defRPr>
+                <a:latin typeface="+mn-lt"/>
+                <a:ea typeface="+mn-ea"/>
+                <a:cs typeface="+mn-cs"/>
+                <a:sym typeface="Helvetica"/>
+              </a:defRPr>
+            </a:pPr>
           </a:p>
         </p:txBody>
       </p:sp>
@@ -3132,7 +3205,14 @@
           <a:bodyPr lIns="0" tIns="0" rIns="0" bIns="0"/>
           <a:lstStyle/>
           <a:p>
-            <a:pPr/>
+            <a:pPr>
+              <a:defRPr>
+                <a:latin typeface="+mn-lt"/>
+                <a:ea typeface="+mn-ea"/>
+                <a:cs typeface="+mn-cs"/>
+                <a:sym typeface="Helvetica"/>
+              </a:defRPr>
+            </a:pPr>
           </a:p>
         </p:txBody>
       </p:sp>
@@ -3161,7 +3241,14 @@
           <a:bodyPr lIns="0" tIns="0" rIns="0" bIns="0"/>
           <a:lstStyle/>
           <a:p>
-            <a:pPr/>
+            <a:pPr>
+              <a:defRPr>
+                <a:latin typeface="+mn-lt"/>
+                <a:ea typeface="+mn-ea"/>
+                <a:cs typeface="+mn-cs"/>
+                <a:sym typeface="Helvetica"/>
+              </a:defRPr>
+            </a:pPr>
           </a:p>
         </p:txBody>
       </p:sp>
@@ -3190,7 +3277,14 @@
           <a:bodyPr lIns="0" tIns="0" rIns="0" bIns="0"/>
           <a:lstStyle/>
           <a:p>
-            <a:pPr/>
+            <a:pPr>
+              <a:defRPr>
+                <a:latin typeface="+mn-lt"/>
+                <a:ea typeface="+mn-ea"/>
+                <a:cs typeface="+mn-cs"/>
+                <a:sym typeface="Helvetica"/>
+              </a:defRPr>
+            </a:pPr>
           </a:p>
         </p:txBody>
       </p:sp>
@@ -3219,7 +3313,14 @@
           <a:bodyPr lIns="0" tIns="0" rIns="0" bIns="0"/>
           <a:lstStyle/>
           <a:p>
-            <a:pPr/>
+            <a:pPr>
+              <a:defRPr>
+                <a:latin typeface="+mn-lt"/>
+                <a:ea typeface="+mn-ea"/>
+                <a:cs typeface="+mn-cs"/>
+                <a:sym typeface="Helvetica"/>
+              </a:defRPr>
+            </a:pPr>
           </a:p>
         </p:txBody>
       </p:sp>
@@ -3248,7 +3349,14 @@
           <a:bodyPr lIns="0" tIns="0" rIns="0" bIns="0"/>
           <a:lstStyle/>
           <a:p>
-            <a:pPr/>
+            <a:pPr>
+              <a:defRPr>
+                <a:latin typeface="+mn-lt"/>
+                <a:ea typeface="+mn-ea"/>
+                <a:cs typeface="+mn-cs"/>
+                <a:sym typeface="Helvetica"/>
+              </a:defRPr>
+            </a:pPr>
           </a:p>
         </p:txBody>
       </p:sp>
@@ -3277,7 +3385,14 @@
           <a:bodyPr lIns="0" tIns="0" rIns="0" bIns="0"/>
           <a:lstStyle/>
           <a:p>
-            <a:pPr/>
+            <a:pPr>
+              <a:defRPr>
+                <a:latin typeface="+mn-lt"/>
+                <a:ea typeface="+mn-ea"/>
+                <a:cs typeface="+mn-cs"/>
+                <a:sym typeface="Helvetica"/>
+              </a:defRPr>
+            </a:pPr>
           </a:p>
         </p:txBody>
       </p:sp>
@@ -3290,7 +3405,7 @@
         <p:spPr>
           <a:xfrm flipV="1">
             <a:off x="4868045" y="1670818"/>
-            <a:ext cx="2659111" cy="1097011"/>
+            <a:ext cx="2659112" cy="1097012"/>
           </a:xfrm>
           <a:prstGeom prst="line">
             <a:avLst/>
@@ -3302,7 +3417,7 @@
           </a:ln>
         </p:spPr>
         <p:txBody>
-          <a:bodyPr lIns="0" tIns="0" rIns="0" bIns="0"/>
+          <a:bodyPr lIns="45718" tIns="45718" rIns="45718" bIns="45718"/>
           <a:lstStyle/>
           <a:p>
             <a:pPr/>
@@ -3318,7 +3433,7 @@
         <p:spPr>
           <a:xfrm flipV="1">
             <a:off x="4868045" y="1670818"/>
-            <a:ext cx="2659111" cy="1097011"/>
+            <a:ext cx="2659112" cy="1097012"/>
           </a:xfrm>
           <a:prstGeom prst="line">
             <a:avLst/>
@@ -3331,7 +3446,7 @@
           </a:ln>
         </p:spPr>
         <p:txBody>
-          <a:bodyPr lIns="0" tIns="0" rIns="0" bIns="0"/>
+          <a:bodyPr lIns="45718" tIns="45718" rIns="45718" bIns="45718"/>
           <a:lstStyle/>
           <a:p>
             <a:pPr/>
@@ -3347,7 +3462,7 @@
         <p:spPr>
           <a:xfrm>
             <a:off x="4873625" y="2781300"/>
-            <a:ext cx="2981326" cy="0"/>
+            <a:ext cx="2981327" cy="0"/>
           </a:xfrm>
           <a:prstGeom prst="line">
             <a:avLst/>
@@ -3359,7 +3474,7 @@
           </a:ln>
         </p:spPr>
         <p:txBody>
-          <a:bodyPr lIns="0" tIns="0" rIns="0" bIns="0"/>
+          <a:bodyPr lIns="45718" tIns="45718" rIns="45718" bIns="45718"/>
           <a:lstStyle/>
           <a:p>
             <a:pPr/>
@@ -3375,7 +3490,7 @@
         <p:spPr>
           <a:xfrm>
             <a:off x="4873625" y="2781300"/>
-            <a:ext cx="2981326" cy="0"/>
+            <a:ext cx="2981327" cy="0"/>
           </a:xfrm>
           <a:prstGeom prst="line">
             <a:avLst/>
@@ -3388,7 +3503,7 @@
           </a:ln>
         </p:spPr>
         <p:txBody>
-          <a:bodyPr lIns="0" tIns="0" rIns="0" bIns="0"/>
+          <a:bodyPr lIns="45718" tIns="45718" rIns="45718" bIns="45718"/>
           <a:lstStyle/>
           <a:p>
             <a:pPr/>
@@ -3403,8 +3518,8 @@
         </p:nvSpPr>
         <p:spPr>
           <a:xfrm>
-            <a:off x="4868045" y="2794768"/>
-            <a:ext cx="2563861" cy="1087487"/>
+            <a:off x="4868045" y="2794767"/>
+            <a:ext cx="2563862" cy="1087488"/>
           </a:xfrm>
           <a:prstGeom prst="line">
             <a:avLst/>
@@ -3416,7 +3531,7 @@
           </a:ln>
         </p:spPr>
         <p:txBody>
-          <a:bodyPr lIns="0" tIns="0" rIns="0" bIns="0"/>
+          <a:bodyPr lIns="45718" tIns="45718" rIns="45718" bIns="45718"/>
           <a:lstStyle/>
           <a:p>
             <a:pPr/>
@@ -3431,8 +3546,8 @@
         </p:nvSpPr>
         <p:spPr>
           <a:xfrm>
-            <a:off x="4868045" y="2794768"/>
-            <a:ext cx="2563861" cy="1087487"/>
+            <a:off x="4868045" y="2794767"/>
+            <a:ext cx="2563862" cy="1087488"/>
           </a:xfrm>
           <a:prstGeom prst="line">
             <a:avLst/>
@@ -3445,7 +3560,7 @@
           </a:ln>
         </p:spPr>
         <p:txBody>
-          <a:bodyPr lIns="0" tIns="0" rIns="0" bIns="0"/>
+          <a:bodyPr lIns="45718" tIns="45718" rIns="45718" bIns="45718"/>
           <a:lstStyle/>
           <a:p>
             <a:pPr/>
@@ -3461,7 +3576,7 @@
         <p:spPr>
           <a:xfrm>
             <a:off x="4873625" y="2781300"/>
-            <a:ext cx="1666876" cy="0"/>
+            <a:ext cx="1666877" cy="0"/>
           </a:xfrm>
           <a:prstGeom prst="line">
             <a:avLst/>
@@ -3474,7 +3589,7 @@
           </a:ln>
         </p:spPr>
         <p:txBody>
-          <a:bodyPr lIns="0" tIns="0" rIns="0" bIns="0"/>
+          <a:bodyPr lIns="45718" tIns="45718" rIns="45718" bIns="45718"/>
           <a:lstStyle/>
           <a:p>
             <a:pPr/>
@@ -3490,7 +3605,7 @@
         <p:spPr>
           <a:xfrm flipH="1" flipV="1">
             <a:off x="5683250" y="2438399"/>
-            <a:ext cx="857251" cy="342901"/>
+            <a:ext cx="857251" cy="342902"/>
           </a:xfrm>
           <a:prstGeom prst="line">
             <a:avLst/>
@@ -3503,7 +3618,7 @@
           </a:ln>
         </p:spPr>
         <p:txBody>
-          <a:bodyPr lIns="0" tIns="0" rIns="0" bIns="0"/>
+          <a:bodyPr lIns="45718" tIns="45718" rIns="45718" bIns="45718"/>
           <a:lstStyle/>
           <a:p>
             <a:pPr/>
@@ -3519,7 +3634,7 @@
         <p:spPr>
           <a:xfrm flipH="1">
             <a:off x="5635623" y="2781300"/>
-            <a:ext cx="904877" cy="323851"/>
+            <a:ext cx="904878" cy="323852"/>
           </a:xfrm>
           <a:prstGeom prst="line">
             <a:avLst/>
@@ -3532,7 +3647,7 @@
           </a:ln>
         </p:spPr>
         <p:txBody>
-          <a:bodyPr lIns="0" tIns="0" rIns="0" bIns="0"/>
+          <a:bodyPr lIns="45718" tIns="45718" rIns="45718" bIns="45718"/>
           <a:lstStyle/>
           <a:p>
             <a:pPr/>
@@ -3566,7 +3681,14 @@
           <a:bodyPr lIns="0" tIns="0" rIns="0" bIns="0"/>
           <a:lstStyle/>
           <a:p>
-            <a:pPr/>
+            <a:pPr>
+              <a:defRPr>
+                <a:latin typeface="+mn-lt"/>
+                <a:ea typeface="+mn-ea"/>
+                <a:cs typeface="+mn-cs"/>
+                <a:sym typeface="Helvetica"/>
+              </a:defRPr>
+            </a:pPr>
           </a:p>
         </p:txBody>
       </p:sp>
@@ -3578,8 +3700,8 @@
         </p:nvSpPr>
         <p:spPr>
           <a:xfrm>
-            <a:off x="4490720" y="2893024"/>
-            <a:ext cx="727712" cy="214700"/>
+            <a:off x="4490720" y="2893023"/>
+            <a:ext cx="727713" cy="214698"/>
           </a:xfrm>
           <a:prstGeom prst="rect">
             <a:avLst/>
@@ -3645,7 +3767,14 @@
           <a:bodyPr lIns="0" tIns="0" rIns="0" bIns="0"/>
           <a:lstStyle/>
           <a:p>
-            <a:pPr/>
+            <a:pPr>
+              <a:defRPr>
+                <a:latin typeface="+mn-lt"/>
+                <a:ea typeface="+mn-ea"/>
+                <a:cs typeface="+mn-cs"/>
+                <a:sym typeface="Helvetica"/>
+              </a:defRPr>
+            </a:pPr>
           </a:p>
         </p:txBody>
       </p:sp>
@@ -3657,8 +3786,8 @@
         </p:nvSpPr>
         <p:spPr>
           <a:xfrm>
-            <a:off x="7776843" y="1512938"/>
-            <a:ext cx="441962" cy="288823"/>
+            <a:off x="7776843" y="1512937"/>
+            <a:ext cx="441962" cy="288821"/>
           </a:xfrm>
           <a:prstGeom prst="rect">
             <a:avLst/>
@@ -3724,7 +3853,14 @@
           <a:bodyPr lIns="0" tIns="0" rIns="0" bIns="0"/>
           <a:lstStyle/>
           <a:p>
-            <a:pPr/>
+            <a:pPr>
+              <a:defRPr>
+                <a:latin typeface="+mn-lt"/>
+                <a:ea typeface="+mn-ea"/>
+                <a:cs typeface="+mn-cs"/>
+                <a:sym typeface="Helvetica"/>
+              </a:defRPr>
+            </a:pPr>
           </a:p>
         </p:txBody>
       </p:sp>
@@ -3736,8 +3872,8 @@
         </p:nvSpPr>
         <p:spPr>
           <a:xfrm>
-            <a:off x="8081643" y="2630747"/>
-            <a:ext cx="632462" cy="301106"/>
+            <a:off x="8081643" y="2630746"/>
+            <a:ext cx="632463" cy="301105"/>
           </a:xfrm>
           <a:prstGeom prst="rect">
             <a:avLst/>
@@ -3803,7 +3939,14 @@
           <a:bodyPr lIns="0" tIns="0" rIns="0" bIns="0"/>
           <a:lstStyle/>
           <a:p>
-            <a:pPr/>
+            <a:pPr>
+              <a:defRPr>
+                <a:latin typeface="+mn-lt"/>
+                <a:ea typeface="+mn-ea"/>
+                <a:cs typeface="+mn-cs"/>
+                <a:sym typeface="Helvetica"/>
+              </a:defRPr>
+            </a:pPr>
           </a:p>
         </p:txBody>
       </p:sp>
@@ -3815,8 +3958,8 @@
         </p:nvSpPr>
         <p:spPr>
           <a:xfrm>
-            <a:off x="7633968" y="3751313"/>
-            <a:ext cx="1032512" cy="288823"/>
+            <a:off x="7633968" y="3751312"/>
+            <a:ext cx="1032513" cy="288821"/>
           </a:xfrm>
           <a:prstGeom prst="rect">
             <a:avLst/>
@@ -3880,7 +4023,14 @@
           <a:bodyPr lIns="0" tIns="0" rIns="0" bIns="0"/>
           <a:lstStyle/>
           <a:p>
-            <a:pPr/>
+            <a:pPr>
+              <a:defRPr>
+                <a:latin typeface="+mn-lt"/>
+                <a:ea typeface="+mn-ea"/>
+                <a:cs typeface="+mn-cs"/>
+                <a:sym typeface="Helvetica"/>
+              </a:defRPr>
+            </a:pPr>
           </a:p>
         </p:txBody>
       </p:sp>
@@ -3911,7 +4061,14 @@
           <a:bodyPr lIns="0" tIns="0" rIns="0" bIns="0"/>
           <a:lstStyle/>
           <a:p>
-            <a:pPr/>
+            <a:pPr>
+              <a:defRPr>
+                <a:latin typeface="+mn-lt"/>
+                <a:ea typeface="+mn-ea"/>
+                <a:cs typeface="+mn-cs"/>
+                <a:sym typeface="Helvetica"/>
+              </a:defRPr>
+            </a:pPr>
           </a:p>
         </p:txBody>
       </p:sp>
@@ -3923,8 +4080,8 @@
         </p:nvSpPr>
         <p:spPr>
           <a:xfrm>
-            <a:off x="6005195" y="2998007"/>
-            <a:ext cx="1108712" cy="366685"/>
+            <a:off x="6005195" y="2998006"/>
+            <a:ext cx="1108713" cy="366683"/>
           </a:xfrm>
           <a:prstGeom prst="rect">
             <a:avLst/>
@@ -3990,7 +4147,14 @@
           <a:bodyPr lIns="0" tIns="0" rIns="0" bIns="0"/>
           <a:lstStyle/>
           <a:p>
-            <a:pPr/>
+            <a:pPr>
+              <a:defRPr>
+                <a:latin typeface="+mn-lt"/>
+                <a:ea typeface="+mn-ea"/>
+                <a:cs typeface="+mn-cs"/>
+                <a:sym typeface="Helvetica"/>
+              </a:defRPr>
+            </a:pPr>
           </a:p>
         </p:txBody>
       </p:sp>
@@ -4018,7 +4182,14 @@
           <a:bodyPr lIns="0" tIns="0" rIns="0" bIns="0"/>
           <a:lstStyle/>
           <a:p>
-            <a:pPr/>
+            <a:pPr>
+              <a:defRPr>
+                <a:latin typeface="+mn-lt"/>
+                <a:ea typeface="+mn-ea"/>
+                <a:cs typeface="+mn-cs"/>
+                <a:sym typeface="Helvetica"/>
+              </a:defRPr>
+            </a:pPr>
           </a:p>
         </p:txBody>
       </p:sp>
@@ -4049,7 +4220,14 @@
           <a:bodyPr lIns="0" tIns="0" rIns="0" bIns="0"/>
           <a:lstStyle/>
           <a:p>
-            <a:pPr/>
+            <a:pPr>
+              <a:defRPr>
+                <a:latin typeface="+mn-lt"/>
+                <a:ea typeface="+mn-ea"/>
+                <a:cs typeface="+mn-cs"/>
+                <a:sym typeface="Helvetica"/>
+              </a:defRPr>
+            </a:pPr>
           </a:p>
         </p:txBody>
       </p:sp>
@@ -4061,8 +4239,8 @@
         </p:nvSpPr>
         <p:spPr>
           <a:xfrm>
-            <a:off x="4300220" y="1778599"/>
-            <a:ext cx="1261112" cy="214700"/>
+            <a:off x="4300220" y="1778598"/>
+            <a:ext cx="1261113" cy="214698"/>
           </a:xfrm>
           <a:prstGeom prst="rect">
             <a:avLst/>
@@ -4109,8 +4287,8 @@
         </p:nvSpPr>
         <p:spPr>
           <a:xfrm>
-            <a:off x="5976620" y="2363007"/>
-            <a:ext cx="1470662" cy="226985"/>
+            <a:off x="5976620" y="2363006"/>
+            <a:ext cx="1470663" cy="226983"/>
           </a:xfrm>
           <a:prstGeom prst="rect">
             <a:avLst/>
@@ -4157,8 +4335,8 @@
         </p:nvSpPr>
         <p:spPr>
           <a:xfrm>
-            <a:off x="560069" y="4433731"/>
-            <a:ext cx="8023860" cy="276537"/>
+            <a:off x="560069" y="4433730"/>
+            <a:ext cx="8023860" cy="276536"/>
           </a:xfrm>
           <a:prstGeom prst="rect">
             <a:avLst/>
@@ -4225,8 +4403,8 @@
         </p:nvSpPr>
         <p:spPr>
           <a:xfrm>
-            <a:off x="5760720" y="4804167"/>
-            <a:ext cx="2918462" cy="202415"/>
+            <a:off x="5760720" y="4804166"/>
+            <a:ext cx="2918463" cy="202414"/>
           </a:xfrm>
           <a:prstGeom prst="rect">
             <a:avLst/>
@@ -4274,7 +4452,7 @@
         <p:spPr>
           <a:xfrm>
             <a:off x="269081" y="1938338"/>
-            <a:ext cx="2190751" cy="876302"/>
+            <a:ext cx="2190751" cy="876303"/>
           </a:xfrm>
           <a:prstGeom prst="roundRect">
             <a:avLst>
@@ -4294,7 +4472,14 @@
           <a:bodyPr lIns="0" tIns="0" rIns="0" bIns="0"/>
           <a:lstStyle/>
           <a:p>
-            <a:pPr/>
+            <a:pPr>
+              <a:defRPr>
+                <a:latin typeface="+mn-lt"/>
+                <a:ea typeface="+mn-ea"/>
+                <a:cs typeface="+mn-cs"/>
+                <a:sym typeface="Helvetica"/>
+              </a:defRPr>
+            </a:pPr>
           </a:p>
         </p:txBody>
       </p:sp>
@@ -4307,7 +4492,7 @@
         <p:spPr>
           <a:xfrm>
             <a:off x="457675" y="1983388"/>
-            <a:ext cx="594362" cy="214699"/>
+            <a:ext cx="594363" cy="214697"/>
           </a:xfrm>
           <a:prstGeom prst="rect">
             <a:avLst/>
@@ -4375,7 +4560,14 @@
           <a:bodyPr lIns="0" tIns="0" rIns="0" bIns="0"/>
           <a:lstStyle/>
           <a:p>
-            <a:pPr/>
+            <a:pPr>
+              <a:defRPr>
+                <a:latin typeface="+mn-lt"/>
+                <a:ea typeface="+mn-ea"/>
+                <a:cs typeface="+mn-cs"/>
+                <a:sym typeface="Helvetica"/>
+              </a:defRPr>
+            </a:pPr>
           </a:p>
         </p:txBody>
       </p:sp>
@@ -4387,8 +4579,8 @@
         </p:nvSpPr>
         <p:spPr>
           <a:xfrm>
-            <a:off x="3055620" y="2085477"/>
-            <a:ext cx="670562" cy="362945"/>
+            <a:off x="3055620" y="2085476"/>
+            <a:ext cx="670563" cy="362943"/>
           </a:xfrm>
           <a:prstGeom prst="rect">
             <a:avLst/>
@@ -4435,8 +4627,8 @@
         </p:nvSpPr>
         <p:spPr>
           <a:xfrm>
-            <a:off x="2998470" y="2540807"/>
-            <a:ext cx="784862" cy="366685"/>
+            <a:off x="2998470" y="2540806"/>
+            <a:ext cx="784863" cy="366683"/>
           </a:xfrm>
           <a:prstGeom prst="rect">
             <a:avLst/>
@@ -4514,7 +4706,14 @@
           <a:bodyPr lIns="0" tIns="0" rIns="0" bIns="0"/>
           <a:lstStyle/>
           <a:p>
-            <a:pPr/>
+            <a:pPr>
+              <a:defRPr>
+                <a:latin typeface="+mn-lt"/>
+                <a:ea typeface="+mn-ea"/>
+                <a:cs typeface="+mn-cs"/>
+                <a:sym typeface="Helvetica"/>
+              </a:defRPr>
+            </a:pPr>
           </a:p>
         </p:txBody>
       </p:sp>
@@ -4543,7 +4742,14 @@
           <a:bodyPr lIns="0" tIns="0" rIns="0" bIns="0"/>
           <a:lstStyle/>
           <a:p>
-            <a:pPr/>
+            <a:pPr>
+              <a:defRPr>
+                <a:latin typeface="+mn-lt"/>
+                <a:ea typeface="+mn-ea"/>
+                <a:cs typeface="+mn-cs"/>
+                <a:sym typeface="Helvetica"/>
+              </a:defRPr>
+            </a:pPr>
           </a:p>
         </p:txBody>
       </p:sp>
@@ -4572,7 +4778,14 @@
           <a:bodyPr lIns="0" tIns="0" rIns="0" bIns="0"/>
           <a:lstStyle/>
           <a:p>
-            <a:pPr/>
+            <a:pPr>
+              <a:defRPr>
+                <a:latin typeface="+mn-lt"/>
+                <a:ea typeface="+mn-ea"/>
+                <a:cs typeface="+mn-cs"/>
+                <a:sym typeface="Helvetica"/>
+              </a:defRPr>
+            </a:pPr>
           </a:p>
         </p:txBody>
       </p:sp>
@@ -4601,7 +4814,14 @@
           <a:bodyPr lIns="0" tIns="0" rIns="0" bIns="0"/>
           <a:lstStyle/>
           <a:p>
-            <a:pPr/>
+            <a:pPr>
+              <a:defRPr>
+                <a:latin typeface="+mn-lt"/>
+                <a:ea typeface="+mn-ea"/>
+                <a:cs typeface="+mn-cs"/>
+                <a:sym typeface="Helvetica"/>
+              </a:defRPr>
+            </a:pPr>
           </a:p>
         </p:txBody>
       </p:sp>
@@ -4630,7 +4850,14 @@
           <a:bodyPr lIns="0" tIns="0" rIns="0" bIns="0"/>
           <a:lstStyle/>
           <a:p>
-            <a:pPr/>
+            <a:pPr>
+              <a:defRPr>
+                <a:latin typeface="+mn-lt"/>
+                <a:ea typeface="+mn-ea"/>
+                <a:cs typeface="+mn-cs"/>
+                <a:sym typeface="Helvetica"/>
+              </a:defRPr>
+            </a:pPr>
           </a:p>
         </p:txBody>
       </p:sp>
@@ -4642,8 +4869,8 @@
         </p:nvSpPr>
         <p:spPr>
           <a:xfrm>
-            <a:off x="2507851" y="2376488"/>
-            <a:ext cx="311152" cy="2"/>
+            <a:off x="2507850" y="2376488"/>
+            <a:ext cx="311153" cy="3"/>
           </a:xfrm>
           <a:prstGeom prst="line">
             <a:avLst/>
@@ -4656,7 +4883,7 @@
           </a:ln>
         </p:spPr>
         <p:txBody>
-          <a:bodyPr lIns="0" tIns="0" rIns="0" bIns="0"/>
+          <a:bodyPr lIns="45718" tIns="45718" rIns="45718" bIns="45718"/>
           <a:lstStyle/>
           <a:p>
             <a:pPr/>
@@ -4672,7 +4899,7 @@
         <p:spPr>
           <a:xfrm>
             <a:off x="3889959" y="2532307"/>
-            <a:ext cx="2288592" cy="191845"/>
+            <a:ext cx="2288593" cy="191846"/>
           </a:xfrm>
           <a:prstGeom prst="line">
             <a:avLst/>
@@ -4686,7 +4913,7 @@
           </a:ln>
         </p:spPr>
         <p:txBody>
-          <a:bodyPr lIns="0" tIns="0" rIns="0" bIns="0"/>
+          <a:bodyPr lIns="45718" tIns="45718" rIns="45718" bIns="45718"/>
           <a:lstStyle/>
           <a:p>
             <a:pPr/>
@@ -4702,7 +4929,7 @@
         <p:spPr>
           <a:xfrm>
             <a:off x="457675" y="2304894"/>
-            <a:ext cx="1813563" cy="276537"/>
+            <a:ext cx="1813563" cy="276535"/>
           </a:xfrm>
           <a:prstGeom prst="rect">
             <a:avLst/>
@@ -4792,7 +5019,14 @@
           <a:bodyPr lIns="0" tIns="0" rIns="0" bIns="0"/>
           <a:lstStyle/>
           <a:p>
-            <a:pPr/>
+            <a:pPr>
+              <a:defRPr>
+                <a:latin typeface="+mn-lt"/>
+                <a:ea typeface="+mn-ea"/>
+                <a:cs typeface="+mn-cs"/>
+                <a:sym typeface="Helvetica"/>
+              </a:defRPr>
+            </a:pPr>
           </a:p>
         </p:txBody>
       </p:sp>
@@ -4804,7 +5038,7 @@
         </p:nvSpPr>
         <p:spPr>
           <a:xfrm>
-            <a:off x="411479" y="164590"/>
+            <a:off x="411479" y="164589"/>
             <a:ext cx="8321041" cy="685801"/>
           </a:xfrm>
           <a:prstGeom prst="rect">
@@ -4877,6 +5111,10 @@
                 <a:solidFill>
                   <a:srgbClr val="EEF2F7"/>
                 </a:solidFill>
+                <a:latin typeface="+mn-lt"/>
+                <a:ea typeface="+mn-ea"/>
+                <a:cs typeface="+mn-cs"/>
+                <a:sym typeface="Helvetica"/>
               </a:defRPr>
             </a:lvl1pPr>
           </a:lstStyle>
@@ -4897,7 +5135,7 @@
         <p:spPr>
           <a:xfrm>
             <a:off x="411480" y="1389888"/>
-            <a:ext cx="1828801" cy="301754"/>
+            <a:ext cx="1828801" cy="301755"/>
           </a:xfrm>
           <a:prstGeom prst="roundRect">
             <a:avLst>
@@ -4915,7 +5153,14 @@
           <a:bodyPr lIns="0" tIns="0" rIns="0" bIns="0"/>
           <a:lstStyle/>
           <a:p>
-            <a:pPr/>
+            <a:pPr>
+              <a:defRPr>
+                <a:latin typeface="+mn-lt"/>
+                <a:ea typeface="+mn-ea"/>
+                <a:cs typeface="+mn-cs"/>
+                <a:sym typeface="Helvetica"/>
+              </a:defRPr>
+            </a:pPr>
           </a:p>
         </p:txBody>
       </p:sp>
@@ -4927,7 +5172,7 @@
         </p:nvSpPr>
         <p:spPr>
           <a:xfrm>
-            <a:off x="411480" y="1458214"/>
+            <a:off x="411480" y="1458213"/>
             <a:ext cx="1828802" cy="165101"/>
           </a:xfrm>
           <a:prstGeom prst="rect">
@@ -4952,6 +5197,10 @@
                 <a:solidFill>
                   <a:srgbClr val="FFFFFF"/>
                 </a:solidFill>
+                <a:latin typeface="+mn-lt"/>
+                <a:ea typeface="+mn-ea"/>
+                <a:cs typeface="+mn-cs"/>
+                <a:sym typeface="Helvetica"/>
               </a:defRPr>
             </a:lvl1pPr>
           </a:lstStyle>
@@ -4971,8 +5220,8 @@
         </p:nvSpPr>
         <p:spPr>
           <a:xfrm>
-            <a:off x="2468878" y="1389888"/>
-            <a:ext cx="1828802" cy="301754"/>
+            <a:off x="2468877" y="1389888"/>
+            <a:ext cx="1828803" cy="301755"/>
           </a:xfrm>
           <a:prstGeom prst="roundRect">
             <a:avLst>
@@ -4990,7 +5239,14 @@
           <a:bodyPr lIns="0" tIns="0" rIns="0" bIns="0"/>
           <a:lstStyle/>
           <a:p>
-            <a:pPr/>
+            <a:pPr>
+              <a:defRPr>
+                <a:latin typeface="+mn-lt"/>
+                <a:ea typeface="+mn-ea"/>
+                <a:cs typeface="+mn-cs"/>
+                <a:sym typeface="Helvetica"/>
+              </a:defRPr>
+            </a:pPr>
           </a:p>
         </p:txBody>
       </p:sp>
@@ -5002,7 +5258,7 @@
         </p:nvSpPr>
         <p:spPr>
           <a:xfrm>
-            <a:off x="2468878" y="1458214"/>
+            <a:off x="2468878" y="1458213"/>
             <a:ext cx="1828802" cy="165101"/>
           </a:xfrm>
           <a:prstGeom prst="rect">
@@ -5027,6 +5283,10 @@
                 <a:solidFill>
                   <a:srgbClr val="FFFFFF"/>
                 </a:solidFill>
+                <a:latin typeface="+mn-lt"/>
+                <a:ea typeface="+mn-ea"/>
+                <a:cs typeface="+mn-cs"/>
+                <a:sym typeface="Helvetica"/>
               </a:defRPr>
             </a:lvl1pPr>
           </a:lstStyle>
@@ -5065,7 +5325,14 @@
           <a:bodyPr lIns="0" tIns="0" rIns="0" bIns="0"/>
           <a:lstStyle/>
           <a:p>
-            <a:pPr/>
+            <a:pPr>
+              <a:defRPr>
+                <a:latin typeface="+mn-lt"/>
+                <a:ea typeface="+mn-ea"/>
+                <a:cs typeface="+mn-cs"/>
+                <a:sym typeface="Helvetica"/>
+              </a:defRPr>
+            </a:pPr>
           </a:p>
         </p:txBody>
       </p:sp>
@@ -5102,6 +5369,10 @@
                 <a:solidFill>
                   <a:srgbClr val="FFFFFF"/>
                 </a:solidFill>
+                <a:latin typeface="+mn-lt"/>
+                <a:ea typeface="+mn-ea"/>
+                <a:cs typeface="+mn-cs"/>
+                <a:sym typeface="Helvetica"/>
               </a:defRPr>
             </a:lvl1pPr>
           </a:lstStyle>
@@ -5121,8 +5392,8 @@
         </p:nvSpPr>
         <p:spPr>
           <a:xfrm>
-            <a:off x="2468878" y="1792222"/>
-            <a:ext cx="1828802" cy="301754"/>
+            <a:off x="2468877" y="1792222"/>
+            <a:ext cx="1828803" cy="301754"/>
           </a:xfrm>
           <a:prstGeom prst="roundRect">
             <a:avLst>
@@ -5140,7 +5411,14 @@
           <a:bodyPr lIns="0" tIns="0" rIns="0" bIns="0"/>
           <a:lstStyle/>
           <a:p>
-            <a:pPr/>
+            <a:pPr>
+              <a:defRPr>
+                <a:latin typeface="+mn-lt"/>
+                <a:ea typeface="+mn-ea"/>
+                <a:cs typeface="+mn-cs"/>
+                <a:sym typeface="Helvetica"/>
+              </a:defRPr>
+            </a:pPr>
           </a:p>
         </p:txBody>
       </p:sp>
@@ -5177,6 +5455,10 @@
                 <a:solidFill>
                   <a:srgbClr val="FFFFFF"/>
                 </a:solidFill>
+                <a:latin typeface="+mn-lt"/>
+                <a:ea typeface="+mn-ea"/>
+                <a:cs typeface="+mn-cs"/>
+                <a:sym typeface="Helvetica"/>
               </a:defRPr>
             </a:lvl1pPr>
           </a:lstStyle>
@@ -5196,7 +5478,7 @@
         </p:nvSpPr>
         <p:spPr>
           <a:xfrm>
-            <a:off x="411478" y="2400807"/>
+            <a:off x="411478" y="2400806"/>
             <a:ext cx="4023363" cy="355601"/>
           </a:xfrm>
           <a:prstGeom prst="rect">
@@ -5221,6 +5503,10 @@
                 <a:solidFill>
                   <a:srgbClr val="8FA5BB"/>
                 </a:solidFill>
+                <a:latin typeface="+mn-lt"/>
+                <a:ea typeface="+mn-ea"/>
+                <a:cs typeface="+mn-cs"/>
+                <a:sym typeface="Helvetica"/>
               </a:defRPr>
             </a:lvl1pPr>
           </a:lstStyle>
@@ -5240,7 +5526,7 @@
         </p:nvSpPr>
         <p:spPr>
           <a:xfrm>
-            <a:off x="411478" y="2942335"/>
+            <a:off x="411478" y="2942334"/>
             <a:ext cx="4023363" cy="406401"/>
           </a:xfrm>
           <a:prstGeom prst="rect">
@@ -5265,6 +5551,10 @@
                 <a:solidFill>
                   <a:srgbClr val="4A9EBA"/>
                 </a:solidFill>
+                <a:latin typeface="+mn-lt"/>
+                <a:ea typeface="+mn-ea"/>
+                <a:cs typeface="+mn-cs"/>
+                <a:sym typeface="Helvetica"/>
               </a:defRPr>
             </a:lvl1pPr>
           </a:lstStyle>
@@ -5284,7 +5574,7 @@
         </p:nvSpPr>
         <p:spPr>
           <a:xfrm>
-            <a:off x="411478" y="3400043"/>
+            <a:off x="411478" y="3400042"/>
             <a:ext cx="4023363" cy="533401"/>
           </a:xfrm>
           <a:prstGeom prst="rect">
@@ -5309,6 +5599,10 @@
                 <a:solidFill>
                   <a:srgbClr val="EEF2F7"/>
                 </a:solidFill>
+                <a:latin typeface="+mn-lt"/>
+                <a:ea typeface="+mn-ea"/>
+                <a:cs typeface="+mn-cs"/>
+                <a:sym typeface="Helvetica"/>
               </a:defRPr>
             </a:lvl1pPr>
           </a:lstStyle>
@@ -5357,7 +5651,7 @@
         </p:nvSpPr>
         <p:spPr>
           <a:xfrm>
-            <a:off x="4572000" y="4479593"/>
+            <a:off x="4572000" y="4479592"/>
             <a:ext cx="4251960" cy="152401"/>
           </a:xfrm>
           <a:prstGeom prst="rect">
@@ -5382,6 +5676,10 @@
                 <a:solidFill>
                   <a:srgbClr val="8FA5BB"/>
                 </a:solidFill>
+                <a:latin typeface="+mn-lt"/>
+                <a:ea typeface="+mn-ea"/>
+                <a:cs typeface="+mn-cs"/>
+                <a:sym typeface="Helvetica"/>
               </a:defRPr>
             </a:lvl1pPr>
           </a:lstStyle>
@@ -5444,7 +5742,14 @@
           <a:bodyPr lIns="0" tIns="0" rIns="0" bIns="0"/>
           <a:lstStyle/>
           <a:p>
-            <a:pPr/>
+            <a:pPr>
+              <a:defRPr>
+                <a:latin typeface="+mn-lt"/>
+                <a:ea typeface="+mn-ea"/>
+                <a:cs typeface="+mn-cs"/>
+                <a:sym typeface="Helvetica"/>
+              </a:defRPr>
+            </a:pPr>
           </a:p>
         </p:txBody>
       </p:sp>
@@ -5456,7 +5761,7 @@
         </p:nvSpPr>
         <p:spPr>
           <a:xfrm>
-            <a:off x="411479" y="164590"/>
+            <a:off x="411479" y="164589"/>
             <a:ext cx="8321041" cy="685801"/>
           </a:xfrm>
           <a:prstGeom prst="rect">
@@ -5505,7 +5810,7 @@
         <p:spPr>
           <a:xfrm>
             <a:off x="411480" y="960119"/>
-            <a:ext cx="1920240" cy="1188722"/>
+            <a:ext cx="1920240" cy="1188723"/>
           </a:xfrm>
           <a:prstGeom prst="roundRect">
             <a:avLst>
@@ -5523,7 +5828,14 @@
           <a:bodyPr lIns="0" tIns="0" rIns="0" bIns="0"/>
           <a:lstStyle/>
           <a:p>
-            <a:pPr/>
+            <a:pPr>
+              <a:defRPr>
+                <a:latin typeface="+mn-lt"/>
+                <a:ea typeface="+mn-ea"/>
+                <a:cs typeface="+mn-cs"/>
+                <a:sym typeface="Helvetica"/>
+              </a:defRPr>
+            </a:pPr>
           </a:p>
         </p:txBody>
       </p:sp>
@@ -5536,7 +5848,7 @@
         <p:spPr>
           <a:xfrm>
             <a:off x="411480" y="1049782"/>
-            <a:ext cx="1920240" cy="469901"/>
+            <a:ext cx="1920241" cy="469901"/>
           </a:xfrm>
           <a:prstGeom prst="rect">
             <a:avLst/>
@@ -5584,7 +5896,7 @@
         <p:spPr>
           <a:xfrm>
             <a:off x="411480" y="1680971"/>
-            <a:ext cx="1920240" cy="304801"/>
+            <a:ext cx="1920241" cy="304801"/>
           </a:xfrm>
           <a:prstGeom prst="rect">
             <a:avLst/>
@@ -5609,6 +5921,10 @@
                 <a:solidFill>
                   <a:srgbClr val="8FA5BB"/>
                 </a:solidFill>
+                <a:latin typeface="+mn-lt"/>
+                <a:ea typeface="+mn-ea"/>
+                <a:cs typeface="+mn-cs"/>
+                <a:sym typeface="Helvetica"/>
               </a:defRPr>
             </a:pPr>
             <a:r>
@@ -5621,6 +5937,10 @@
                 <a:solidFill>
                   <a:srgbClr val="8FA5BB"/>
                 </a:solidFill>
+                <a:latin typeface="+mn-lt"/>
+                <a:ea typeface="+mn-ea"/>
+                <a:cs typeface="+mn-cs"/>
+                <a:sym typeface="Helvetica"/>
               </a:defRPr>
             </a:pPr>
             <a:r>
@@ -5637,8 +5957,8 @@
         </p:nvSpPr>
         <p:spPr>
           <a:xfrm>
-            <a:off x="2468878" y="960119"/>
-            <a:ext cx="1920242" cy="1188722"/>
+            <a:off x="2468877" y="960119"/>
+            <a:ext cx="1920244" cy="1188723"/>
           </a:xfrm>
           <a:prstGeom prst="roundRect">
             <a:avLst>
@@ -5656,7 +5976,14 @@
           <a:bodyPr lIns="0" tIns="0" rIns="0" bIns="0"/>
           <a:lstStyle/>
           <a:p>
-            <a:pPr/>
+            <a:pPr>
+              <a:defRPr>
+                <a:latin typeface="+mn-lt"/>
+                <a:ea typeface="+mn-ea"/>
+                <a:cs typeface="+mn-cs"/>
+                <a:sym typeface="Helvetica"/>
+              </a:defRPr>
+            </a:pPr>
           </a:p>
         </p:txBody>
       </p:sp>
@@ -5669,7 +5996,7 @@
         <p:spPr>
           <a:xfrm>
             <a:off x="2468878" y="1119632"/>
-            <a:ext cx="1920241" cy="330201"/>
+            <a:ext cx="1920240" cy="330201"/>
           </a:xfrm>
           <a:prstGeom prst="rect">
             <a:avLst/>
@@ -5717,7 +6044,7 @@
         <p:spPr>
           <a:xfrm>
             <a:off x="2468878" y="1680971"/>
-            <a:ext cx="1920241" cy="304801"/>
+            <a:ext cx="1920240" cy="304801"/>
           </a:xfrm>
           <a:prstGeom prst="rect">
             <a:avLst/>
@@ -5742,6 +6069,10 @@
                 <a:solidFill>
                   <a:srgbClr val="8FA5BB"/>
                 </a:solidFill>
+                <a:latin typeface="+mn-lt"/>
+                <a:ea typeface="+mn-ea"/>
+                <a:cs typeface="+mn-cs"/>
+                <a:sym typeface="Helvetica"/>
               </a:defRPr>
             </a:pPr>
             <a:r>
@@ -5754,6 +6085,10 @@
                 <a:solidFill>
                   <a:srgbClr val="8FA5BB"/>
                 </a:solidFill>
+                <a:latin typeface="+mn-lt"/>
+                <a:ea typeface="+mn-ea"/>
+                <a:cs typeface="+mn-cs"/>
+                <a:sym typeface="Helvetica"/>
               </a:defRPr>
             </a:pPr>
             <a:r>
@@ -5789,7 +6124,14 @@
           <a:bodyPr lIns="0" tIns="0" rIns="0" bIns="0"/>
           <a:lstStyle/>
           <a:p>
-            <a:pPr/>
+            <a:pPr>
+              <a:defRPr>
+                <a:latin typeface="+mn-lt"/>
+                <a:ea typeface="+mn-ea"/>
+                <a:cs typeface="+mn-cs"/>
+                <a:sym typeface="Helvetica"/>
+              </a:defRPr>
+            </a:pPr>
           </a:p>
         </p:txBody>
       </p:sp>
@@ -5826,6 +6168,10 @@
                 <a:solidFill>
                   <a:srgbClr val="FFFFFF"/>
                 </a:solidFill>
+                <a:latin typeface="+mn-lt"/>
+                <a:ea typeface="+mn-ea"/>
+                <a:cs typeface="+mn-cs"/>
+                <a:sym typeface="Helvetica"/>
               </a:defRPr>
             </a:lvl1pPr>
           </a:lstStyle>
@@ -5864,7 +6210,14 @@
           <a:bodyPr lIns="0" tIns="0" rIns="0" bIns="0"/>
           <a:lstStyle/>
           <a:p>
-            <a:pPr/>
+            <a:pPr>
+              <a:defRPr>
+                <a:latin typeface="+mn-lt"/>
+                <a:ea typeface="+mn-ea"/>
+                <a:cs typeface="+mn-cs"/>
+                <a:sym typeface="Helvetica"/>
+              </a:defRPr>
+            </a:pPr>
           </a:p>
         </p:txBody>
       </p:sp>
@@ -5901,6 +6254,10 @@
                 <a:solidFill>
                   <a:srgbClr val="FFFFFF"/>
                 </a:solidFill>
+                <a:latin typeface="+mn-lt"/>
+                <a:ea typeface="+mn-ea"/>
+                <a:cs typeface="+mn-cs"/>
+                <a:sym typeface="Helvetica"/>
               </a:defRPr>
             </a:lvl1pPr>
           </a:lstStyle>
@@ -5939,7 +6296,14 @@
           <a:bodyPr lIns="0" tIns="0" rIns="0" bIns="0"/>
           <a:lstStyle/>
           <a:p>
-            <a:pPr/>
+            <a:pPr>
+              <a:defRPr>
+                <a:latin typeface="+mn-lt"/>
+                <a:ea typeface="+mn-ea"/>
+                <a:cs typeface="+mn-cs"/>
+                <a:sym typeface="Helvetica"/>
+              </a:defRPr>
+            </a:pPr>
           </a:p>
         </p:txBody>
       </p:sp>
@@ -5976,6 +6340,10 @@
                 <a:solidFill>
                   <a:srgbClr val="FFFFFF"/>
                 </a:solidFill>
+                <a:latin typeface="+mn-lt"/>
+                <a:ea typeface="+mn-ea"/>
+                <a:cs typeface="+mn-cs"/>
+                <a:sym typeface="Helvetica"/>
               </a:defRPr>
             </a:lvl1pPr>
           </a:lstStyle>
@@ -6014,7 +6382,14 @@
           <a:bodyPr lIns="0" tIns="0" rIns="0" bIns="0"/>
           <a:lstStyle/>
           <a:p>
-            <a:pPr/>
+            <a:pPr>
+              <a:defRPr>
+                <a:latin typeface="+mn-lt"/>
+                <a:ea typeface="+mn-ea"/>
+                <a:cs typeface="+mn-cs"/>
+                <a:sym typeface="Helvetica"/>
+              </a:defRPr>
+            </a:pPr>
           </a:p>
         </p:txBody>
       </p:sp>
@@ -6051,6 +6426,10 @@
                 <a:solidFill>
                   <a:srgbClr val="FFFFFF"/>
                 </a:solidFill>
+                <a:latin typeface="+mn-lt"/>
+                <a:ea typeface="+mn-ea"/>
+                <a:cs typeface="+mn-cs"/>
+                <a:sym typeface="Helvetica"/>
               </a:defRPr>
             </a:lvl1pPr>
           </a:lstStyle>
@@ -6095,6 +6474,10 @@
                 <a:solidFill>
                   <a:srgbClr val="8FA5BB"/>
                 </a:solidFill>
+                <a:latin typeface="+mn-lt"/>
+                <a:ea typeface="+mn-ea"/>
+                <a:cs typeface="+mn-cs"/>
+                <a:sym typeface="Helvetica"/>
               </a:defRPr>
             </a:lvl1pPr>
           </a:lstStyle>
@@ -6168,6 +6551,10 @@
                 <a:solidFill>
                   <a:srgbClr val="8FA5BB"/>
                 </a:solidFill>
+                <a:latin typeface="+mn-lt"/>
+                <a:ea typeface="+mn-ea"/>
+                <a:cs typeface="+mn-cs"/>
+                <a:sym typeface="Helvetica"/>
               </a:defRPr>
             </a:lvl1pPr>
           </a:lstStyle>
@@ -6230,7 +6617,14 @@
           <a:bodyPr lIns="0" tIns="0" rIns="0" bIns="0"/>
           <a:lstStyle/>
           <a:p>
-            <a:pPr/>
+            <a:pPr>
+              <a:defRPr>
+                <a:latin typeface="+mn-lt"/>
+                <a:ea typeface="+mn-ea"/>
+                <a:cs typeface="+mn-cs"/>
+                <a:sym typeface="Helvetica"/>
+              </a:defRPr>
+            </a:pPr>
           </a:p>
         </p:txBody>
       </p:sp>
@@ -6291,7 +6685,7 @@
         <p:spPr>
           <a:xfrm>
             <a:off x="411480" y="960119"/>
-            <a:ext cx="4114801" cy="841249"/>
+            <a:ext cx="4114802" cy="841250"/>
           </a:xfrm>
           <a:prstGeom prst="roundRect">
             <a:avLst>
@@ -6309,7 +6703,14 @@
           <a:bodyPr lIns="0" tIns="0" rIns="0" bIns="0"/>
           <a:lstStyle/>
           <a:p>
-            <a:pPr/>
+            <a:pPr>
+              <a:defRPr>
+                <a:latin typeface="+mn-lt"/>
+                <a:ea typeface="+mn-ea"/>
+                <a:cs typeface="+mn-cs"/>
+                <a:sym typeface="Helvetica"/>
+              </a:defRPr>
+            </a:pPr>
           </a:p>
         </p:txBody>
       </p:sp>
@@ -6321,8 +6722,8 @@
         </p:nvSpPr>
         <p:spPr>
           <a:xfrm>
-            <a:off x="502919" y="1119472"/>
-            <a:ext cx="3931922" cy="533401"/>
+            <a:off x="502919" y="1119471"/>
+            <a:ext cx="3931923" cy="533401"/>
           </a:xfrm>
           <a:prstGeom prst="rect">
             <a:avLst/>
@@ -6346,6 +6747,10 @@
                 <a:solidFill>
                   <a:srgbClr val="EEF2F7"/>
                 </a:solidFill>
+                <a:latin typeface="+mn-lt"/>
+                <a:ea typeface="+mn-ea"/>
+                <a:cs typeface="+mn-cs"/>
+                <a:sym typeface="Helvetica"/>
               </a:defRPr>
             </a:lvl1pPr>
           </a:lstStyle>
@@ -6365,8 +6770,8 @@
         </p:nvSpPr>
         <p:spPr>
           <a:xfrm>
-            <a:off x="411480" y="1920239"/>
-            <a:ext cx="3200401" cy="301753"/>
+            <a:off x="411480" y="1920238"/>
+            <a:ext cx="3200401" cy="301754"/>
           </a:xfrm>
           <a:prstGeom prst="roundRect">
             <a:avLst>
@@ -6384,7 +6789,14 @@
           <a:bodyPr lIns="0" tIns="0" rIns="0" bIns="0"/>
           <a:lstStyle/>
           <a:p>
-            <a:pPr/>
+            <a:pPr>
+              <a:defRPr>
+                <a:latin typeface="+mn-lt"/>
+                <a:ea typeface="+mn-ea"/>
+                <a:cs typeface="+mn-cs"/>
+                <a:sym typeface="Helvetica"/>
+              </a:defRPr>
+            </a:pPr>
           </a:p>
         </p:txBody>
       </p:sp>
@@ -6396,8 +6808,8 @@
         </p:nvSpPr>
         <p:spPr>
           <a:xfrm>
-            <a:off x="411480" y="2005235"/>
-            <a:ext cx="3200401" cy="165101"/>
+            <a:off x="411480" y="2005234"/>
+            <a:ext cx="3200402" cy="165101"/>
           </a:xfrm>
           <a:prstGeom prst="rect">
             <a:avLst/>
@@ -6421,6 +6833,10 @@
                 <a:solidFill>
                   <a:srgbClr val="FFFFFF"/>
                 </a:solidFill>
+                <a:latin typeface="+mn-lt"/>
+                <a:ea typeface="+mn-ea"/>
+                <a:cs typeface="+mn-cs"/>
+                <a:sym typeface="Helvetica"/>
               </a:defRPr>
             </a:lvl1pPr>
           </a:lstStyle>
@@ -6440,8 +6856,8 @@
         </p:nvSpPr>
         <p:spPr>
           <a:xfrm>
-            <a:off x="4800599" y="1028699"/>
-            <a:ext cx="146306" cy="146306"/>
+            <a:off x="4800598" y="1028699"/>
+            <a:ext cx="146307" cy="146307"/>
           </a:xfrm>
           <a:prstGeom prst="ellipse">
             <a:avLst/>
@@ -6457,7 +6873,14 @@
           <a:bodyPr lIns="0" tIns="0" rIns="0" bIns="0"/>
           <a:lstStyle/>
           <a:p>
-            <a:pPr/>
+            <a:pPr>
+              <a:defRPr>
+                <a:latin typeface="+mn-lt"/>
+                <a:ea typeface="+mn-ea"/>
+                <a:cs typeface="+mn-cs"/>
+                <a:sym typeface="Helvetica"/>
+              </a:defRPr>
+            </a:pPr>
           </a:p>
         </p:txBody>
       </p:sp>
@@ -6469,8 +6892,8 @@
         </p:nvSpPr>
         <p:spPr>
           <a:xfrm>
-            <a:off x="5047298" y="1001395"/>
-            <a:ext cx="1762126" cy="177801"/>
+            <a:off x="5047298" y="1001394"/>
+            <a:ext cx="1762127" cy="177801"/>
           </a:xfrm>
           <a:prstGeom prst="rect">
             <a:avLst/>
@@ -6494,6 +6917,10 @@
                 <a:solidFill>
                   <a:srgbClr val="EEF2F7"/>
                 </a:solidFill>
+                <a:latin typeface="+mn-lt"/>
+                <a:ea typeface="+mn-ea"/>
+                <a:cs typeface="+mn-cs"/>
+                <a:sym typeface="Helvetica"/>
               </a:defRPr>
             </a:lvl1pPr>
           </a:lstStyle>
@@ -6514,7 +6941,7 @@
         <p:spPr>
           <a:xfrm>
             <a:off x="6857999" y="1028699"/>
-            <a:ext cx="146306" cy="146306"/>
+            <a:ext cx="146307" cy="146307"/>
           </a:xfrm>
           <a:prstGeom prst="ellipse">
             <a:avLst/>
@@ -6530,7 +6957,14 @@
           <a:bodyPr lIns="0" tIns="0" rIns="0" bIns="0"/>
           <a:lstStyle/>
           <a:p>
-            <a:pPr/>
+            <a:pPr>
+              <a:defRPr>
+                <a:latin typeface="+mn-lt"/>
+                <a:ea typeface="+mn-ea"/>
+                <a:cs typeface="+mn-cs"/>
+                <a:sym typeface="Helvetica"/>
+              </a:defRPr>
+            </a:pPr>
           </a:p>
         </p:txBody>
       </p:sp>
@@ -6542,8 +6976,8 @@
         </p:nvSpPr>
         <p:spPr>
           <a:xfrm>
-            <a:off x="7104698" y="1001395"/>
-            <a:ext cx="1619251" cy="177801"/>
+            <a:off x="7104698" y="1001394"/>
+            <a:ext cx="1619252" cy="177801"/>
           </a:xfrm>
           <a:prstGeom prst="rect">
             <a:avLst/>
@@ -6567,6 +7001,10 @@
                 <a:solidFill>
                   <a:srgbClr val="EEF2F7"/>
                 </a:solidFill>
+                <a:latin typeface="+mn-lt"/>
+                <a:ea typeface="+mn-ea"/>
+                <a:cs typeface="+mn-cs"/>
+                <a:sym typeface="Helvetica"/>
               </a:defRPr>
             </a:lvl1pPr>
           </a:lstStyle>
@@ -6586,8 +7024,8 @@
         </p:nvSpPr>
         <p:spPr>
           <a:xfrm>
-            <a:off x="4800599" y="1619249"/>
-            <a:ext cx="146306" cy="146306"/>
+            <a:off x="4800598" y="1619249"/>
+            <a:ext cx="146307" cy="146307"/>
           </a:xfrm>
           <a:prstGeom prst="ellipse">
             <a:avLst/>
@@ -6603,7 +7041,14 @@
           <a:bodyPr lIns="0" tIns="0" rIns="0" bIns="0"/>
           <a:lstStyle/>
           <a:p>
-            <a:pPr/>
+            <a:pPr>
+              <a:defRPr>
+                <a:latin typeface="+mn-lt"/>
+                <a:ea typeface="+mn-ea"/>
+                <a:cs typeface="+mn-cs"/>
+                <a:sym typeface="Helvetica"/>
+              </a:defRPr>
+            </a:pPr>
           </a:p>
         </p:txBody>
       </p:sp>
@@ -6616,7 +7061,7 @@
         <p:spPr>
           <a:xfrm>
             <a:off x="5047298" y="1565274"/>
-            <a:ext cx="1762126" cy="355601"/>
+            <a:ext cx="1762127" cy="355601"/>
           </a:xfrm>
           <a:prstGeom prst="rect">
             <a:avLst/>
@@ -6640,6 +7085,10 @@
                 <a:solidFill>
                   <a:srgbClr val="EEF2F7"/>
                 </a:solidFill>
+                <a:latin typeface="+mn-lt"/>
+                <a:ea typeface="+mn-ea"/>
+                <a:cs typeface="+mn-cs"/>
+                <a:sym typeface="Helvetica"/>
               </a:defRPr>
             </a:lvl1pPr>
           </a:lstStyle>
@@ -6660,7 +7109,7 @@
         <p:spPr>
           <a:xfrm>
             <a:off x="6857999" y="1619249"/>
-            <a:ext cx="146306" cy="146306"/>
+            <a:ext cx="146307" cy="146307"/>
           </a:xfrm>
           <a:prstGeom prst="ellipse">
             <a:avLst/>
@@ -6676,7 +7125,14 @@
           <a:bodyPr lIns="0" tIns="0" rIns="0" bIns="0"/>
           <a:lstStyle/>
           <a:p>
-            <a:pPr/>
+            <a:pPr>
+              <a:defRPr>
+                <a:latin typeface="+mn-lt"/>
+                <a:ea typeface="+mn-ea"/>
+                <a:cs typeface="+mn-cs"/>
+                <a:sym typeface="Helvetica"/>
+              </a:defRPr>
+            </a:pPr>
           </a:p>
         </p:txBody>
       </p:sp>
@@ -6689,7 +7145,7 @@
         <p:spPr>
           <a:xfrm>
             <a:off x="7104698" y="1666874"/>
-            <a:ext cx="1619251" cy="355601"/>
+            <a:ext cx="1619252" cy="355601"/>
           </a:xfrm>
           <a:prstGeom prst="rect">
             <a:avLst/>
@@ -6713,6 +7169,10 @@
                 <a:solidFill>
                   <a:srgbClr val="EEF2F7"/>
                 </a:solidFill>
+                <a:latin typeface="+mn-lt"/>
+                <a:ea typeface="+mn-ea"/>
+                <a:cs typeface="+mn-cs"/>
+                <a:sym typeface="Helvetica"/>
               </a:defRPr>
             </a:lvl1pPr>
           </a:lstStyle>
@@ -6786,6 +7246,10 @@
                 <a:solidFill>
                   <a:srgbClr val="8FA5BB"/>
                 </a:solidFill>
+                <a:latin typeface="+mn-lt"/>
+                <a:ea typeface="+mn-ea"/>
+                <a:cs typeface="+mn-cs"/>
+                <a:sym typeface="Helvetica"/>
               </a:defRPr>
             </a:lvl1pPr>
           </a:lstStyle>
@@ -6848,7 +7312,14 @@
           <a:bodyPr lIns="0" tIns="0" rIns="0" bIns="0"/>
           <a:lstStyle/>
           <a:p>
-            <a:pPr/>
+            <a:pPr>
+              <a:defRPr>
+                <a:latin typeface="+mn-lt"/>
+                <a:ea typeface="+mn-ea"/>
+                <a:cs typeface="+mn-cs"/>
+                <a:sym typeface="Helvetica"/>
+              </a:defRPr>
+            </a:pPr>
           </a:p>
         </p:txBody>
       </p:sp>
@@ -6860,7 +7331,7 @@
         </p:nvSpPr>
         <p:spPr>
           <a:xfrm>
-            <a:off x="411479" y="164590"/>
+            <a:off x="411479" y="164589"/>
             <a:ext cx="8321041" cy="685801"/>
           </a:xfrm>
           <a:prstGeom prst="rect">
@@ -6909,7 +7380,7 @@
         <p:spPr>
           <a:xfrm>
             <a:off x="411480" y="960119"/>
-            <a:ext cx="4114802" cy="841250"/>
+            <a:ext cx="4114802" cy="841251"/>
           </a:xfrm>
           <a:prstGeom prst="roundRect">
             <a:avLst>
@@ -6927,7 +7398,14 @@
           <a:bodyPr lIns="0" tIns="0" rIns="0" bIns="0"/>
           <a:lstStyle/>
           <a:p>
-            <a:pPr/>
+            <a:pPr>
+              <a:defRPr>
+                <a:latin typeface="+mn-lt"/>
+                <a:ea typeface="+mn-ea"/>
+                <a:cs typeface="+mn-cs"/>
+                <a:sym typeface="Helvetica"/>
+              </a:defRPr>
+            </a:pPr>
           </a:p>
         </p:txBody>
       </p:sp>
@@ -6939,8 +7417,8 @@
         </p:nvSpPr>
         <p:spPr>
           <a:xfrm>
-            <a:off x="502919" y="1033017"/>
-            <a:ext cx="3931923" cy="165101"/>
+            <a:off x="502918" y="1033016"/>
+            <a:ext cx="3931925" cy="165101"/>
           </a:xfrm>
           <a:prstGeom prst="rect">
             <a:avLst/>
@@ -6964,6 +7442,10 @@
                 <a:solidFill>
                   <a:srgbClr val="4A9EBA"/>
                 </a:solidFill>
+                <a:latin typeface="+mn-lt"/>
+                <a:ea typeface="+mn-ea"/>
+                <a:cs typeface="+mn-cs"/>
+                <a:sym typeface="Helvetica"/>
               </a:defRPr>
             </a:lvl1pPr>
           </a:lstStyle>
@@ -6983,8 +7465,8 @@
         </p:nvSpPr>
         <p:spPr>
           <a:xfrm>
-            <a:off x="502919" y="1335531"/>
-            <a:ext cx="3931923" cy="355601"/>
+            <a:off x="502918" y="1335530"/>
+            <a:ext cx="3931925" cy="355601"/>
           </a:xfrm>
           <a:prstGeom prst="rect">
             <a:avLst/>
@@ -7009,6 +7491,10 @@
                 <a:solidFill>
                   <a:srgbClr val="EEF2F7"/>
                 </a:solidFill>
+                <a:latin typeface="+mn-lt"/>
+                <a:ea typeface="+mn-ea"/>
+                <a:cs typeface="+mn-cs"/>
+                <a:sym typeface="Helvetica"/>
               </a:defRPr>
             </a:pPr>
             <a:r>
@@ -7021,6 +7507,10 @@
                 <a:solidFill>
                   <a:srgbClr val="EEF2F7"/>
                 </a:solidFill>
+                <a:latin typeface="+mn-lt"/>
+                <a:ea typeface="+mn-ea"/>
+                <a:cs typeface="+mn-cs"/>
+                <a:sym typeface="Helvetica"/>
               </a:defRPr>
             </a:pPr>
             <a:r>
@@ -7038,7 +7528,7 @@
         <p:spPr>
           <a:xfrm>
             <a:off x="4800600" y="960119"/>
-            <a:ext cx="4114800" cy="566929"/>
+            <a:ext cx="4114800" cy="566930"/>
           </a:xfrm>
           <a:prstGeom prst="roundRect">
             <a:avLst>
@@ -7058,7 +7548,14 @@
           <a:bodyPr lIns="0" tIns="0" rIns="0" bIns="0"/>
           <a:lstStyle/>
           <a:p>
-            <a:pPr/>
+            <a:pPr>
+              <a:defRPr>
+                <a:latin typeface="+mn-lt"/>
+                <a:ea typeface="+mn-ea"/>
+                <a:cs typeface="+mn-cs"/>
+                <a:sym typeface="Helvetica"/>
+              </a:defRPr>
+            </a:pPr>
           </a:p>
         </p:txBody>
       </p:sp>
@@ -7070,7 +7567,7 @@
         </p:nvSpPr>
         <p:spPr>
           <a:xfrm>
-            <a:off x="4892040" y="1000727"/>
+            <a:off x="4892040" y="1000726"/>
             <a:ext cx="3931921" cy="495301"/>
           </a:xfrm>
           <a:prstGeom prst="rect">
@@ -7095,6 +7592,10 @@
                 <a:solidFill>
                   <a:srgbClr val="EEF2F7"/>
                 </a:solidFill>
+                <a:latin typeface="+mn-lt"/>
+                <a:ea typeface="+mn-ea"/>
+                <a:cs typeface="+mn-cs"/>
+                <a:sym typeface="Helvetica"/>
               </a:defRPr>
             </a:lvl1pPr>
           </a:lstStyle>
@@ -7124,8 +7625,8 @@
         </p:blipFill>
         <p:spPr>
           <a:xfrm>
-            <a:off x="626680" y="2028956"/>
-            <a:ext cx="7890640" cy="2816258"/>
+            <a:off x="626680" y="2028955"/>
+            <a:ext cx="7890641" cy="2816259"/>
           </a:xfrm>
           <a:prstGeom prst="rect">
             <a:avLst/>
@@ -7168,6 +7669,10 @@
                 <a:solidFill>
                   <a:srgbClr val="8FA5BB"/>
                 </a:solidFill>
+                <a:latin typeface="+mn-lt"/>
+                <a:ea typeface="+mn-ea"/>
+                <a:cs typeface="+mn-cs"/>
+                <a:sym typeface="Helvetica"/>
               </a:defRPr>
             </a:lvl1pPr>
           </a:lstStyle>
@@ -7230,7 +7735,14 @@
           <a:bodyPr lIns="0" tIns="0" rIns="0" bIns="0"/>
           <a:lstStyle/>
           <a:p>
-            <a:pPr/>
+            <a:pPr>
+              <a:defRPr>
+                <a:latin typeface="+mn-lt"/>
+                <a:ea typeface="+mn-ea"/>
+                <a:cs typeface="+mn-cs"/>
+                <a:sym typeface="Helvetica"/>
+              </a:defRPr>
+            </a:pPr>
           </a:p>
         </p:txBody>
       </p:sp>
@@ -7242,7 +7754,7 @@
         </p:nvSpPr>
         <p:spPr>
           <a:xfrm>
-            <a:off x="411479" y="164590"/>
+            <a:off x="411479" y="164589"/>
             <a:ext cx="8321041" cy="685801"/>
           </a:xfrm>
           <a:prstGeom prst="rect">
@@ -7291,7 +7803,7 @@
         <p:spPr>
           <a:xfrm>
             <a:off x="411480" y="960119"/>
-            <a:ext cx="4114802" cy="1234442"/>
+            <a:ext cx="4114802" cy="1234443"/>
           </a:xfrm>
           <a:prstGeom prst="roundRect">
             <a:avLst>
@@ -7309,7 +7821,14 @@
           <a:bodyPr lIns="0" tIns="0" rIns="0" bIns="0"/>
           <a:lstStyle/>
           <a:p>
-            <a:pPr/>
+            <a:pPr>
+              <a:defRPr>
+                <a:latin typeface="+mn-lt"/>
+                <a:ea typeface="+mn-ea"/>
+                <a:cs typeface="+mn-cs"/>
+                <a:sym typeface="Helvetica"/>
+              </a:defRPr>
+            </a:pPr>
           </a:p>
         </p:txBody>
       </p:sp>
@@ -7321,8 +7840,8 @@
         </p:nvSpPr>
         <p:spPr>
           <a:xfrm>
-            <a:off x="502919" y="1074927"/>
-            <a:ext cx="3931923" cy="355601"/>
+            <a:off x="502918" y="1074927"/>
+            <a:ext cx="3931925" cy="355601"/>
           </a:xfrm>
           <a:prstGeom prst="rect">
             <a:avLst/>
@@ -7346,6 +7865,10 @@
                 <a:solidFill>
                   <a:srgbClr val="EEF2F7"/>
                 </a:solidFill>
+                <a:latin typeface="+mn-lt"/>
+                <a:ea typeface="+mn-ea"/>
+                <a:cs typeface="+mn-cs"/>
+                <a:sym typeface="Helvetica"/>
               </a:defRPr>
             </a:lvl1pPr>
           </a:lstStyle>
@@ -7365,8 +7888,8 @@
         </p:nvSpPr>
         <p:spPr>
           <a:xfrm>
-            <a:off x="502919" y="1579323"/>
-            <a:ext cx="3931923" cy="206345"/>
+            <a:off x="502918" y="1579322"/>
+            <a:ext cx="3931925" cy="206345"/>
           </a:xfrm>
           <a:prstGeom prst="rect">
             <a:avLst/>
@@ -7390,6 +7913,10 @@
                 <a:solidFill>
                   <a:srgbClr val="4A9EBA"/>
                 </a:solidFill>
+                <a:latin typeface="+mn-lt"/>
+                <a:ea typeface="+mn-ea"/>
+                <a:cs typeface="+mn-cs"/>
+                <a:sym typeface="Helvetica"/>
               </a:defRPr>
             </a:lvl1pPr>
           </a:lstStyle>
@@ -7409,8 +7936,8 @@
         </p:nvSpPr>
         <p:spPr>
           <a:xfrm>
-            <a:off x="502919" y="1842008"/>
-            <a:ext cx="3931923" cy="330201"/>
+            <a:off x="502918" y="1842007"/>
+            <a:ext cx="3931925" cy="330201"/>
           </a:xfrm>
           <a:prstGeom prst="rect">
             <a:avLst/>
@@ -7434,6 +7961,10 @@
                 <a:solidFill>
                   <a:srgbClr val="8FA5BB"/>
                 </a:solidFill>
+                <a:latin typeface="+mn-lt"/>
+                <a:ea typeface="+mn-ea"/>
+                <a:cs typeface="+mn-cs"/>
+                <a:sym typeface="Helvetica"/>
               </a:defRPr>
             </a:lvl1pPr>
           </a:lstStyle>
@@ -7472,7 +8003,14 @@
           <a:bodyPr lIns="0" tIns="0" rIns="0" bIns="0"/>
           <a:lstStyle/>
           <a:p>
-            <a:pPr/>
+            <a:pPr>
+              <a:defRPr>
+                <a:latin typeface="+mn-lt"/>
+                <a:ea typeface="+mn-ea"/>
+                <a:cs typeface="+mn-cs"/>
+                <a:sym typeface="Helvetica"/>
+              </a:defRPr>
+            </a:pPr>
           </a:p>
         </p:txBody>
       </p:sp>
@@ -7484,8 +8022,8 @@
         </p:nvSpPr>
         <p:spPr>
           <a:xfrm>
-            <a:off x="502919" y="2371851"/>
-            <a:ext cx="3931923" cy="203201"/>
+            <a:off x="502918" y="2371850"/>
+            <a:ext cx="3931925" cy="203201"/>
           </a:xfrm>
           <a:prstGeom prst="rect">
             <a:avLst/>
@@ -7532,8 +8070,8 @@
         </p:nvSpPr>
         <p:spPr>
           <a:xfrm>
-            <a:off x="502919" y="2600597"/>
-            <a:ext cx="3931923" cy="742406"/>
+            <a:off x="502918" y="2600597"/>
+            <a:ext cx="3931925" cy="742405"/>
           </a:xfrm>
           <a:prstGeom prst="rect">
             <a:avLst/>
@@ -7558,6 +8096,10 @@
                 <a:solidFill>
                   <a:srgbClr val="EEF2F7"/>
                 </a:solidFill>
+                <a:latin typeface="+mn-lt"/>
+                <a:ea typeface="+mn-ea"/>
+                <a:cs typeface="+mn-cs"/>
+                <a:sym typeface="Helvetica"/>
               </a:defRPr>
             </a:pPr>
             <a:r>
@@ -7570,6 +8112,10 @@
                 <a:solidFill>
                   <a:srgbClr val="EEF2F7"/>
                 </a:solidFill>
+                <a:latin typeface="+mn-lt"/>
+                <a:ea typeface="+mn-ea"/>
+                <a:cs typeface="+mn-cs"/>
+                <a:sym typeface="Helvetica"/>
               </a:defRPr>
             </a:pPr>
             <a:r>
@@ -7586,8 +8132,8 @@
         </p:nvSpPr>
         <p:spPr>
           <a:xfrm>
-            <a:off x="411479" y="3812539"/>
-            <a:ext cx="4114803" cy="330201"/>
+            <a:off x="411478" y="3812538"/>
+            <a:ext cx="4114805" cy="330201"/>
           </a:xfrm>
           <a:prstGeom prst="rect">
             <a:avLst/>
@@ -7611,6 +8157,10 @@
                 <a:solidFill>
                   <a:srgbClr val="8FA5BB"/>
                 </a:solidFill>
+                <a:latin typeface="+mn-lt"/>
+                <a:ea typeface="+mn-ea"/>
+                <a:cs typeface="+mn-cs"/>
+                <a:sym typeface="Helvetica"/>
               </a:defRPr>
             </a:lvl1pPr>
           </a:lstStyle>
@@ -7641,7 +8191,7 @@
         <p:spPr>
           <a:xfrm>
             <a:off x="4800600" y="960119"/>
-            <a:ext cx="3749039" cy="3678332"/>
+            <a:ext cx="3749039" cy="3678333"/>
           </a:xfrm>
           <a:prstGeom prst="rect">
             <a:avLst/>
@@ -7684,6 +8234,10 @@
                 <a:solidFill>
                   <a:srgbClr val="8FA5BB"/>
                 </a:solidFill>
+                <a:latin typeface="+mn-lt"/>
+                <a:ea typeface="+mn-ea"/>
+                <a:cs typeface="+mn-cs"/>
+                <a:sym typeface="Helvetica"/>
               </a:defRPr>
             </a:lvl1pPr>
           </a:lstStyle>
@@ -7746,7 +8300,14 @@
           <a:bodyPr lIns="0" tIns="0" rIns="0" bIns="0"/>
           <a:lstStyle/>
           <a:p>
-            <a:pPr/>
+            <a:pPr>
+              <a:defRPr>
+                <a:latin typeface="+mn-lt"/>
+                <a:ea typeface="+mn-ea"/>
+                <a:cs typeface="+mn-cs"/>
+                <a:sym typeface="Helvetica"/>
+              </a:defRPr>
+            </a:pPr>
           </a:p>
         </p:txBody>
       </p:sp>
@@ -7758,8 +8319,8 @@
         </p:nvSpPr>
         <p:spPr>
           <a:xfrm>
-            <a:off x="-1188720" y="3108960"/>
-            <a:ext cx="5029202" cy="5029203"/>
+            <a:off x="-1188720" y="3108959"/>
+            <a:ext cx="5029202" cy="5029206"/>
           </a:xfrm>
           <a:prstGeom prst="ellipse">
             <a:avLst/>
@@ -7777,7 +8338,14 @@
           <a:bodyPr lIns="0" tIns="0" rIns="0" bIns="0"/>
           <a:lstStyle/>
           <a:p>
-            <a:pPr/>
+            <a:pPr>
+              <a:defRPr>
+                <a:latin typeface="+mn-lt"/>
+                <a:ea typeface="+mn-ea"/>
+                <a:cs typeface="+mn-cs"/>
+                <a:sym typeface="Helvetica"/>
+              </a:defRPr>
+            </a:pPr>
           </a:p>
         </p:txBody>
       </p:sp>
@@ -7838,7 +8406,7 @@
         <p:spPr>
           <a:xfrm>
             <a:off x="502919" y="877824"/>
-            <a:ext cx="822962" cy="36578"/>
+            <a:ext cx="822963" cy="36579"/>
           </a:xfrm>
           <a:prstGeom prst="rect">
             <a:avLst/>
@@ -7854,7 +8422,14 @@
           <a:bodyPr lIns="0" tIns="0" rIns="0" bIns="0"/>
           <a:lstStyle/>
           <a:p>
-            <a:pPr/>
+            <a:pPr>
+              <a:defRPr>
+                <a:latin typeface="+mn-lt"/>
+                <a:ea typeface="+mn-ea"/>
+                <a:cs typeface="+mn-cs"/>
+                <a:sym typeface="Helvetica"/>
+              </a:defRPr>
+            </a:pPr>
           </a:p>
         </p:txBody>
       </p:sp>
@@ -7885,7 +8460,14 @@
           <a:bodyPr lIns="0" tIns="0" rIns="0" bIns="0"/>
           <a:lstStyle/>
           <a:p>
-            <a:pPr/>
+            <a:pPr>
+              <a:defRPr>
+                <a:latin typeface="+mn-lt"/>
+                <a:ea typeface="+mn-ea"/>
+                <a:cs typeface="+mn-cs"/>
+                <a:sym typeface="Helvetica"/>
+              </a:defRPr>
+            </a:pPr>
           </a:p>
         </p:txBody>
       </p:sp>
@@ -7916,7 +8498,14 @@
           <a:bodyPr lIns="0" tIns="0" rIns="0" bIns="0"/>
           <a:lstStyle/>
           <a:p>
-            <a:pPr/>
+            <a:pPr>
+              <a:defRPr>
+                <a:latin typeface="+mn-lt"/>
+                <a:ea typeface="+mn-ea"/>
+                <a:cs typeface="+mn-cs"/>
+                <a:sym typeface="Helvetica"/>
+              </a:defRPr>
+            </a:pPr>
           </a:p>
         </p:txBody>
       </p:sp>
@@ -7929,7 +8518,7 @@
         <p:spPr>
           <a:xfrm>
             <a:off x="502919" y="1436622"/>
-            <a:ext cx="457202" cy="254001"/>
+            <a:ext cx="457203" cy="254001"/>
           </a:xfrm>
           <a:prstGeom prst="rect">
             <a:avLst/>
@@ -8049,6 +8638,10 @@
                 <a:solidFill>
                   <a:srgbClr val="8FA5BB"/>
                 </a:solidFill>
+                <a:latin typeface="+mn-lt"/>
+                <a:ea typeface="+mn-ea"/>
+                <a:cs typeface="+mn-cs"/>
+                <a:sym typeface="Helvetica"/>
               </a:defRPr>
             </a:lvl1pPr>
           </a:lstStyle>
@@ -8068,8 +8661,8 @@
         </p:nvSpPr>
         <p:spPr>
           <a:xfrm>
-            <a:off x="502919" y="2240278"/>
-            <a:ext cx="8229601" cy="1115570"/>
+            <a:off x="502919" y="2240277"/>
+            <a:ext cx="8229601" cy="1115571"/>
           </a:xfrm>
           <a:prstGeom prst="roundRect">
             <a:avLst>
@@ -8087,7 +8680,14 @@
           <a:bodyPr lIns="0" tIns="0" rIns="0" bIns="0"/>
           <a:lstStyle/>
           <a:p>
-            <a:pPr/>
+            <a:pPr>
+              <a:defRPr>
+                <a:latin typeface="+mn-lt"/>
+                <a:ea typeface="+mn-ea"/>
+                <a:cs typeface="+mn-cs"/>
+                <a:sym typeface="Helvetica"/>
+              </a:defRPr>
+            </a:pPr>
           </a:p>
         </p:txBody>
       </p:sp>
@@ -8099,8 +8699,8 @@
         </p:nvSpPr>
         <p:spPr>
           <a:xfrm>
-            <a:off x="502919" y="2240278"/>
-            <a:ext cx="457202" cy="1115570"/>
+            <a:off x="502919" y="2240277"/>
+            <a:ext cx="457202" cy="1115571"/>
           </a:xfrm>
           <a:prstGeom prst="roundRect">
             <a:avLst>
@@ -8118,7 +8718,14 @@
           <a:bodyPr lIns="0" tIns="0" rIns="0" bIns="0"/>
           <a:lstStyle/>
           <a:p>
-            <a:pPr/>
+            <a:pPr>
+              <a:defRPr>
+                <a:latin typeface="+mn-lt"/>
+                <a:ea typeface="+mn-ea"/>
+                <a:cs typeface="+mn-cs"/>
+                <a:sym typeface="Helvetica"/>
+              </a:defRPr>
+            </a:pPr>
           </a:p>
         </p:txBody>
       </p:sp>
@@ -8130,8 +8737,8 @@
         </p:nvSpPr>
         <p:spPr>
           <a:xfrm>
-            <a:off x="502919" y="2671062"/>
-            <a:ext cx="457202" cy="254001"/>
+            <a:off x="502919" y="2671061"/>
+            <a:ext cx="457203" cy="254001"/>
           </a:xfrm>
           <a:prstGeom prst="rect">
             <a:avLst/>
@@ -8251,6 +8858,10 @@
                 <a:solidFill>
                   <a:srgbClr val="8FA5BB"/>
                 </a:solidFill>
+                <a:latin typeface="+mn-lt"/>
+                <a:ea typeface="+mn-ea"/>
+                <a:cs typeface="+mn-cs"/>
+                <a:sym typeface="Helvetica"/>
               </a:defRPr>
             </a:lvl1pPr>
           </a:lstStyle>
@@ -8271,7 +8882,7 @@
         <p:spPr>
           <a:xfrm>
             <a:off x="502919" y="3474720"/>
-            <a:ext cx="8229601" cy="1115570"/>
+            <a:ext cx="8229601" cy="1115571"/>
           </a:xfrm>
           <a:prstGeom prst="roundRect">
             <a:avLst>
@@ -8289,7 +8900,14 @@
           <a:bodyPr lIns="0" tIns="0" rIns="0" bIns="0"/>
           <a:lstStyle/>
           <a:p>
-            <a:pPr/>
+            <a:pPr>
+              <a:defRPr>
+                <a:latin typeface="+mn-lt"/>
+                <a:ea typeface="+mn-ea"/>
+                <a:cs typeface="+mn-cs"/>
+                <a:sym typeface="Helvetica"/>
+              </a:defRPr>
+            </a:pPr>
           </a:p>
         </p:txBody>
       </p:sp>
@@ -8302,7 +8920,7 @@
         <p:spPr>
           <a:xfrm>
             <a:off x="502919" y="3474720"/>
-            <a:ext cx="457202" cy="1115570"/>
+            <a:ext cx="457202" cy="1115571"/>
           </a:xfrm>
           <a:prstGeom prst="roundRect">
             <a:avLst>
@@ -8320,7 +8938,14 @@
           <a:bodyPr lIns="0" tIns="0" rIns="0" bIns="0"/>
           <a:lstStyle/>
           <a:p>
-            <a:pPr/>
+            <a:pPr>
+              <a:defRPr>
+                <a:latin typeface="+mn-lt"/>
+                <a:ea typeface="+mn-ea"/>
+                <a:cs typeface="+mn-cs"/>
+                <a:sym typeface="Helvetica"/>
+              </a:defRPr>
+            </a:pPr>
           </a:p>
         </p:txBody>
       </p:sp>
@@ -8333,7 +8958,7 @@
         <p:spPr>
           <a:xfrm>
             <a:off x="502919" y="3905503"/>
-            <a:ext cx="457202" cy="254001"/>
+            <a:ext cx="457203" cy="254001"/>
           </a:xfrm>
           <a:prstGeom prst="rect">
             <a:avLst/>
@@ -8380,7 +9005,7 @@
         </p:nvSpPr>
         <p:spPr>
           <a:xfrm>
-            <a:off x="1042416" y="3638294"/>
+            <a:off x="1042416" y="3638293"/>
             <a:ext cx="7589519" cy="203201"/>
           </a:xfrm>
           <a:prstGeom prst="rect">
@@ -8453,6 +9078,10 @@
                 <a:solidFill>
                   <a:srgbClr val="8FA5BB"/>
                 </a:solidFill>
+                <a:latin typeface="+mn-lt"/>
+                <a:ea typeface="+mn-ea"/>
+                <a:cs typeface="+mn-cs"/>
+                <a:sym typeface="Helvetica"/>
               </a:defRPr>
             </a:lvl1pPr>
           </a:lstStyle>
@@ -8497,6 +9126,10 @@
                 <a:solidFill>
                   <a:srgbClr val="8FA5BB"/>
                 </a:solidFill>
+                <a:latin typeface="+mn-lt"/>
+                <a:ea typeface="+mn-ea"/>
+                <a:cs typeface="+mn-cs"/>
+                <a:sym typeface="Helvetica"/>
               </a:defRPr>
             </a:lvl1pPr>
           </a:lstStyle>
@@ -8542,8 +9175,8 @@
         </p:nvSpPr>
         <p:spPr>
           <a:xfrm>
-            <a:off x="-126463" y="-94656"/>
-            <a:ext cx="9396926" cy="5332812"/>
+            <a:off x="-126463" y="-94657"/>
+            <a:ext cx="9396926" cy="5332814"/>
           </a:xfrm>
           <a:prstGeom prst="rect">
             <a:avLst/>
@@ -8559,7 +9192,14 @@
           <a:bodyPr lIns="0" tIns="0" rIns="0" bIns="0"/>
           <a:lstStyle/>
           <a:p>
-            <a:pPr/>
+            <a:pPr>
+              <a:defRPr>
+                <a:latin typeface="+mn-lt"/>
+                <a:ea typeface="+mn-ea"/>
+                <a:cs typeface="+mn-cs"/>
+                <a:sym typeface="Helvetica"/>
+              </a:defRPr>
+            </a:pPr>
           </a:p>
         </p:txBody>
       </p:sp>
@@ -8620,7 +9260,7 @@
         <p:spPr>
           <a:xfrm>
             <a:off x="1732787" y="1628716"/>
-            <a:ext cx="1371602" cy="548642"/>
+            <a:ext cx="1371603" cy="548643"/>
           </a:xfrm>
           <a:prstGeom prst="roundRect">
             <a:avLst>
@@ -8638,7 +9278,14 @@
           <a:bodyPr lIns="0" tIns="0" rIns="0" bIns="0"/>
           <a:lstStyle/>
           <a:p>
-            <a:pPr/>
+            <a:pPr>
+              <a:defRPr>
+                <a:latin typeface="+mn-lt"/>
+                <a:ea typeface="+mn-ea"/>
+                <a:cs typeface="+mn-cs"/>
+                <a:sym typeface="Helvetica"/>
+              </a:defRPr>
+            </a:pPr>
           </a:p>
         </p:txBody>
       </p:sp>
@@ -8650,8 +9297,8 @@
         </p:nvSpPr>
         <p:spPr>
           <a:xfrm>
-            <a:off x="1732787" y="1737936"/>
-            <a:ext cx="1371602" cy="330201"/>
+            <a:off x="1732787" y="1737935"/>
+            <a:ext cx="1371603" cy="330201"/>
           </a:xfrm>
           <a:prstGeom prst="rect">
             <a:avLst/>
@@ -8676,6 +9323,10 @@
                 <a:solidFill>
                   <a:srgbClr val="EEF2F7"/>
                 </a:solidFill>
+                <a:latin typeface="+mn-lt"/>
+                <a:ea typeface="+mn-ea"/>
+                <a:cs typeface="+mn-cs"/>
+                <a:sym typeface="Helvetica"/>
               </a:defRPr>
             </a:pPr>
             <a:r>
@@ -8688,6 +9339,10 @@
                 <a:solidFill>
                   <a:srgbClr val="EEF2F7"/>
                 </a:solidFill>
+                <a:latin typeface="+mn-lt"/>
+                <a:ea typeface="+mn-ea"/>
+                <a:cs typeface="+mn-cs"/>
+                <a:sym typeface="Helvetica"/>
               </a:defRPr>
             </a:pPr>
             <a:r>
@@ -8704,8 +9359,8 @@
         </p:nvSpPr>
         <p:spPr>
           <a:xfrm>
-            <a:off x="3150106" y="1903035"/>
-            <a:ext cx="457202" cy="2"/>
+            <a:off x="3150105" y="1903035"/>
+            <a:ext cx="457203" cy="3"/>
           </a:xfrm>
           <a:prstGeom prst="line">
             <a:avLst/>
@@ -8717,7 +9372,7 @@
           </a:ln>
         </p:spPr>
         <p:txBody>
-          <a:bodyPr lIns="0" tIns="0" rIns="0" bIns="0"/>
+          <a:bodyPr lIns="45718" tIns="45718" rIns="45718" bIns="45718"/>
           <a:lstStyle/>
           <a:p>
             <a:pPr/>
@@ -8753,7 +9408,14 @@
           <a:bodyPr lIns="0" tIns="0" rIns="0" bIns="0"/>
           <a:lstStyle/>
           <a:p>
-            <a:pPr/>
+            <a:pPr>
+              <a:defRPr>
+                <a:latin typeface="+mn-lt"/>
+                <a:ea typeface="+mn-ea"/>
+                <a:cs typeface="+mn-cs"/>
+                <a:sym typeface="Helvetica"/>
+              </a:defRPr>
+            </a:pPr>
           </a:p>
         </p:txBody>
       </p:sp>
@@ -8814,7 +9476,7 @@
         <p:spPr>
           <a:xfrm>
             <a:off x="5618986" y="1903035"/>
-            <a:ext cx="457202" cy="2"/>
+            <a:ext cx="457203" cy="3"/>
           </a:xfrm>
           <a:prstGeom prst="line">
             <a:avLst/>
@@ -8826,7 +9488,7 @@
           </a:ln>
         </p:spPr>
         <p:txBody>
-          <a:bodyPr lIns="0" tIns="0" rIns="0" bIns="0"/>
+          <a:bodyPr lIns="45718" tIns="45718" rIns="45718" bIns="45718"/>
           <a:lstStyle/>
           <a:p>
             <a:pPr/>
@@ -8842,7 +9504,7 @@
         <p:spPr>
           <a:xfrm>
             <a:off x="6121906" y="1564707"/>
-            <a:ext cx="1508762" cy="685802"/>
+            <a:ext cx="1508763" cy="685802"/>
           </a:xfrm>
           <a:prstGeom prst="roundRect">
             <a:avLst>
@@ -8862,7 +9524,14 @@
           <a:bodyPr lIns="0" tIns="0" rIns="0" bIns="0"/>
           <a:lstStyle/>
           <a:p>
-            <a:pPr/>
+            <a:pPr>
+              <a:defRPr>
+                <a:latin typeface="+mn-lt"/>
+                <a:ea typeface="+mn-ea"/>
+                <a:cs typeface="+mn-cs"/>
+                <a:sym typeface="Helvetica"/>
+              </a:defRPr>
+            </a:pPr>
           </a:p>
         </p:txBody>
       </p:sp>
@@ -8874,8 +9543,8 @@
         </p:nvSpPr>
         <p:spPr>
           <a:xfrm>
-            <a:off x="6121906" y="1818708"/>
-            <a:ext cx="1508762" cy="177801"/>
+            <a:off x="6121906" y="1818707"/>
+            <a:ext cx="1508763" cy="177801"/>
           </a:xfrm>
           <a:prstGeom prst="rect">
             <a:avLst/>
@@ -8899,6 +9568,10 @@
                 <a:solidFill>
                   <a:srgbClr val="FFFFFF"/>
                 </a:solidFill>
+                <a:latin typeface="+mn-lt"/>
+                <a:ea typeface="+mn-ea"/>
+                <a:cs typeface="+mn-cs"/>
+                <a:sym typeface="Helvetica"/>
               </a:defRPr>
             </a:lvl1pPr>
           </a:lstStyle>
@@ -8918,7 +9591,7 @@
         </p:nvSpPr>
         <p:spPr>
           <a:xfrm>
-            <a:off x="2286000" y="2642362"/>
+            <a:off x="2286000" y="2642361"/>
             <a:ext cx="4754880" cy="165101"/>
           </a:xfrm>
           <a:prstGeom prst="rect">
@@ -8943,6 +9616,10 @@
                 <a:solidFill>
                   <a:srgbClr val="E07B54"/>
                 </a:solidFill>
+                <a:latin typeface="+mn-lt"/>
+                <a:ea typeface="+mn-ea"/>
+                <a:cs typeface="+mn-cs"/>
+                <a:sym typeface="Helvetica"/>
               </a:defRPr>
             </a:lvl1pPr>
           </a:lstStyle>
@@ -8962,8 +9639,8 @@
         </p:nvSpPr>
         <p:spPr>
           <a:xfrm>
-            <a:off x="411480" y="3035806"/>
-            <a:ext cx="146307" cy="146307"/>
+            <a:off x="411480" y="3035805"/>
+            <a:ext cx="146309" cy="146309"/>
           </a:xfrm>
           <a:prstGeom prst="ellipse">
             <a:avLst/>
@@ -8979,7 +9656,14 @@
           <a:bodyPr lIns="0" tIns="0" rIns="0" bIns="0"/>
           <a:lstStyle/>
           <a:p>
-            <a:pPr/>
+            <a:pPr>
+              <a:defRPr>
+                <a:latin typeface="+mn-lt"/>
+                <a:ea typeface="+mn-ea"/>
+                <a:cs typeface="+mn-cs"/>
+                <a:sym typeface="Helvetica"/>
+              </a:defRPr>
+            </a:pPr>
           </a:p>
         </p:txBody>
       </p:sp>
@@ -8991,7 +9675,7 @@
         </p:nvSpPr>
         <p:spPr>
           <a:xfrm>
-            <a:off x="658368" y="3089656"/>
+            <a:off x="658368" y="3000755"/>
             <a:ext cx="8046719" cy="203201"/>
           </a:xfrm>
           <a:prstGeom prst="rect">
@@ -9016,6 +9700,10 @@
                 <a:solidFill>
                   <a:srgbClr val="EEF2F7"/>
                 </a:solidFill>
+                <a:latin typeface="+mn-lt"/>
+                <a:ea typeface="+mn-ea"/>
+                <a:cs typeface="+mn-cs"/>
+                <a:sym typeface="Helvetica"/>
               </a:defRPr>
             </a:lvl1pPr>
           </a:lstStyle>
@@ -9036,7 +9724,7 @@
         <p:spPr>
           <a:xfrm>
             <a:off x="411480" y="3538728"/>
-            <a:ext cx="146307" cy="146307"/>
+            <a:ext cx="146309" cy="146309"/>
           </a:xfrm>
           <a:prstGeom prst="ellipse">
             <a:avLst/>
@@ -9052,7 +9740,14 @@
           <a:bodyPr lIns="0" tIns="0" rIns="0" bIns="0"/>
           <a:lstStyle/>
           <a:p>
-            <a:pPr/>
+            <a:pPr>
+              <a:defRPr>
+                <a:latin typeface="+mn-lt"/>
+                <a:ea typeface="+mn-ea"/>
+                <a:cs typeface="+mn-cs"/>
+                <a:sym typeface="Helvetica"/>
+              </a:defRPr>
+            </a:pPr>
           </a:p>
         </p:txBody>
       </p:sp>
@@ -9064,7 +9759,7 @@
         </p:nvSpPr>
         <p:spPr>
           <a:xfrm>
-            <a:off x="658368" y="3592576"/>
+            <a:off x="658368" y="3503676"/>
             <a:ext cx="8046719" cy="203201"/>
           </a:xfrm>
           <a:prstGeom prst="rect">
@@ -9089,6 +9784,10 @@
                 <a:solidFill>
                   <a:srgbClr val="EEF2F7"/>
                 </a:solidFill>
+                <a:latin typeface="+mn-lt"/>
+                <a:ea typeface="+mn-ea"/>
+                <a:cs typeface="+mn-cs"/>
+                <a:sym typeface="Helvetica"/>
               </a:defRPr>
             </a:lvl1pPr>
           </a:lstStyle>
@@ -9109,7 +9808,7 @@
         <p:spPr>
           <a:xfrm>
             <a:off x="411480" y="4041647"/>
-            <a:ext cx="146307" cy="146307"/>
+            <a:ext cx="146309" cy="146309"/>
           </a:xfrm>
           <a:prstGeom prst="ellipse">
             <a:avLst/>
@@ -9125,7 +9824,14 @@
           <a:bodyPr lIns="0" tIns="0" rIns="0" bIns="0"/>
           <a:lstStyle/>
           <a:p>
-            <a:pPr/>
+            <a:pPr>
+              <a:defRPr>
+                <a:latin typeface="+mn-lt"/>
+                <a:ea typeface="+mn-ea"/>
+                <a:cs typeface="+mn-cs"/>
+                <a:sym typeface="Helvetica"/>
+              </a:defRPr>
+            </a:pPr>
           </a:p>
         </p:txBody>
       </p:sp>
@@ -9137,7 +9843,7 @@
         </p:nvSpPr>
         <p:spPr>
           <a:xfrm>
-            <a:off x="658368" y="4095496"/>
+            <a:off x="658368" y="4006596"/>
             <a:ext cx="8046719" cy="203201"/>
           </a:xfrm>
           <a:prstGeom prst="rect">
@@ -9162,6 +9868,10 @@
                 <a:solidFill>
                   <a:srgbClr val="EEF2F7"/>
                 </a:solidFill>
+                <a:latin typeface="+mn-lt"/>
+                <a:ea typeface="+mn-ea"/>
+                <a:cs typeface="+mn-cs"/>
+                <a:sym typeface="Helvetica"/>
               </a:defRPr>
             </a:lvl1pPr>
           </a:lstStyle>
@@ -9207,8 +9917,8 @@
         </p:nvSpPr>
         <p:spPr>
           <a:xfrm>
-            <a:off x="-1" y="-1"/>
-            <a:ext cx="9144001" cy="5143503"/>
+            <a:off x="-1" y="-2"/>
+            <a:ext cx="9144001" cy="5143505"/>
           </a:xfrm>
           <a:prstGeom prst="rect">
             <a:avLst/>
@@ -9224,7 +9934,14 @@
           <a:bodyPr lIns="0" tIns="0" rIns="0" bIns="0"/>
           <a:lstStyle/>
           <a:p>
-            <a:pPr/>
+            <a:pPr>
+              <a:defRPr>
+                <a:latin typeface="+mn-lt"/>
+                <a:ea typeface="+mn-ea"/>
+                <a:cs typeface="+mn-cs"/>
+                <a:sym typeface="Helvetica"/>
+              </a:defRPr>
+            </a:pPr>
           </a:p>
         </p:txBody>
       </p:sp>
@@ -9284,8 +10001,8 @@
         </p:nvSpPr>
         <p:spPr>
           <a:xfrm>
-            <a:off x="269081" y="1938336"/>
-            <a:ext cx="2190751" cy="876302"/>
+            <a:off x="269081" y="1938335"/>
+            <a:ext cx="2190751" cy="876303"/>
           </a:xfrm>
           <a:prstGeom prst="roundRect">
             <a:avLst>
@@ -9305,7 +10022,14 @@
           <a:bodyPr lIns="0" tIns="0" rIns="0" bIns="0"/>
           <a:lstStyle/>
           <a:p>
-            <a:pPr/>
+            <a:pPr>
+              <a:defRPr>
+                <a:latin typeface="+mn-lt"/>
+                <a:ea typeface="+mn-ea"/>
+                <a:cs typeface="+mn-cs"/>
+                <a:sym typeface="Helvetica"/>
+              </a:defRPr>
+            </a:pPr>
           </a:p>
         </p:txBody>
       </p:sp>
@@ -9318,7 +10042,7 @@
         <p:spPr>
           <a:xfrm>
             <a:off x="457675" y="1983388"/>
-            <a:ext cx="594362" cy="214699"/>
+            <a:ext cx="594363" cy="214697"/>
           </a:xfrm>
           <a:prstGeom prst="rect">
             <a:avLst/>
@@ -9366,7 +10090,7 @@
         <p:spPr>
           <a:xfrm>
             <a:off x="457675" y="2209644"/>
-            <a:ext cx="1813562" cy="467037"/>
+            <a:ext cx="1813563" cy="467035"/>
           </a:xfrm>
           <a:prstGeom prst="rect">
             <a:avLst/>
@@ -9434,7 +10158,14 @@
           <a:bodyPr lIns="0" tIns="0" rIns="0" bIns="0"/>
           <a:lstStyle/>
           <a:p>
-            <a:pPr/>
+            <a:pPr>
+              <a:defRPr>
+                <a:latin typeface="+mn-lt"/>
+                <a:ea typeface="+mn-ea"/>
+                <a:cs typeface="+mn-cs"/>
+                <a:sym typeface="Helvetica"/>
+              </a:defRPr>
+            </a:pPr>
           </a:p>
         </p:txBody>
       </p:sp>
@@ -9446,8 +10177,8 @@
         </p:nvSpPr>
         <p:spPr>
           <a:xfrm>
-            <a:off x="3055618" y="2085477"/>
-            <a:ext cx="670563" cy="362945"/>
+            <a:off x="3055617" y="2085476"/>
+            <a:ext cx="670564" cy="362943"/>
           </a:xfrm>
           <a:prstGeom prst="rect">
             <a:avLst/>
@@ -9494,8 +10225,8 @@
         </p:nvSpPr>
         <p:spPr>
           <a:xfrm>
-            <a:off x="2998468" y="2540807"/>
-            <a:ext cx="784863" cy="366685"/>
+            <a:off x="2998467" y="2540806"/>
+            <a:ext cx="784864" cy="366683"/>
           </a:xfrm>
           <a:prstGeom prst="rect">
             <a:avLst/>
@@ -9573,7 +10304,14 @@
           <a:bodyPr lIns="0" tIns="0" rIns="0" bIns="0"/>
           <a:lstStyle/>
           <a:p>
-            <a:pPr/>
+            <a:pPr>
+              <a:defRPr>
+                <a:latin typeface="+mn-lt"/>
+                <a:ea typeface="+mn-ea"/>
+                <a:cs typeface="+mn-cs"/>
+                <a:sym typeface="Helvetica"/>
+              </a:defRPr>
+            </a:pPr>
           </a:p>
         </p:txBody>
       </p:sp>
@@ -9602,7 +10340,14 @@
           <a:bodyPr lIns="0" tIns="0" rIns="0" bIns="0"/>
           <a:lstStyle/>
           <a:p>
-            <a:pPr/>
+            <a:pPr>
+              <a:defRPr>
+                <a:latin typeface="+mn-lt"/>
+                <a:ea typeface="+mn-ea"/>
+                <a:cs typeface="+mn-cs"/>
+                <a:sym typeface="Helvetica"/>
+              </a:defRPr>
+            </a:pPr>
           </a:p>
         </p:txBody>
       </p:sp>
@@ -9631,7 +10376,14 @@
           <a:bodyPr lIns="0" tIns="0" rIns="0" bIns="0"/>
           <a:lstStyle/>
           <a:p>
-            <a:pPr/>
+            <a:pPr>
+              <a:defRPr>
+                <a:latin typeface="+mn-lt"/>
+                <a:ea typeface="+mn-ea"/>
+                <a:cs typeface="+mn-cs"/>
+                <a:sym typeface="Helvetica"/>
+              </a:defRPr>
+            </a:pPr>
           </a:p>
         </p:txBody>
       </p:sp>
@@ -9660,7 +10412,14 @@
           <a:bodyPr lIns="0" tIns="0" rIns="0" bIns="0"/>
           <a:lstStyle/>
           <a:p>
-            <a:pPr/>
+            <a:pPr>
+              <a:defRPr>
+                <a:latin typeface="+mn-lt"/>
+                <a:ea typeface="+mn-ea"/>
+                <a:cs typeface="+mn-cs"/>
+                <a:sym typeface="Helvetica"/>
+              </a:defRPr>
+            </a:pPr>
           </a:p>
         </p:txBody>
       </p:sp>
@@ -9689,7 +10448,14 @@
           <a:bodyPr lIns="0" tIns="0" rIns="0" bIns="0"/>
           <a:lstStyle/>
           <a:p>
-            <a:pPr/>
+            <a:pPr>
+              <a:defRPr>
+                <a:latin typeface="+mn-lt"/>
+                <a:ea typeface="+mn-ea"/>
+                <a:cs typeface="+mn-cs"/>
+                <a:sym typeface="Helvetica"/>
+              </a:defRPr>
+            </a:pPr>
           </a:p>
         </p:txBody>
       </p:sp>
@@ -9722,7 +10488,14 @@
           <a:bodyPr lIns="0" tIns="0" rIns="0" bIns="0"/>
           <a:lstStyle/>
           <a:p>
-            <a:pPr/>
+            <a:pPr>
+              <a:defRPr>
+                <a:latin typeface="+mn-lt"/>
+                <a:ea typeface="+mn-ea"/>
+                <a:cs typeface="+mn-cs"/>
+                <a:sym typeface="Helvetica"/>
+              </a:defRPr>
+            </a:pPr>
           </a:p>
         </p:txBody>
       </p:sp>
@@ -9734,8 +10507,8 @@
         </p:nvSpPr>
         <p:spPr>
           <a:xfrm>
-            <a:off x="4436743" y="1149949"/>
-            <a:ext cx="2289813" cy="214700"/>
+            <a:off x="4436743" y="1149948"/>
+            <a:ext cx="2289814" cy="214698"/>
           </a:xfrm>
           <a:prstGeom prst="rect">
             <a:avLst/>
@@ -9799,7 +10572,14 @@
           <a:bodyPr lIns="0" tIns="0" rIns="0" bIns="0"/>
           <a:lstStyle/>
           <a:p>
-            <a:pPr/>
+            <a:pPr>
+              <a:defRPr>
+                <a:latin typeface="+mn-lt"/>
+                <a:ea typeface="+mn-ea"/>
+                <a:cs typeface="+mn-cs"/>
+                <a:sym typeface="Helvetica"/>
+              </a:defRPr>
+            </a:pPr>
           </a:p>
         </p:txBody>
       </p:sp>
@@ -9828,7 +10608,14 @@
           <a:bodyPr lIns="0" tIns="0" rIns="0" bIns="0"/>
           <a:lstStyle/>
           <a:p>
-            <a:pPr/>
+            <a:pPr>
+              <a:defRPr>
+                <a:latin typeface="+mn-lt"/>
+                <a:ea typeface="+mn-ea"/>
+                <a:cs typeface="+mn-cs"/>
+                <a:sym typeface="Helvetica"/>
+              </a:defRPr>
+            </a:pPr>
           </a:p>
         </p:txBody>
       </p:sp>
@@ -9857,7 +10644,14 @@
           <a:bodyPr lIns="0" tIns="0" rIns="0" bIns="0"/>
           <a:lstStyle/>
           <a:p>
-            <a:pPr/>
+            <a:pPr>
+              <a:defRPr>
+                <a:latin typeface="+mn-lt"/>
+                <a:ea typeface="+mn-ea"/>
+                <a:cs typeface="+mn-cs"/>
+                <a:sym typeface="Helvetica"/>
+              </a:defRPr>
+            </a:pPr>
           </a:p>
         </p:txBody>
       </p:sp>
@@ -9886,7 +10680,14 @@
           <a:bodyPr lIns="0" tIns="0" rIns="0" bIns="0"/>
           <a:lstStyle/>
           <a:p>
-            <a:pPr/>
+            <a:pPr>
+              <a:defRPr>
+                <a:latin typeface="+mn-lt"/>
+                <a:ea typeface="+mn-ea"/>
+                <a:cs typeface="+mn-cs"/>
+                <a:sym typeface="Helvetica"/>
+              </a:defRPr>
+            </a:pPr>
           </a:p>
         </p:txBody>
       </p:sp>
@@ -9915,7 +10716,14 @@
           <a:bodyPr lIns="0" tIns="0" rIns="0" bIns="0"/>
           <a:lstStyle/>
           <a:p>
-            <a:pPr/>
+            <a:pPr>
+              <a:defRPr>
+                <a:latin typeface="+mn-lt"/>
+                <a:ea typeface="+mn-ea"/>
+                <a:cs typeface="+mn-cs"/>
+                <a:sym typeface="Helvetica"/>
+              </a:defRPr>
+            </a:pPr>
           </a:p>
         </p:txBody>
       </p:sp>
@@ -9944,7 +10752,14 @@
           <a:bodyPr lIns="0" tIns="0" rIns="0" bIns="0"/>
           <a:lstStyle/>
           <a:p>
-            <a:pPr/>
+            <a:pPr>
+              <a:defRPr>
+                <a:latin typeface="+mn-lt"/>
+                <a:ea typeface="+mn-ea"/>
+                <a:cs typeface="+mn-cs"/>
+                <a:sym typeface="Helvetica"/>
+              </a:defRPr>
+            </a:pPr>
           </a:p>
         </p:txBody>
       </p:sp>
@@ -9973,7 +10788,14 @@
           <a:bodyPr lIns="0" tIns="0" rIns="0" bIns="0"/>
           <a:lstStyle/>
           <a:p>
-            <a:pPr/>
+            <a:pPr>
+              <a:defRPr>
+                <a:latin typeface="+mn-lt"/>
+                <a:ea typeface="+mn-ea"/>
+                <a:cs typeface="+mn-cs"/>
+                <a:sym typeface="Helvetica"/>
+              </a:defRPr>
+            </a:pPr>
           </a:p>
         </p:txBody>
       </p:sp>
@@ -10002,7 +10824,14 @@
           <a:bodyPr lIns="0" tIns="0" rIns="0" bIns="0"/>
           <a:lstStyle/>
           <a:p>
-            <a:pPr/>
+            <a:pPr>
+              <a:defRPr>
+                <a:latin typeface="+mn-lt"/>
+                <a:ea typeface="+mn-ea"/>
+                <a:cs typeface="+mn-cs"/>
+                <a:sym typeface="Helvetica"/>
+              </a:defRPr>
+            </a:pPr>
           </a:p>
         </p:txBody>
       </p:sp>
@@ -10031,7 +10860,14 @@
           <a:bodyPr lIns="0" tIns="0" rIns="0" bIns="0"/>
           <a:lstStyle/>
           <a:p>
-            <a:pPr/>
+            <a:pPr>
+              <a:defRPr>
+                <a:latin typeface="+mn-lt"/>
+                <a:ea typeface="+mn-ea"/>
+                <a:cs typeface="+mn-cs"/>
+                <a:sym typeface="Helvetica"/>
+              </a:defRPr>
+            </a:pPr>
           </a:p>
         </p:txBody>
       </p:sp>
@@ -10043,8 +10879,8 @@
         </p:nvSpPr>
         <p:spPr>
           <a:xfrm>
-            <a:off x="2507851" y="2376486"/>
-            <a:ext cx="311153" cy="2"/>
+            <a:off x="2507850" y="2376485"/>
+            <a:ext cx="311154" cy="3"/>
           </a:xfrm>
           <a:prstGeom prst="line">
             <a:avLst/>
@@ -10057,7 +10893,7 @@
           </a:ln>
         </p:spPr>
         <p:txBody>
-          <a:bodyPr lIns="0" tIns="0" rIns="0" bIns="0"/>
+          <a:bodyPr lIns="45718" tIns="45718" rIns="45718" bIns="45718"/>
           <a:lstStyle/>
           <a:p>
             <a:pPr/>
@@ -10073,7 +10909,7 @@
         <p:spPr>
           <a:xfrm>
             <a:off x="5357812" y="1639633"/>
-            <a:ext cx="2305053" cy="561977"/>
+            <a:ext cx="2305053" cy="561978"/>
           </a:xfrm>
           <a:prstGeom prst="line">
             <a:avLst/>
@@ -10085,7 +10921,7 @@
           </a:ln>
         </p:spPr>
         <p:txBody>
-          <a:bodyPr lIns="0" tIns="0" rIns="0" bIns="0"/>
+          <a:bodyPr lIns="45718" tIns="45718" rIns="45718" bIns="45718"/>
           <a:lstStyle/>
           <a:p>
             <a:pPr/>
@@ -10101,7 +10937,7 @@
         <p:spPr>
           <a:xfrm>
             <a:off x="5362573" y="3054167"/>
-            <a:ext cx="2143128" cy="581027"/>
+            <a:ext cx="2143128" cy="581028"/>
           </a:xfrm>
           <a:prstGeom prst="line">
             <a:avLst/>
@@ -10113,7 +10949,7 @@
           </a:ln>
         </p:spPr>
         <p:txBody>
-          <a:bodyPr lIns="0" tIns="0" rIns="0" bIns="0"/>
+          <a:bodyPr lIns="45718" tIns="45718" rIns="45718" bIns="45718"/>
           <a:lstStyle/>
           <a:p>
             <a:pPr/>
@@ -10128,8 +10964,8 @@
         </p:nvSpPr>
         <p:spPr>
           <a:xfrm>
-            <a:off x="5760718" y="4804167"/>
-            <a:ext cx="2918463" cy="202415"/>
+            <a:off x="5760718" y="4804166"/>
+            <a:ext cx="2918464" cy="202414"/>
           </a:xfrm>
           <a:prstGeom prst="rect">
             <a:avLst/>
@@ -10195,7 +11031,14 @@
           <a:bodyPr lIns="0" tIns="0" rIns="0" bIns="0"/>
           <a:lstStyle/>
           <a:p>
-            <a:pPr/>
+            <a:pPr>
+              <a:defRPr>
+                <a:latin typeface="+mn-lt"/>
+                <a:ea typeface="+mn-ea"/>
+                <a:cs typeface="+mn-cs"/>
+                <a:sym typeface="Helvetica"/>
+              </a:defRPr>
+            </a:pPr>
           </a:p>
         </p:txBody>
       </p:sp>
@@ -10226,7 +11069,14 @@
           <a:bodyPr lIns="0" tIns="0" rIns="0" bIns="0"/>
           <a:lstStyle/>
           <a:p>
-            <a:pPr/>
+            <a:pPr>
+              <a:defRPr>
+                <a:latin typeface="+mn-lt"/>
+                <a:ea typeface="+mn-ea"/>
+                <a:cs typeface="+mn-cs"/>
+                <a:sym typeface="Helvetica"/>
+              </a:defRPr>
+            </a:pPr>
           </a:p>
         </p:txBody>
       </p:sp>
@@ -10238,8 +11088,8 @@
         </p:nvSpPr>
         <p:spPr>
           <a:xfrm>
-            <a:off x="4490720" y="2893024"/>
-            <a:ext cx="727712" cy="214700"/>
+            <a:off x="4490720" y="2893023"/>
+            <a:ext cx="727713" cy="214698"/>
           </a:xfrm>
           <a:prstGeom prst="rect">
             <a:avLst/>
@@ -10286,8 +11136,8 @@
         </p:nvSpPr>
         <p:spPr>
           <a:xfrm>
-            <a:off x="-1" y="981272"/>
-            <a:ext cx="4044271" cy="4162230"/>
+            <a:off x="-1" y="981271"/>
+            <a:ext cx="4044271" cy="4162232"/>
           </a:xfrm>
           <a:prstGeom prst="rect">
             <a:avLst/>
@@ -10303,7 +11153,14 @@
           <a:bodyPr lIns="0" tIns="0" rIns="0" bIns="0"/>
           <a:lstStyle/>
           <a:p>
-            <a:pPr/>
+            <a:pPr>
+              <a:defRPr>
+                <a:latin typeface="+mn-lt"/>
+                <a:ea typeface="+mn-ea"/>
+                <a:cs typeface="+mn-cs"/>
+                <a:sym typeface="Helvetica"/>
+              </a:defRPr>
+            </a:pPr>
           </a:p>
         </p:txBody>
       </p:sp>
@@ -10341,8 +11198,8 @@
         </p:nvSpPr>
         <p:spPr>
           <a:xfrm>
-            <a:off x="-1" y="-1"/>
-            <a:ext cx="9144001" cy="5143503"/>
+            <a:off x="-1" y="-2"/>
+            <a:ext cx="9144001" cy="5143505"/>
           </a:xfrm>
           <a:prstGeom prst="rect">
             <a:avLst/>
@@ -10358,7 +11215,14 @@
           <a:bodyPr lIns="0" tIns="0" rIns="0" bIns="0"/>
           <a:lstStyle/>
           <a:p>
-            <a:pPr/>
+            <a:pPr>
+              <a:defRPr>
+                <a:latin typeface="+mn-lt"/>
+                <a:ea typeface="+mn-ea"/>
+                <a:cs typeface="+mn-cs"/>
+                <a:sym typeface="Helvetica"/>
+              </a:defRPr>
+            </a:pPr>
           </a:p>
         </p:txBody>
       </p:sp>
@@ -10419,7 +11283,7 @@
         <p:spPr>
           <a:xfrm>
             <a:off x="269081" y="1938338"/>
-            <a:ext cx="2190751" cy="876302"/>
+            <a:ext cx="2190751" cy="876303"/>
           </a:xfrm>
           <a:prstGeom prst="roundRect">
             <a:avLst>
@@ -10439,7 +11303,14 @@
           <a:bodyPr lIns="0" tIns="0" rIns="0" bIns="0"/>
           <a:lstStyle/>
           <a:p>
-            <a:pPr/>
+            <a:pPr>
+              <a:defRPr>
+                <a:latin typeface="+mn-lt"/>
+                <a:ea typeface="+mn-ea"/>
+                <a:cs typeface="+mn-cs"/>
+                <a:sym typeface="Helvetica"/>
+              </a:defRPr>
+            </a:pPr>
           </a:p>
         </p:txBody>
       </p:sp>
@@ -10452,7 +11323,7 @@
         <p:spPr>
           <a:xfrm>
             <a:off x="457675" y="1983388"/>
-            <a:ext cx="594362" cy="214699"/>
+            <a:ext cx="594363" cy="214697"/>
           </a:xfrm>
           <a:prstGeom prst="rect">
             <a:avLst/>
@@ -10500,7 +11371,7 @@
         <p:spPr>
           <a:xfrm>
             <a:off x="457675" y="2304894"/>
-            <a:ext cx="1813563" cy="276537"/>
+            <a:ext cx="1813563" cy="276535"/>
           </a:xfrm>
           <a:prstGeom prst="rect">
             <a:avLst/>
@@ -10568,7 +11439,14 @@
           <a:bodyPr lIns="0" tIns="0" rIns="0" bIns="0"/>
           <a:lstStyle/>
           <a:p>
-            <a:pPr/>
+            <a:pPr>
+              <a:defRPr>
+                <a:latin typeface="+mn-lt"/>
+                <a:ea typeface="+mn-ea"/>
+                <a:cs typeface="+mn-cs"/>
+                <a:sym typeface="Helvetica"/>
+              </a:defRPr>
+            </a:pPr>
           </a:p>
         </p:txBody>
       </p:sp>
@@ -10580,8 +11458,8 @@
         </p:nvSpPr>
         <p:spPr>
           <a:xfrm>
-            <a:off x="3055620" y="2085477"/>
-            <a:ext cx="670562" cy="362945"/>
+            <a:off x="3055620" y="2085476"/>
+            <a:ext cx="670563" cy="362943"/>
           </a:xfrm>
           <a:prstGeom prst="rect">
             <a:avLst/>
@@ -10628,8 +11506,8 @@
         </p:nvSpPr>
         <p:spPr>
           <a:xfrm>
-            <a:off x="2998470" y="2540807"/>
-            <a:ext cx="784862" cy="366685"/>
+            <a:off x="2998470" y="2540806"/>
+            <a:ext cx="784863" cy="366683"/>
           </a:xfrm>
           <a:prstGeom prst="rect">
             <a:avLst/>
@@ -10707,7 +11585,14 @@
           <a:bodyPr lIns="0" tIns="0" rIns="0" bIns="0"/>
           <a:lstStyle/>
           <a:p>
-            <a:pPr/>
+            <a:pPr>
+              <a:defRPr>
+                <a:latin typeface="+mn-lt"/>
+                <a:ea typeface="+mn-ea"/>
+                <a:cs typeface="+mn-cs"/>
+                <a:sym typeface="Helvetica"/>
+              </a:defRPr>
+            </a:pPr>
           </a:p>
         </p:txBody>
       </p:sp>
@@ -10736,7 +11621,14 @@
           <a:bodyPr lIns="0" tIns="0" rIns="0" bIns="0"/>
           <a:lstStyle/>
           <a:p>
-            <a:pPr/>
+            <a:pPr>
+              <a:defRPr>
+                <a:latin typeface="+mn-lt"/>
+                <a:ea typeface="+mn-ea"/>
+                <a:cs typeface="+mn-cs"/>
+                <a:sym typeface="Helvetica"/>
+              </a:defRPr>
+            </a:pPr>
           </a:p>
         </p:txBody>
       </p:sp>
@@ -10765,7 +11657,14 @@
           <a:bodyPr lIns="0" tIns="0" rIns="0" bIns="0"/>
           <a:lstStyle/>
           <a:p>
-            <a:pPr/>
+            <a:pPr>
+              <a:defRPr>
+                <a:latin typeface="+mn-lt"/>
+                <a:ea typeface="+mn-ea"/>
+                <a:cs typeface="+mn-cs"/>
+                <a:sym typeface="Helvetica"/>
+              </a:defRPr>
+            </a:pPr>
           </a:p>
         </p:txBody>
       </p:sp>
@@ -10794,7 +11693,14 @@
           <a:bodyPr lIns="0" tIns="0" rIns="0" bIns="0"/>
           <a:lstStyle/>
           <a:p>
-            <a:pPr/>
+            <a:pPr>
+              <a:defRPr>
+                <a:latin typeface="+mn-lt"/>
+                <a:ea typeface="+mn-ea"/>
+                <a:cs typeface="+mn-cs"/>
+                <a:sym typeface="Helvetica"/>
+              </a:defRPr>
+            </a:pPr>
           </a:p>
         </p:txBody>
       </p:sp>
@@ -10823,7 +11729,14 @@
           <a:bodyPr lIns="0" tIns="0" rIns="0" bIns="0"/>
           <a:lstStyle/>
           <a:p>
-            <a:pPr/>
+            <a:pPr>
+              <a:defRPr>
+                <a:latin typeface="+mn-lt"/>
+                <a:ea typeface="+mn-ea"/>
+                <a:cs typeface="+mn-cs"/>
+                <a:sym typeface="Helvetica"/>
+              </a:defRPr>
+            </a:pPr>
           </a:p>
         </p:txBody>
       </p:sp>
@@ -10856,7 +11769,14 @@
           <a:bodyPr lIns="0" tIns="0" rIns="0" bIns="0"/>
           <a:lstStyle/>
           <a:p>
-            <a:pPr/>
+            <a:pPr>
+              <a:defRPr>
+                <a:latin typeface="+mn-lt"/>
+                <a:ea typeface="+mn-ea"/>
+                <a:cs typeface="+mn-cs"/>
+                <a:sym typeface="Helvetica"/>
+              </a:defRPr>
+            </a:pPr>
           </a:p>
         </p:txBody>
       </p:sp>
@@ -10868,8 +11788,8 @@
         </p:nvSpPr>
         <p:spPr>
           <a:xfrm>
-            <a:off x="4436745" y="1149949"/>
-            <a:ext cx="2289812" cy="214700"/>
+            <a:off x="4436745" y="1149948"/>
+            <a:ext cx="2289813" cy="214698"/>
           </a:xfrm>
           <a:prstGeom prst="rect">
             <a:avLst/>
@@ -10933,7 +11853,14 @@
           <a:bodyPr lIns="0" tIns="0" rIns="0" bIns="0"/>
           <a:lstStyle/>
           <a:p>
-            <a:pPr/>
+            <a:pPr>
+              <a:defRPr>
+                <a:latin typeface="+mn-lt"/>
+                <a:ea typeface="+mn-ea"/>
+                <a:cs typeface="+mn-cs"/>
+                <a:sym typeface="Helvetica"/>
+              </a:defRPr>
+            </a:pPr>
           </a:p>
         </p:txBody>
       </p:sp>
@@ -10962,7 +11889,14 @@
           <a:bodyPr lIns="0" tIns="0" rIns="0" bIns="0"/>
           <a:lstStyle/>
           <a:p>
-            <a:pPr/>
+            <a:pPr>
+              <a:defRPr>
+                <a:latin typeface="+mn-lt"/>
+                <a:ea typeface="+mn-ea"/>
+                <a:cs typeface="+mn-cs"/>
+                <a:sym typeface="Helvetica"/>
+              </a:defRPr>
+            </a:pPr>
           </a:p>
         </p:txBody>
       </p:sp>
@@ -10991,7 +11925,14 @@
           <a:bodyPr lIns="0" tIns="0" rIns="0" bIns="0"/>
           <a:lstStyle/>
           <a:p>
-            <a:pPr/>
+            <a:pPr>
+              <a:defRPr>
+                <a:latin typeface="+mn-lt"/>
+                <a:ea typeface="+mn-ea"/>
+                <a:cs typeface="+mn-cs"/>
+                <a:sym typeface="Helvetica"/>
+              </a:defRPr>
+            </a:pPr>
           </a:p>
         </p:txBody>
       </p:sp>
@@ -11020,7 +11961,14 @@
           <a:bodyPr lIns="0" tIns="0" rIns="0" bIns="0"/>
           <a:lstStyle/>
           <a:p>
-            <a:pPr/>
+            <a:pPr>
+              <a:defRPr>
+                <a:latin typeface="+mn-lt"/>
+                <a:ea typeface="+mn-ea"/>
+                <a:cs typeface="+mn-cs"/>
+                <a:sym typeface="Helvetica"/>
+              </a:defRPr>
+            </a:pPr>
           </a:p>
         </p:txBody>
       </p:sp>
@@ -11049,7 +11997,14 @@
           <a:bodyPr lIns="0" tIns="0" rIns="0" bIns="0"/>
           <a:lstStyle/>
           <a:p>
-            <a:pPr/>
+            <a:pPr>
+              <a:defRPr>
+                <a:latin typeface="+mn-lt"/>
+                <a:ea typeface="+mn-ea"/>
+                <a:cs typeface="+mn-cs"/>
+                <a:sym typeface="Helvetica"/>
+              </a:defRPr>
+            </a:pPr>
           </a:p>
         </p:txBody>
       </p:sp>
@@ -11078,7 +12033,14 @@
           <a:bodyPr lIns="0" tIns="0" rIns="0" bIns="0"/>
           <a:lstStyle/>
           <a:p>
-            <a:pPr/>
+            <a:pPr>
+              <a:defRPr>
+                <a:latin typeface="+mn-lt"/>
+                <a:ea typeface="+mn-ea"/>
+                <a:cs typeface="+mn-cs"/>
+                <a:sym typeface="Helvetica"/>
+              </a:defRPr>
+            </a:pPr>
           </a:p>
         </p:txBody>
       </p:sp>
@@ -11107,7 +12069,14 @@
           <a:bodyPr lIns="0" tIns="0" rIns="0" bIns="0"/>
           <a:lstStyle/>
           <a:p>
-            <a:pPr/>
+            <a:pPr>
+              <a:defRPr>
+                <a:latin typeface="+mn-lt"/>
+                <a:ea typeface="+mn-ea"/>
+                <a:cs typeface="+mn-cs"/>
+                <a:sym typeface="Helvetica"/>
+              </a:defRPr>
+            </a:pPr>
           </a:p>
         </p:txBody>
       </p:sp>
@@ -11136,7 +12105,14 @@
           <a:bodyPr lIns="0" tIns="0" rIns="0" bIns="0"/>
           <a:lstStyle/>
           <a:p>
-            <a:pPr/>
+            <a:pPr>
+              <a:defRPr>
+                <a:latin typeface="+mn-lt"/>
+                <a:ea typeface="+mn-ea"/>
+                <a:cs typeface="+mn-cs"/>
+                <a:sym typeface="Helvetica"/>
+              </a:defRPr>
+            </a:pPr>
           </a:p>
         </p:txBody>
       </p:sp>
@@ -11165,7 +12141,14 @@
           <a:bodyPr lIns="0" tIns="0" rIns="0" bIns="0"/>
           <a:lstStyle/>
           <a:p>
-            <a:pPr/>
+            <a:pPr>
+              <a:defRPr>
+                <a:latin typeface="+mn-lt"/>
+                <a:ea typeface="+mn-ea"/>
+                <a:cs typeface="+mn-cs"/>
+                <a:sym typeface="Helvetica"/>
+              </a:defRPr>
+            </a:pPr>
           </a:p>
         </p:txBody>
       </p:sp>
@@ -11177,8 +12160,8 @@
         </p:nvSpPr>
         <p:spPr>
           <a:xfrm>
-            <a:off x="2507851" y="2376488"/>
-            <a:ext cx="311152" cy="2"/>
+            <a:off x="2507850" y="2376488"/>
+            <a:ext cx="311153" cy="3"/>
           </a:xfrm>
           <a:prstGeom prst="line">
             <a:avLst/>
@@ -11191,7 +12174,7 @@
           </a:ln>
         </p:spPr>
         <p:txBody>
-          <a:bodyPr lIns="0" tIns="0" rIns="0" bIns="0"/>
+          <a:bodyPr lIns="45718" tIns="45718" rIns="45718" bIns="45718"/>
           <a:lstStyle/>
           <a:p>
             <a:pPr/>
@@ -11207,7 +12190,7 @@
         <p:spPr>
           <a:xfrm>
             <a:off x="5357812" y="1639633"/>
-            <a:ext cx="2305052" cy="561977"/>
+            <a:ext cx="2305053" cy="561978"/>
           </a:xfrm>
           <a:prstGeom prst="line">
             <a:avLst/>
@@ -11219,7 +12202,7 @@
           </a:ln>
         </p:spPr>
         <p:txBody>
-          <a:bodyPr lIns="0" tIns="0" rIns="0" bIns="0"/>
+          <a:bodyPr lIns="45718" tIns="45718" rIns="45718" bIns="45718"/>
           <a:lstStyle/>
           <a:p>
             <a:pPr/>
@@ -11235,7 +12218,7 @@
         <p:spPr>
           <a:xfrm>
             <a:off x="5362573" y="3054168"/>
-            <a:ext cx="2143127" cy="581026"/>
+            <a:ext cx="2143128" cy="581027"/>
           </a:xfrm>
           <a:prstGeom prst="line">
             <a:avLst/>
@@ -11247,7 +12230,7 @@
           </a:ln>
         </p:spPr>
         <p:txBody>
-          <a:bodyPr lIns="0" tIns="0" rIns="0" bIns="0"/>
+          <a:bodyPr lIns="45718" tIns="45718" rIns="45718" bIns="45718"/>
           <a:lstStyle/>
           <a:p>
             <a:pPr/>
@@ -11262,8 +12245,8 @@
         </p:nvSpPr>
         <p:spPr>
           <a:xfrm>
-            <a:off x="5760720" y="4804167"/>
-            <a:ext cx="2918462" cy="202415"/>
+            <a:off x="5760720" y="4804166"/>
+            <a:ext cx="2918463" cy="202414"/>
           </a:xfrm>
           <a:prstGeom prst="rect">
             <a:avLst/>
@@ -11329,7 +12312,14 @@
           <a:bodyPr lIns="0" tIns="0" rIns="0" bIns="0"/>
           <a:lstStyle/>
           <a:p>
-            <a:pPr/>
+            <a:pPr>
+              <a:defRPr>
+                <a:latin typeface="+mn-lt"/>
+                <a:ea typeface="+mn-ea"/>
+                <a:cs typeface="+mn-cs"/>
+                <a:sym typeface="Helvetica"/>
+              </a:defRPr>
+            </a:pPr>
           </a:p>
         </p:txBody>
       </p:sp>
@@ -11360,7 +12350,14 @@
           <a:bodyPr lIns="0" tIns="0" rIns="0" bIns="0"/>
           <a:lstStyle/>
           <a:p>
-            <a:pPr/>
+            <a:pPr>
+              <a:defRPr>
+                <a:latin typeface="+mn-lt"/>
+                <a:ea typeface="+mn-ea"/>
+                <a:cs typeface="+mn-cs"/>
+                <a:sym typeface="Helvetica"/>
+              </a:defRPr>
+            </a:pPr>
           </a:p>
         </p:txBody>
       </p:sp>
@@ -11372,8 +12369,8 @@
         </p:nvSpPr>
         <p:spPr>
           <a:xfrm>
-            <a:off x="4490720" y="2893024"/>
-            <a:ext cx="727712" cy="214700"/>
+            <a:off x="4490720" y="2893023"/>
+            <a:ext cx="727713" cy="214698"/>
           </a:xfrm>
           <a:prstGeom prst="rect">
             <a:avLst/>
@@ -11420,8 +12417,8 @@
         </p:nvSpPr>
         <p:spPr>
           <a:xfrm>
-            <a:off x="2507851" y="981272"/>
-            <a:ext cx="1536419" cy="4162228"/>
+            <a:off x="2507850" y="981271"/>
+            <a:ext cx="1536420" cy="4162230"/>
           </a:xfrm>
           <a:prstGeom prst="rect">
             <a:avLst/>
@@ -11437,7 +12434,14 @@
           <a:bodyPr lIns="0" tIns="0" rIns="0" bIns="0"/>
           <a:lstStyle/>
           <a:p>
-            <a:pPr/>
+            <a:pPr>
+              <a:defRPr>
+                <a:latin typeface="+mn-lt"/>
+                <a:ea typeface="+mn-ea"/>
+                <a:cs typeface="+mn-cs"/>
+                <a:sym typeface="Helvetica"/>
+              </a:defRPr>
+            </a:pPr>
           </a:p>
         </p:txBody>
       </p:sp>
@@ -11475,8 +12479,8 @@
         </p:nvSpPr>
         <p:spPr>
           <a:xfrm>
-            <a:off x="-1" y="-1"/>
-            <a:ext cx="9144001" cy="5143503"/>
+            <a:off x="-1" y="-2"/>
+            <a:ext cx="9144001" cy="5143505"/>
           </a:xfrm>
           <a:prstGeom prst="rect">
             <a:avLst/>
@@ -11492,7 +12496,14 @@
           <a:bodyPr lIns="0" tIns="0" rIns="0" bIns="0"/>
           <a:lstStyle/>
           <a:p>
-            <a:pPr/>
+            <a:pPr>
+              <a:defRPr>
+                <a:latin typeface="+mn-lt"/>
+                <a:ea typeface="+mn-ea"/>
+                <a:cs typeface="+mn-cs"/>
+                <a:sym typeface="Helvetica"/>
+              </a:defRPr>
+            </a:pPr>
           </a:p>
         </p:txBody>
       </p:sp>
@@ -11553,7 +12564,7 @@
         <p:spPr>
           <a:xfrm>
             <a:off x="269081" y="1938338"/>
-            <a:ext cx="2190751" cy="876302"/>
+            <a:ext cx="2190751" cy="876303"/>
           </a:xfrm>
           <a:prstGeom prst="roundRect">
             <a:avLst>
@@ -11573,7 +12584,14 @@
           <a:bodyPr lIns="0" tIns="0" rIns="0" bIns="0"/>
           <a:lstStyle/>
           <a:p>
-            <a:pPr/>
+            <a:pPr>
+              <a:defRPr>
+                <a:latin typeface="+mn-lt"/>
+                <a:ea typeface="+mn-ea"/>
+                <a:cs typeface="+mn-cs"/>
+                <a:sym typeface="Helvetica"/>
+              </a:defRPr>
+            </a:pPr>
           </a:p>
         </p:txBody>
       </p:sp>
@@ -11586,7 +12604,7 @@
         <p:spPr>
           <a:xfrm>
             <a:off x="457675" y="1983388"/>
-            <a:ext cx="594362" cy="214699"/>
+            <a:ext cx="594363" cy="214697"/>
           </a:xfrm>
           <a:prstGeom prst="rect">
             <a:avLst/>
@@ -11654,7 +12672,14 @@
           <a:bodyPr lIns="0" tIns="0" rIns="0" bIns="0"/>
           <a:lstStyle/>
           <a:p>
-            <a:pPr/>
+            <a:pPr>
+              <a:defRPr>
+                <a:latin typeface="+mn-lt"/>
+                <a:ea typeface="+mn-ea"/>
+                <a:cs typeface="+mn-cs"/>
+                <a:sym typeface="Helvetica"/>
+              </a:defRPr>
+            </a:pPr>
           </a:p>
         </p:txBody>
       </p:sp>
@@ -11666,8 +12691,8 @@
         </p:nvSpPr>
         <p:spPr>
           <a:xfrm>
-            <a:off x="3055620" y="2085477"/>
-            <a:ext cx="670562" cy="362945"/>
+            <a:off x="3055620" y="2085476"/>
+            <a:ext cx="670563" cy="362943"/>
           </a:xfrm>
           <a:prstGeom prst="rect">
             <a:avLst/>
@@ -11714,8 +12739,8 @@
         </p:nvSpPr>
         <p:spPr>
           <a:xfrm>
-            <a:off x="2998470" y="2540807"/>
-            <a:ext cx="784862" cy="366685"/>
+            <a:off x="2998470" y="2540806"/>
+            <a:ext cx="784863" cy="366683"/>
           </a:xfrm>
           <a:prstGeom prst="rect">
             <a:avLst/>
@@ -11793,7 +12818,14 @@
           <a:bodyPr lIns="0" tIns="0" rIns="0" bIns="0"/>
           <a:lstStyle/>
           <a:p>
-            <a:pPr/>
+            <a:pPr>
+              <a:defRPr>
+                <a:latin typeface="+mn-lt"/>
+                <a:ea typeface="+mn-ea"/>
+                <a:cs typeface="+mn-cs"/>
+                <a:sym typeface="Helvetica"/>
+              </a:defRPr>
+            </a:pPr>
           </a:p>
         </p:txBody>
       </p:sp>
@@ -11822,7 +12854,14 @@
           <a:bodyPr lIns="0" tIns="0" rIns="0" bIns="0"/>
           <a:lstStyle/>
           <a:p>
-            <a:pPr/>
+            <a:pPr>
+              <a:defRPr>
+                <a:latin typeface="+mn-lt"/>
+                <a:ea typeface="+mn-ea"/>
+                <a:cs typeface="+mn-cs"/>
+                <a:sym typeface="Helvetica"/>
+              </a:defRPr>
+            </a:pPr>
           </a:p>
         </p:txBody>
       </p:sp>
@@ -11851,7 +12890,14 @@
           <a:bodyPr lIns="0" tIns="0" rIns="0" bIns="0"/>
           <a:lstStyle/>
           <a:p>
-            <a:pPr/>
+            <a:pPr>
+              <a:defRPr>
+                <a:latin typeface="+mn-lt"/>
+                <a:ea typeface="+mn-ea"/>
+                <a:cs typeface="+mn-cs"/>
+                <a:sym typeface="Helvetica"/>
+              </a:defRPr>
+            </a:pPr>
           </a:p>
         </p:txBody>
       </p:sp>
@@ -11880,7 +12926,14 @@
           <a:bodyPr lIns="0" tIns="0" rIns="0" bIns="0"/>
           <a:lstStyle/>
           <a:p>
-            <a:pPr/>
+            <a:pPr>
+              <a:defRPr>
+                <a:latin typeface="+mn-lt"/>
+                <a:ea typeface="+mn-ea"/>
+                <a:cs typeface="+mn-cs"/>
+                <a:sym typeface="Helvetica"/>
+              </a:defRPr>
+            </a:pPr>
           </a:p>
         </p:txBody>
       </p:sp>
@@ -11909,7 +12962,14 @@
           <a:bodyPr lIns="0" tIns="0" rIns="0" bIns="0"/>
           <a:lstStyle/>
           <a:p>
-            <a:pPr/>
+            <a:pPr>
+              <a:defRPr>
+                <a:latin typeface="+mn-lt"/>
+                <a:ea typeface="+mn-ea"/>
+                <a:cs typeface="+mn-cs"/>
+                <a:sym typeface="Helvetica"/>
+              </a:defRPr>
+            </a:pPr>
           </a:p>
         </p:txBody>
       </p:sp>
@@ -11942,7 +13002,14 @@
           <a:bodyPr lIns="0" tIns="0" rIns="0" bIns="0"/>
           <a:lstStyle/>
           <a:p>
-            <a:pPr/>
+            <a:pPr>
+              <a:defRPr>
+                <a:latin typeface="+mn-lt"/>
+                <a:ea typeface="+mn-ea"/>
+                <a:cs typeface="+mn-cs"/>
+                <a:sym typeface="Helvetica"/>
+              </a:defRPr>
+            </a:pPr>
           </a:p>
         </p:txBody>
       </p:sp>
@@ -11954,8 +13021,8 @@
         </p:nvSpPr>
         <p:spPr>
           <a:xfrm>
-            <a:off x="4436745" y="1149949"/>
-            <a:ext cx="2289812" cy="214700"/>
+            <a:off x="4436745" y="1149948"/>
+            <a:ext cx="2289813" cy="214698"/>
           </a:xfrm>
           <a:prstGeom prst="rect">
             <a:avLst/>
@@ -12019,7 +13086,14 @@
           <a:bodyPr lIns="0" tIns="0" rIns="0" bIns="0"/>
           <a:lstStyle/>
           <a:p>
-            <a:pPr/>
+            <a:pPr>
+              <a:defRPr>
+                <a:latin typeface="+mn-lt"/>
+                <a:ea typeface="+mn-ea"/>
+                <a:cs typeface="+mn-cs"/>
+                <a:sym typeface="Helvetica"/>
+              </a:defRPr>
+            </a:pPr>
           </a:p>
         </p:txBody>
       </p:sp>
@@ -12048,7 +13122,14 @@
           <a:bodyPr lIns="0" tIns="0" rIns="0" bIns="0"/>
           <a:lstStyle/>
           <a:p>
-            <a:pPr/>
+            <a:pPr>
+              <a:defRPr>
+                <a:latin typeface="+mn-lt"/>
+                <a:ea typeface="+mn-ea"/>
+                <a:cs typeface="+mn-cs"/>
+                <a:sym typeface="Helvetica"/>
+              </a:defRPr>
+            </a:pPr>
           </a:p>
         </p:txBody>
       </p:sp>
@@ -12077,7 +13158,14 @@
           <a:bodyPr lIns="0" tIns="0" rIns="0" bIns="0"/>
           <a:lstStyle/>
           <a:p>
-            <a:pPr/>
+            <a:pPr>
+              <a:defRPr>
+                <a:latin typeface="+mn-lt"/>
+                <a:ea typeface="+mn-ea"/>
+                <a:cs typeface="+mn-cs"/>
+                <a:sym typeface="Helvetica"/>
+              </a:defRPr>
+            </a:pPr>
           </a:p>
         </p:txBody>
       </p:sp>
@@ -12106,7 +13194,14 @@
           <a:bodyPr lIns="0" tIns="0" rIns="0" bIns="0"/>
           <a:lstStyle/>
           <a:p>
-            <a:pPr/>
+            <a:pPr>
+              <a:defRPr>
+                <a:latin typeface="+mn-lt"/>
+                <a:ea typeface="+mn-ea"/>
+                <a:cs typeface="+mn-cs"/>
+                <a:sym typeface="Helvetica"/>
+              </a:defRPr>
+            </a:pPr>
           </a:p>
         </p:txBody>
       </p:sp>
@@ -12135,7 +13230,14 @@
           <a:bodyPr lIns="0" tIns="0" rIns="0" bIns="0"/>
           <a:lstStyle/>
           <a:p>
-            <a:pPr/>
+            <a:pPr>
+              <a:defRPr>
+                <a:latin typeface="+mn-lt"/>
+                <a:ea typeface="+mn-ea"/>
+                <a:cs typeface="+mn-cs"/>
+                <a:sym typeface="Helvetica"/>
+              </a:defRPr>
+            </a:pPr>
           </a:p>
         </p:txBody>
       </p:sp>
@@ -12164,7 +13266,14 @@
           <a:bodyPr lIns="0" tIns="0" rIns="0" bIns="0"/>
           <a:lstStyle/>
           <a:p>
-            <a:pPr/>
+            <a:pPr>
+              <a:defRPr>
+                <a:latin typeface="+mn-lt"/>
+                <a:ea typeface="+mn-ea"/>
+                <a:cs typeface="+mn-cs"/>
+                <a:sym typeface="Helvetica"/>
+              </a:defRPr>
+            </a:pPr>
           </a:p>
         </p:txBody>
       </p:sp>
@@ -12193,7 +13302,14 @@
           <a:bodyPr lIns="0" tIns="0" rIns="0" bIns="0"/>
           <a:lstStyle/>
           <a:p>
-            <a:pPr/>
+            <a:pPr>
+              <a:defRPr>
+                <a:latin typeface="+mn-lt"/>
+                <a:ea typeface="+mn-ea"/>
+                <a:cs typeface="+mn-cs"/>
+                <a:sym typeface="Helvetica"/>
+              </a:defRPr>
+            </a:pPr>
           </a:p>
         </p:txBody>
       </p:sp>
@@ -12222,7 +13338,14 @@
           <a:bodyPr lIns="0" tIns="0" rIns="0" bIns="0"/>
           <a:lstStyle/>
           <a:p>
-            <a:pPr/>
+            <a:pPr>
+              <a:defRPr>
+                <a:latin typeface="+mn-lt"/>
+                <a:ea typeface="+mn-ea"/>
+                <a:cs typeface="+mn-cs"/>
+                <a:sym typeface="Helvetica"/>
+              </a:defRPr>
+            </a:pPr>
           </a:p>
         </p:txBody>
       </p:sp>
@@ -12251,7 +13374,14 @@
           <a:bodyPr lIns="0" tIns="0" rIns="0" bIns="0"/>
           <a:lstStyle/>
           <a:p>
-            <a:pPr/>
+            <a:pPr>
+              <a:defRPr>
+                <a:latin typeface="+mn-lt"/>
+                <a:ea typeface="+mn-ea"/>
+                <a:cs typeface="+mn-cs"/>
+                <a:sym typeface="Helvetica"/>
+              </a:defRPr>
+            </a:pPr>
           </a:p>
         </p:txBody>
       </p:sp>
@@ -12263,8 +13393,8 @@
         </p:nvSpPr>
         <p:spPr>
           <a:xfrm>
-            <a:off x="2507851" y="2376488"/>
-            <a:ext cx="311152" cy="2"/>
+            <a:off x="2507850" y="2376488"/>
+            <a:ext cx="311153" cy="3"/>
           </a:xfrm>
           <a:prstGeom prst="line">
             <a:avLst/>
@@ -12277,7 +13407,7 @@
           </a:ln>
         </p:spPr>
         <p:txBody>
-          <a:bodyPr lIns="0" tIns="0" rIns="0" bIns="0"/>
+          <a:bodyPr lIns="45718" tIns="45718" rIns="45718" bIns="45718"/>
           <a:lstStyle/>
           <a:p>
             <a:pPr/>
@@ -12293,7 +13423,7 @@
         <p:spPr>
           <a:xfrm>
             <a:off x="5357812" y="1639633"/>
-            <a:ext cx="2305052" cy="561977"/>
+            <a:ext cx="2305053" cy="561978"/>
           </a:xfrm>
           <a:prstGeom prst="line">
             <a:avLst/>
@@ -12305,7 +13435,7 @@
           </a:ln>
         </p:spPr>
         <p:txBody>
-          <a:bodyPr lIns="0" tIns="0" rIns="0" bIns="0"/>
+          <a:bodyPr lIns="45718" tIns="45718" rIns="45718" bIns="45718"/>
           <a:lstStyle/>
           <a:p>
             <a:pPr/>
@@ -12321,7 +13451,7 @@
         <p:spPr>
           <a:xfrm>
             <a:off x="5362573" y="3054168"/>
-            <a:ext cx="2143127" cy="581026"/>
+            <a:ext cx="2143128" cy="581027"/>
           </a:xfrm>
           <a:prstGeom prst="line">
             <a:avLst/>
@@ -12333,7 +13463,7 @@
           </a:ln>
         </p:spPr>
         <p:txBody>
-          <a:bodyPr lIns="0" tIns="0" rIns="0" bIns="0"/>
+          <a:bodyPr lIns="45718" tIns="45718" rIns="45718" bIns="45718"/>
           <a:lstStyle/>
           <a:p>
             <a:pPr/>
@@ -12348,8 +13478,8 @@
         </p:nvSpPr>
         <p:spPr>
           <a:xfrm>
-            <a:off x="5760720" y="4804167"/>
-            <a:ext cx="2918462" cy="202415"/>
+            <a:off x="5760720" y="4804166"/>
+            <a:ext cx="2918463" cy="202414"/>
           </a:xfrm>
           <a:prstGeom prst="rect">
             <a:avLst/>
@@ -12415,7 +13545,14 @@
           <a:bodyPr lIns="0" tIns="0" rIns="0" bIns="0"/>
           <a:lstStyle/>
           <a:p>
-            <a:pPr/>
+            <a:pPr>
+              <a:defRPr>
+                <a:latin typeface="+mn-lt"/>
+                <a:ea typeface="+mn-ea"/>
+                <a:cs typeface="+mn-cs"/>
+                <a:sym typeface="Helvetica"/>
+              </a:defRPr>
+            </a:pPr>
           </a:p>
         </p:txBody>
       </p:sp>
@@ -12446,7 +13583,14 @@
           <a:bodyPr lIns="0" tIns="0" rIns="0" bIns="0"/>
           <a:lstStyle/>
           <a:p>
-            <a:pPr/>
+            <a:pPr>
+              <a:defRPr>
+                <a:latin typeface="+mn-lt"/>
+                <a:ea typeface="+mn-ea"/>
+                <a:cs typeface="+mn-cs"/>
+                <a:sym typeface="Helvetica"/>
+              </a:defRPr>
+            </a:pPr>
           </a:p>
         </p:txBody>
       </p:sp>
@@ -12458,8 +13602,8 @@
         </p:nvSpPr>
         <p:spPr>
           <a:xfrm>
-            <a:off x="4490720" y="2893024"/>
-            <a:ext cx="727712" cy="214700"/>
+            <a:off x="4490720" y="2893023"/>
+            <a:ext cx="727713" cy="214698"/>
           </a:xfrm>
           <a:prstGeom prst="rect">
             <a:avLst/>
@@ -12507,7 +13651,7 @@
         <p:spPr>
           <a:xfrm>
             <a:off x="457675" y="2304894"/>
-            <a:ext cx="1813563" cy="276537"/>
+            <a:ext cx="1813563" cy="276535"/>
           </a:xfrm>
           <a:prstGeom prst="rect">
             <a:avLst/>
@@ -12580,8 +13724,8 @@
         </p:nvSpPr>
         <p:spPr>
           <a:xfrm>
-            <a:off x="-1" y="-1"/>
-            <a:ext cx="9144001" cy="5143503"/>
+            <a:off x="-1" y="-2"/>
+            <a:ext cx="9144001" cy="5143505"/>
           </a:xfrm>
           <a:prstGeom prst="rect">
             <a:avLst/>
@@ -12597,7 +13741,14 @@
           <a:bodyPr lIns="0" tIns="0" rIns="0" bIns="0"/>
           <a:lstStyle/>
           <a:p>
-            <a:pPr/>
+            <a:pPr>
+              <a:defRPr>
+                <a:latin typeface="+mn-lt"/>
+                <a:ea typeface="+mn-ea"/>
+                <a:cs typeface="+mn-cs"/>
+                <a:sym typeface="Helvetica"/>
+              </a:defRPr>
+            </a:pPr>
           </a:p>
         </p:txBody>
       </p:sp>
@@ -12658,7 +13809,7 @@
         <p:spPr>
           <a:xfrm>
             <a:off x="269081" y="1938338"/>
-            <a:ext cx="2190751" cy="876302"/>
+            <a:ext cx="2190751" cy="876303"/>
           </a:xfrm>
           <a:prstGeom prst="roundRect">
             <a:avLst>
@@ -12678,7 +13829,14 @@
           <a:bodyPr lIns="0" tIns="0" rIns="0" bIns="0"/>
           <a:lstStyle/>
           <a:p>
-            <a:pPr/>
+            <a:pPr>
+              <a:defRPr>
+                <a:latin typeface="+mn-lt"/>
+                <a:ea typeface="+mn-ea"/>
+                <a:cs typeface="+mn-cs"/>
+                <a:sym typeface="Helvetica"/>
+              </a:defRPr>
+            </a:pPr>
           </a:p>
         </p:txBody>
       </p:sp>
@@ -12691,7 +13849,7 @@
         <p:spPr>
           <a:xfrm>
             <a:off x="457675" y="1983388"/>
-            <a:ext cx="594362" cy="214699"/>
+            <a:ext cx="594363" cy="214697"/>
           </a:xfrm>
           <a:prstGeom prst="rect">
             <a:avLst/>
@@ -12759,7 +13917,14 @@
           <a:bodyPr lIns="0" tIns="0" rIns="0" bIns="0"/>
           <a:lstStyle/>
           <a:p>
-            <a:pPr/>
+            <a:pPr>
+              <a:defRPr>
+                <a:latin typeface="+mn-lt"/>
+                <a:ea typeface="+mn-ea"/>
+                <a:cs typeface="+mn-cs"/>
+                <a:sym typeface="Helvetica"/>
+              </a:defRPr>
+            </a:pPr>
           </a:p>
         </p:txBody>
       </p:sp>
@@ -12771,8 +13936,8 @@
         </p:nvSpPr>
         <p:spPr>
           <a:xfrm>
-            <a:off x="3055620" y="2085477"/>
-            <a:ext cx="670562" cy="362945"/>
+            <a:off x="3055620" y="2085476"/>
+            <a:ext cx="670563" cy="362943"/>
           </a:xfrm>
           <a:prstGeom prst="rect">
             <a:avLst/>
@@ -12819,8 +13984,8 @@
         </p:nvSpPr>
         <p:spPr>
           <a:xfrm>
-            <a:off x="2998470" y="2540807"/>
-            <a:ext cx="784862" cy="366685"/>
+            <a:off x="2998470" y="2540806"/>
+            <a:ext cx="784863" cy="366683"/>
           </a:xfrm>
           <a:prstGeom prst="rect">
             <a:avLst/>
@@ -12898,7 +14063,14 @@
           <a:bodyPr lIns="0" tIns="0" rIns="0" bIns="0"/>
           <a:lstStyle/>
           <a:p>
-            <a:pPr/>
+            <a:pPr>
+              <a:defRPr>
+                <a:latin typeface="+mn-lt"/>
+                <a:ea typeface="+mn-ea"/>
+                <a:cs typeface="+mn-cs"/>
+                <a:sym typeface="Helvetica"/>
+              </a:defRPr>
+            </a:pPr>
           </a:p>
         </p:txBody>
       </p:sp>
@@ -12927,7 +14099,14 @@
           <a:bodyPr lIns="0" tIns="0" rIns="0" bIns="0"/>
           <a:lstStyle/>
           <a:p>
-            <a:pPr/>
+            <a:pPr>
+              <a:defRPr>
+                <a:latin typeface="+mn-lt"/>
+                <a:ea typeface="+mn-ea"/>
+                <a:cs typeface="+mn-cs"/>
+                <a:sym typeface="Helvetica"/>
+              </a:defRPr>
+            </a:pPr>
           </a:p>
         </p:txBody>
       </p:sp>
@@ -12956,7 +14135,14 @@
           <a:bodyPr lIns="0" tIns="0" rIns="0" bIns="0"/>
           <a:lstStyle/>
           <a:p>
-            <a:pPr/>
+            <a:pPr>
+              <a:defRPr>
+                <a:latin typeface="+mn-lt"/>
+                <a:ea typeface="+mn-ea"/>
+                <a:cs typeface="+mn-cs"/>
+                <a:sym typeface="Helvetica"/>
+              </a:defRPr>
+            </a:pPr>
           </a:p>
         </p:txBody>
       </p:sp>
@@ -12985,7 +14171,14 @@
           <a:bodyPr lIns="0" tIns="0" rIns="0" bIns="0"/>
           <a:lstStyle/>
           <a:p>
-            <a:pPr/>
+            <a:pPr>
+              <a:defRPr>
+                <a:latin typeface="+mn-lt"/>
+                <a:ea typeface="+mn-ea"/>
+                <a:cs typeface="+mn-cs"/>
+                <a:sym typeface="Helvetica"/>
+              </a:defRPr>
+            </a:pPr>
           </a:p>
         </p:txBody>
       </p:sp>
@@ -13014,7 +14207,14 @@
           <a:bodyPr lIns="0" tIns="0" rIns="0" bIns="0"/>
           <a:lstStyle/>
           <a:p>
-            <a:pPr/>
+            <a:pPr>
+              <a:defRPr>
+                <a:latin typeface="+mn-lt"/>
+                <a:ea typeface="+mn-ea"/>
+                <a:cs typeface="+mn-cs"/>
+                <a:sym typeface="Helvetica"/>
+              </a:defRPr>
+            </a:pPr>
           </a:p>
         </p:txBody>
       </p:sp>
@@ -13047,7 +14247,14 @@
           <a:bodyPr lIns="0" tIns="0" rIns="0" bIns="0"/>
           <a:lstStyle/>
           <a:p>
-            <a:pPr/>
+            <a:pPr>
+              <a:defRPr>
+                <a:latin typeface="+mn-lt"/>
+                <a:ea typeface="+mn-ea"/>
+                <a:cs typeface="+mn-cs"/>
+                <a:sym typeface="Helvetica"/>
+              </a:defRPr>
+            </a:pPr>
           </a:p>
         </p:txBody>
       </p:sp>
@@ -13059,8 +14266,8 @@
         </p:nvSpPr>
         <p:spPr>
           <a:xfrm>
-            <a:off x="4436745" y="1149949"/>
-            <a:ext cx="2289812" cy="214700"/>
+            <a:off x="4436745" y="1149948"/>
+            <a:ext cx="2289813" cy="214698"/>
           </a:xfrm>
           <a:prstGeom prst="rect">
             <a:avLst/>
@@ -13124,7 +14331,14 @@
           <a:bodyPr lIns="0" tIns="0" rIns="0" bIns="0"/>
           <a:lstStyle/>
           <a:p>
-            <a:pPr/>
+            <a:pPr>
+              <a:defRPr>
+                <a:latin typeface="+mn-lt"/>
+                <a:ea typeface="+mn-ea"/>
+                <a:cs typeface="+mn-cs"/>
+                <a:sym typeface="Helvetica"/>
+              </a:defRPr>
+            </a:pPr>
           </a:p>
         </p:txBody>
       </p:sp>
@@ -13153,7 +14367,14 @@
           <a:bodyPr lIns="0" tIns="0" rIns="0" bIns="0"/>
           <a:lstStyle/>
           <a:p>
-            <a:pPr/>
+            <a:pPr>
+              <a:defRPr>
+                <a:latin typeface="+mn-lt"/>
+                <a:ea typeface="+mn-ea"/>
+                <a:cs typeface="+mn-cs"/>
+                <a:sym typeface="Helvetica"/>
+              </a:defRPr>
+            </a:pPr>
           </a:p>
         </p:txBody>
       </p:sp>
@@ -13182,7 +14403,14 @@
           <a:bodyPr lIns="0" tIns="0" rIns="0" bIns="0"/>
           <a:lstStyle/>
           <a:p>
-            <a:pPr/>
+            <a:pPr>
+              <a:defRPr>
+                <a:latin typeface="+mn-lt"/>
+                <a:ea typeface="+mn-ea"/>
+                <a:cs typeface="+mn-cs"/>
+                <a:sym typeface="Helvetica"/>
+              </a:defRPr>
+            </a:pPr>
           </a:p>
         </p:txBody>
       </p:sp>
@@ -13211,7 +14439,14 @@
           <a:bodyPr lIns="0" tIns="0" rIns="0" bIns="0"/>
           <a:lstStyle/>
           <a:p>
-            <a:pPr/>
+            <a:pPr>
+              <a:defRPr>
+                <a:latin typeface="+mn-lt"/>
+                <a:ea typeface="+mn-ea"/>
+                <a:cs typeface="+mn-cs"/>
+                <a:sym typeface="Helvetica"/>
+              </a:defRPr>
+            </a:pPr>
           </a:p>
         </p:txBody>
       </p:sp>
@@ -13240,7 +14475,14 @@
           <a:bodyPr lIns="0" tIns="0" rIns="0" bIns="0"/>
           <a:lstStyle/>
           <a:p>
-            <a:pPr/>
+            <a:pPr>
+              <a:defRPr>
+                <a:latin typeface="+mn-lt"/>
+                <a:ea typeface="+mn-ea"/>
+                <a:cs typeface="+mn-cs"/>
+                <a:sym typeface="Helvetica"/>
+              </a:defRPr>
+            </a:pPr>
           </a:p>
         </p:txBody>
       </p:sp>
@@ -13269,7 +14511,14 @@
           <a:bodyPr lIns="0" tIns="0" rIns="0" bIns="0"/>
           <a:lstStyle/>
           <a:p>
-            <a:pPr/>
+            <a:pPr>
+              <a:defRPr>
+                <a:latin typeface="+mn-lt"/>
+                <a:ea typeface="+mn-ea"/>
+                <a:cs typeface="+mn-cs"/>
+                <a:sym typeface="Helvetica"/>
+              </a:defRPr>
+            </a:pPr>
           </a:p>
         </p:txBody>
       </p:sp>
@@ -13298,7 +14547,14 @@
           <a:bodyPr lIns="0" tIns="0" rIns="0" bIns="0"/>
           <a:lstStyle/>
           <a:p>
-            <a:pPr/>
+            <a:pPr>
+              <a:defRPr>
+                <a:latin typeface="+mn-lt"/>
+                <a:ea typeface="+mn-ea"/>
+                <a:cs typeface="+mn-cs"/>
+                <a:sym typeface="Helvetica"/>
+              </a:defRPr>
+            </a:pPr>
           </a:p>
         </p:txBody>
       </p:sp>
@@ -13327,7 +14583,14 @@
           <a:bodyPr lIns="0" tIns="0" rIns="0" bIns="0"/>
           <a:lstStyle/>
           <a:p>
-            <a:pPr/>
+            <a:pPr>
+              <a:defRPr>
+                <a:latin typeface="+mn-lt"/>
+                <a:ea typeface="+mn-ea"/>
+                <a:cs typeface="+mn-cs"/>
+                <a:sym typeface="Helvetica"/>
+              </a:defRPr>
+            </a:pPr>
           </a:p>
         </p:txBody>
       </p:sp>
@@ -13356,7 +14619,14 @@
           <a:bodyPr lIns="0" tIns="0" rIns="0" bIns="0"/>
           <a:lstStyle/>
           <a:p>
-            <a:pPr/>
+            <a:pPr>
+              <a:defRPr>
+                <a:latin typeface="+mn-lt"/>
+                <a:ea typeface="+mn-ea"/>
+                <a:cs typeface="+mn-cs"/>
+                <a:sym typeface="Helvetica"/>
+              </a:defRPr>
+            </a:pPr>
           </a:p>
         </p:txBody>
       </p:sp>
@@ -13368,8 +14638,8 @@
         </p:nvSpPr>
         <p:spPr>
           <a:xfrm>
-            <a:off x="2507851" y="2376488"/>
-            <a:ext cx="311152" cy="2"/>
+            <a:off x="2507850" y="2376488"/>
+            <a:ext cx="311153" cy="3"/>
           </a:xfrm>
           <a:prstGeom prst="line">
             <a:avLst/>
@@ -13382,7 +14652,7 @@
           </a:ln>
         </p:spPr>
         <p:txBody>
-          <a:bodyPr lIns="0" tIns="0" rIns="0" bIns="0"/>
+          <a:bodyPr lIns="45718" tIns="45718" rIns="45718" bIns="45718"/>
           <a:lstStyle/>
           <a:p>
             <a:pPr/>
@@ -13397,8 +14667,8 @@
         </p:nvSpPr>
         <p:spPr>
           <a:xfrm>
-            <a:off x="3943350" y="2524125"/>
-            <a:ext cx="2476502" cy="200026"/>
+            <a:off x="3943349" y="2524124"/>
+            <a:ext cx="2476503" cy="200028"/>
           </a:xfrm>
           <a:prstGeom prst="line">
             <a:avLst/>
@@ -13412,7 +14682,7 @@
           </a:ln>
         </p:spPr>
         <p:txBody>
-          <a:bodyPr lIns="0" tIns="0" rIns="0" bIns="0"/>
+          <a:bodyPr lIns="45718" tIns="45718" rIns="45718" bIns="45718"/>
           <a:lstStyle/>
           <a:p>
             <a:pPr/>
@@ -13428,7 +14698,7 @@
         <p:spPr>
           <a:xfrm>
             <a:off x="5357812" y="1639633"/>
-            <a:ext cx="2305052" cy="561977"/>
+            <a:ext cx="2305053" cy="561978"/>
           </a:xfrm>
           <a:prstGeom prst="line">
             <a:avLst/>
@@ -13440,7 +14710,7 @@
           </a:ln>
         </p:spPr>
         <p:txBody>
-          <a:bodyPr lIns="0" tIns="0" rIns="0" bIns="0"/>
+          <a:bodyPr lIns="45718" tIns="45718" rIns="45718" bIns="45718"/>
           <a:lstStyle/>
           <a:p>
             <a:pPr/>
@@ -13456,7 +14726,7 @@
         <p:spPr>
           <a:xfrm>
             <a:off x="5362573" y="3054168"/>
-            <a:ext cx="2143127" cy="581026"/>
+            <a:ext cx="2143128" cy="581027"/>
           </a:xfrm>
           <a:prstGeom prst="line">
             <a:avLst/>
@@ -13468,7 +14738,7 @@
           </a:ln>
         </p:spPr>
         <p:txBody>
-          <a:bodyPr lIns="0" tIns="0" rIns="0" bIns="0"/>
+          <a:bodyPr lIns="45718" tIns="45718" rIns="45718" bIns="45718"/>
           <a:lstStyle/>
           <a:p>
             <a:pPr/>
@@ -13500,7 +14770,14 @@
           <a:bodyPr lIns="0" tIns="0" rIns="0" bIns="0"/>
           <a:lstStyle/>
           <a:p>
-            <a:pPr/>
+            <a:pPr>
+              <a:defRPr>
+                <a:latin typeface="+mn-lt"/>
+                <a:ea typeface="+mn-ea"/>
+                <a:cs typeface="+mn-cs"/>
+                <a:sym typeface="Helvetica"/>
+              </a:defRPr>
+            </a:pPr>
           </a:p>
         </p:txBody>
       </p:sp>
@@ -13531,7 +14808,14 @@
           <a:bodyPr lIns="0" tIns="0" rIns="0" bIns="0"/>
           <a:lstStyle/>
           <a:p>
-            <a:pPr/>
+            <a:pPr>
+              <a:defRPr>
+                <a:latin typeface="+mn-lt"/>
+                <a:ea typeface="+mn-ea"/>
+                <a:cs typeface="+mn-cs"/>
+                <a:sym typeface="Helvetica"/>
+              </a:defRPr>
+            </a:pPr>
           </a:p>
         </p:txBody>
       </p:sp>
@@ -13560,7 +14844,14 @@
           <a:bodyPr lIns="0" tIns="0" rIns="0" bIns="0"/>
           <a:lstStyle/>
           <a:p>
-            <a:pPr/>
+            <a:pPr>
+              <a:defRPr>
+                <a:latin typeface="+mn-lt"/>
+                <a:ea typeface="+mn-ea"/>
+                <a:cs typeface="+mn-cs"/>
+                <a:sym typeface="Helvetica"/>
+              </a:defRPr>
+            </a:pPr>
           </a:p>
         </p:txBody>
       </p:sp>
@@ -13572,8 +14863,8 @@
         </p:nvSpPr>
         <p:spPr>
           <a:xfrm>
-            <a:off x="6808468" y="2592023"/>
-            <a:ext cx="1489712" cy="264253"/>
+            <a:off x="6808468" y="2592022"/>
+            <a:ext cx="1489713" cy="264252"/>
           </a:xfrm>
           <a:prstGeom prst="rect">
             <a:avLst/>
@@ -13620,8 +14911,8 @@
         </p:nvSpPr>
         <p:spPr>
           <a:xfrm>
-            <a:off x="5051107" y="3717560"/>
-            <a:ext cx="2766062" cy="442054"/>
+            <a:off x="5051107" y="3717559"/>
+            <a:ext cx="2766063" cy="442052"/>
           </a:xfrm>
           <a:prstGeom prst="rect">
             <a:avLst/>
@@ -13668,8 +14959,8 @@
         </p:nvSpPr>
         <p:spPr>
           <a:xfrm>
-            <a:off x="5760720" y="4804167"/>
-            <a:ext cx="2918462" cy="202415"/>
+            <a:off x="5760720" y="4804166"/>
+            <a:ext cx="2918463" cy="202414"/>
           </a:xfrm>
           <a:prstGeom prst="rect">
             <a:avLst/>
@@ -13735,7 +15026,14 @@
           <a:bodyPr lIns="0" tIns="0" rIns="0" bIns="0"/>
           <a:lstStyle/>
           <a:p>
-            <a:pPr/>
+            <a:pPr>
+              <a:defRPr>
+                <a:latin typeface="+mn-lt"/>
+                <a:ea typeface="+mn-ea"/>
+                <a:cs typeface="+mn-cs"/>
+                <a:sym typeface="Helvetica"/>
+              </a:defRPr>
+            </a:pPr>
           </a:p>
         </p:txBody>
       </p:sp>
@@ -13747,8 +15045,8 @@
         </p:nvSpPr>
         <p:spPr>
           <a:xfrm>
-            <a:off x="4873624" y="2781300"/>
-            <a:ext cx="1254129" cy="0"/>
+            <a:off x="4873623" y="2781300"/>
+            <a:ext cx="1254130" cy="0"/>
           </a:xfrm>
           <a:prstGeom prst="line">
             <a:avLst/>
@@ -13761,7 +15059,7 @@
           </a:ln>
         </p:spPr>
         <p:txBody>
-          <a:bodyPr lIns="0" tIns="0" rIns="0" bIns="0"/>
+          <a:bodyPr lIns="45718" tIns="45718" rIns="45718" bIns="45718"/>
           <a:lstStyle/>
           <a:p>
             <a:pPr/>
@@ -13795,7 +15093,14 @@
           <a:bodyPr lIns="0" tIns="0" rIns="0" bIns="0"/>
           <a:lstStyle/>
           <a:p>
-            <a:pPr/>
+            <a:pPr>
+              <a:defRPr>
+                <a:latin typeface="+mn-lt"/>
+                <a:ea typeface="+mn-ea"/>
+                <a:cs typeface="+mn-cs"/>
+                <a:sym typeface="Helvetica"/>
+              </a:defRPr>
+            </a:pPr>
           </a:p>
         </p:txBody>
       </p:sp>
@@ -13807,8 +15112,8 @@
         </p:nvSpPr>
         <p:spPr>
           <a:xfrm>
-            <a:off x="4490720" y="2893024"/>
-            <a:ext cx="727712" cy="214700"/>
+            <a:off x="4490720" y="2893023"/>
+            <a:ext cx="727713" cy="214698"/>
           </a:xfrm>
           <a:prstGeom prst="rect">
             <a:avLst/>
@@ -13856,7 +15161,7 @@
         <p:spPr>
           <a:xfrm>
             <a:off x="457675" y="2304894"/>
-            <a:ext cx="1813563" cy="276537"/>
+            <a:ext cx="1813563" cy="276535"/>
           </a:xfrm>
           <a:prstGeom prst="rect">
             <a:avLst/>
@@ -13929,8 +15234,8 @@
         </p:nvSpPr>
         <p:spPr>
           <a:xfrm>
-            <a:off x="0" y="-2"/>
-            <a:ext cx="9144001" cy="5143503"/>
+            <a:off x="0" y="-3"/>
+            <a:ext cx="9144001" cy="5143505"/>
           </a:xfrm>
           <a:prstGeom prst="rect">
             <a:avLst/>
@@ -13946,7 +15251,14 @@
           <a:bodyPr lIns="0" tIns="0" rIns="0" bIns="0"/>
           <a:lstStyle/>
           <a:p>
-            <a:pPr/>
+            <a:pPr>
+              <a:defRPr>
+                <a:latin typeface="+mn-lt"/>
+                <a:ea typeface="+mn-ea"/>
+                <a:cs typeface="+mn-cs"/>
+                <a:sym typeface="Helvetica"/>
+              </a:defRPr>
+            </a:pPr>
           </a:p>
         </p:txBody>
       </p:sp>
@@ -14027,7 +15339,14 @@
           <a:bodyPr lIns="0" tIns="0" rIns="0" bIns="0"/>
           <a:lstStyle/>
           <a:p>
-            <a:pPr/>
+            <a:pPr>
+              <a:defRPr>
+                <a:latin typeface="+mn-lt"/>
+                <a:ea typeface="+mn-ea"/>
+                <a:cs typeface="+mn-cs"/>
+                <a:sym typeface="Helvetica"/>
+              </a:defRPr>
+            </a:pPr>
           </a:p>
         </p:txBody>
       </p:sp>
@@ -14039,8 +15358,8 @@
         </p:nvSpPr>
         <p:spPr>
           <a:xfrm>
-            <a:off x="4195445" y="1149949"/>
-            <a:ext cx="2289812" cy="214700"/>
+            <a:off x="4195445" y="1149948"/>
+            <a:ext cx="2289813" cy="214698"/>
           </a:xfrm>
           <a:prstGeom prst="rect">
             <a:avLst/>
@@ -14104,7 +15423,14 @@
           <a:bodyPr lIns="0" tIns="0" rIns="0" bIns="0"/>
           <a:lstStyle/>
           <a:p>
-            <a:pPr/>
+            <a:pPr>
+              <a:defRPr>
+                <a:latin typeface="+mn-lt"/>
+                <a:ea typeface="+mn-ea"/>
+                <a:cs typeface="+mn-cs"/>
+                <a:sym typeface="Helvetica"/>
+              </a:defRPr>
+            </a:pPr>
           </a:p>
         </p:txBody>
       </p:sp>
@@ -14133,7 +15459,14 @@
           <a:bodyPr lIns="0" tIns="0" rIns="0" bIns="0"/>
           <a:lstStyle/>
           <a:p>
-            <a:pPr/>
+            <a:pPr>
+              <a:defRPr>
+                <a:latin typeface="+mn-lt"/>
+                <a:ea typeface="+mn-ea"/>
+                <a:cs typeface="+mn-cs"/>
+                <a:sym typeface="Helvetica"/>
+              </a:defRPr>
+            </a:pPr>
           </a:p>
         </p:txBody>
       </p:sp>
@@ -14162,7 +15495,14 @@
           <a:bodyPr lIns="0" tIns="0" rIns="0" bIns="0"/>
           <a:lstStyle/>
           <a:p>
-            <a:pPr/>
+            <a:pPr>
+              <a:defRPr>
+                <a:latin typeface="+mn-lt"/>
+                <a:ea typeface="+mn-ea"/>
+                <a:cs typeface="+mn-cs"/>
+                <a:sym typeface="Helvetica"/>
+              </a:defRPr>
+            </a:pPr>
           </a:p>
         </p:txBody>
       </p:sp>
@@ -14191,7 +15531,14 @@
           <a:bodyPr lIns="0" tIns="0" rIns="0" bIns="0"/>
           <a:lstStyle/>
           <a:p>
-            <a:pPr/>
+            <a:pPr>
+              <a:defRPr>
+                <a:latin typeface="+mn-lt"/>
+                <a:ea typeface="+mn-ea"/>
+                <a:cs typeface="+mn-cs"/>
+                <a:sym typeface="Helvetica"/>
+              </a:defRPr>
+            </a:pPr>
           </a:p>
         </p:txBody>
       </p:sp>
@@ -14220,7 +15567,14 @@
           <a:bodyPr lIns="0" tIns="0" rIns="0" bIns="0"/>
           <a:lstStyle/>
           <a:p>
-            <a:pPr/>
+            <a:pPr>
+              <a:defRPr>
+                <a:latin typeface="+mn-lt"/>
+                <a:ea typeface="+mn-ea"/>
+                <a:cs typeface="+mn-cs"/>
+                <a:sym typeface="Helvetica"/>
+              </a:defRPr>
+            </a:pPr>
           </a:p>
         </p:txBody>
       </p:sp>
@@ -14249,7 +15603,14 @@
           <a:bodyPr lIns="0" tIns="0" rIns="0" bIns="0"/>
           <a:lstStyle/>
           <a:p>
-            <a:pPr/>
+            <a:pPr>
+              <a:defRPr>
+                <a:latin typeface="+mn-lt"/>
+                <a:ea typeface="+mn-ea"/>
+                <a:cs typeface="+mn-cs"/>
+                <a:sym typeface="Helvetica"/>
+              </a:defRPr>
+            </a:pPr>
           </a:p>
         </p:txBody>
       </p:sp>
@@ -14278,7 +15639,14 @@
           <a:bodyPr lIns="0" tIns="0" rIns="0" bIns="0"/>
           <a:lstStyle/>
           <a:p>
-            <a:pPr/>
+            <a:pPr>
+              <a:defRPr>
+                <a:latin typeface="+mn-lt"/>
+                <a:ea typeface="+mn-ea"/>
+                <a:cs typeface="+mn-cs"/>
+                <a:sym typeface="Helvetica"/>
+              </a:defRPr>
+            </a:pPr>
           </a:p>
         </p:txBody>
       </p:sp>
@@ -14307,7 +15675,14 @@
           <a:bodyPr lIns="0" tIns="0" rIns="0" bIns="0"/>
           <a:lstStyle/>
           <a:p>
-            <a:pPr/>
+            <a:pPr>
+              <a:defRPr>
+                <a:latin typeface="+mn-lt"/>
+                <a:ea typeface="+mn-ea"/>
+                <a:cs typeface="+mn-cs"/>
+                <a:sym typeface="Helvetica"/>
+              </a:defRPr>
+            </a:pPr>
           </a:p>
         </p:txBody>
       </p:sp>
@@ -14336,7 +15711,14 @@
           <a:bodyPr lIns="0" tIns="0" rIns="0" bIns="0"/>
           <a:lstStyle/>
           <a:p>
-            <a:pPr/>
+            <a:pPr>
+              <a:defRPr>
+                <a:latin typeface="+mn-lt"/>
+                <a:ea typeface="+mn-ea"/>
+                <a:cs typeface="+mn-cs"/>
+                <a:sym typeface="Helvetica"/>
+              </a:defRPr>
+            </a:pPr>
           </a:p>
         </p:txBody>
       </p:sp>
@@ -14349,7 +15731,7 @@
         <p:spPr>
           <a:xfrm>
             <a:off x="4873625" y="2781300"/>
-            <a:ext cx="1666876" cy="0"/>
+            <a:ext cx="1666877" cy="0"/>
           </a:xfrm>
           <a:prstGeom prst="line">
             <a:avLst/>
@@ -14362,7 +15744,7 @@
           </a:ln>
         </p:spPr>
         <p:txBody>
-          <a:bodyPr lIns="0" tIns="0" rIns="0" bIns="0"/>
+          <a:bodyPr lIns="45718" tIns="45718" rIns="45718" bIns="45718"/>
           <a:lstStyle/>
           <a:p>
             <a:pPr/>
@@ -14396,7 +15778,14 @@
           <a:bodyPr lIns="0" tIns="0" rIns="0" bIns="0"/>
           <a:lstStyle/>
           <a:p>
-            <a:pPr/>
+            <a:pPr>
+              <a:defRPr>
+                <a:latin typeface="+mn-lt"/>
+                <a:ea typeface="+mn-ea"/>
+                <a:cs typeface="+mn-cs"/>
+                <a:sym typeface="Helvetica"/>
+              </a:defRPr>
+            </a:pPr>
           </a:p>
         </p:txBody>
       </p:sp>
@@ -14408,8 +15797,8 @@
         </p:nvSpPr>
         <p:spPr>
           <a:xfrm>
-            <a:off x="4490720" y="2893024"/>
-            <a:ext cx="727712" cy="214700"/>
+            <a:off x="4490720" y="2893023"/>
+            <a:ext cx="727713" cy="214698"/>
           </a:xfrm>
           <a:prstGeom prst="rect">
             <a:avLst/>
@@ -14473,7 +15862,14 @@
           <a:bodyPr lIns="0" tIns="0" rIns="0" bIns="0"/>
           <a:lstStyle/>
           <a:p>
-            <a:pPr/>
+            <a:pPr>
+              <a:defRPr>
+                <a:latin typeface="+mn-lt"/>
+                <a:ea typeface="+mn-ea"/>
+                <a:cs typeface="+mn-cs"/>
+                <a:sym typeface="Helvetica"/>
+              </a:defRPr>
+            </a:pPr>
           </a:p>
         </p:txBody>
       </p:sp>
@@ -14504,7 +15900,14 @@
           <a:bodyPr lIns="0" tIns="0" rIns="0" bIns="0"/>
           <a:lstStyle/>
           <a:p>
-            <a:pPr/>
+            <a:pPr>
+              <a:defRPr>
+                <a:latin typeface="+mn-lt"/>
+                <a:ea typeface="+mn-ea"/>
+                <a:cs typeface="+mn-cs"/>
+                <a:sym typeface="Helvetica"/>
+              </a:defRPr>
+            </a:pPr>
           </a:p>
         </p:txBody>
       </p:sp>
@@ -14516,8 +15919,8 @@
         </p:nvSpPr>
         <p:spPr>
           <a:xfrm>
-            <a:off x="6005195" y="2998007"/>
-            <a:ext cx="1108712" cy="366685"/>
+            <a:off x="6005195" y="2998006"/>
+            <a:ext cx="1108713" cy="366683"/>
           </a:xfrm>
           <a:prstGeom prst="rect">
             <a:avLst/>
@@ -14580,7 +15983,14 @@
           <a:bodyPr lIns="0" tIns="0" rIns="0" bIns="0"/>
           <a:lstStyle/>
           <a:p>
-            <a:pPr/>
+            <a:pPr>
+              <a:defRPr>
+                <a:latin typeface="+mn-lt"/>
+                <a:ea typeface="+mn-ea"/>
+                <a:cs typeface="+mn-cs"/>
+                <a:sym typeface="Helvetica"/>
+              </a:defRPr>
+            </a:pPr>
           </a:p>
         </p:txBody>
       </p:sp>
@@ -14592,8 +16002,8 @@
         </p:nvSpPr>
         <p:spPr>
           <a:xfrm>
-            <a:off x="4300220" y="1778599"/>
-            <a:ext cx="1261112" cy="214700"/>
+            <a:off x="4300220" y="1778598"/>
+            <a:ext cx="1261113" cy="214698"/>
           </a:xfrm>
           <a:prstGeom prst="rect">
             <a:avLst/>
@@ -14640,8 +16050,8 @@
         </p:nvSpPr>
         <p:spPr>
           <a:xfrm>
-            <a:off x="5976620" y="2363007"/>
-            <a:ext cx="1470662" cy="226985"/>
+            <a:off x="5976620" y="2363006"/>
+            <a:ext cx="1470663" cy="226983"/>
           </a:xfrm>
           <a:prstGeom prst="rect">
             <a:avLst/>
@@ -14688,8 +16098,8 @@
         </p:nvSpPr>
         <p:spPr>
           <a:xfrm>
-            <a:off x="5760720" y="4804167"/>
-            <a:ext cx="2918462" cy="202415"/>
+            <a:off x="5760720" y="4804166"/>
+            <a:ext cx="2918463" cy="202414"/>
           </a:xfrm>
           <a:prstGeom prst="rect">
             <a:avLst/>
@@ -14737,7 +16147,7 @@
         <p:spPr>
           <a:xfrm>
             <a:off x="269081" y="1938338"/>
-            <a:ext cx="2190751" cy="876302"/>
+            <a:ext cx="2190751" cy="876303"/>
           </a:xfrm>
           <a:prstGeom prst="roundRect">
             <a:avLst>
@@ -14757,7 +16167,14 @@
           <a:bodyPr lIns="0" tIns="0" rIns="0" bIns="0"/>
           <a:lstStyle/>
           <a:p>
-            <a:pPr/>
+            <a:pPr>
+              <a:defRPr>
+                <a:latin typeface="+mn-lt"/>
+                <a:ea typeface="+mn-ea"/>
+                <a:cs typeface="+mn-cs"/>
+                <a:sym typeface="Helvetica"/>
+              </a:defRPr>
+            </a:pPr>
           </a:p>
         </p:txBody>
       </p:sp>
@@ -14770,7 +16187,7 @@
         <p:spPr>
           <a:xfrm>
             <a:off x="457675" y="1983388"/>
-            <a:ext cx="594362" cy="214699"/>
+            <a:ext cx="594363" cy="214697"/>
           </a:xfrm>
           <a:prstGeom prst="rect">
             <a:avLst/>
@@ -14838,7 +16255,14 @@
           <a:bodyPr lIns="0" tIns="0" rIns="0" bIns="0"/>
           <a:lstStyle/>
           <a:p>
-            <a:pPr/>
+            <a:pPr>
+              <a:defRPr>
+                <a:latin typeface="+mn-lt"/>
+                <a:ea typeface="+mn-ea"/>
+                <a:cs typeface="+mn-cs"/>
+                <a:sym typeface="Helvetica"/>
+              </a:defRPr>
+            </a:pPr>
           </a:p>
         </p:txBody>
       </p:sp>
@@ -14850,8 +16274,8 @@
         </p:nvSpPr>
         <p:spPr>
           <a:xfrm>
-            <a:off x="3055620" y="2085477"/>
-            <a:ext cx="670562" cy="362945"/>
+            <a:off x="3055620" y="2085476"/>
+            <a:ext cx="670563" cy="362943"/>
           </a:xfrm>
           <a:prstGeom prst="rect">
             <a:avLst/>
@@ -14898,8 +16322,8 @@
         </p:nvSpPr>
         <p:spPr>
           <a:xfrm>
-            <a:off x="2998470" y="2540807"/>
-            <a:ext cx="784862" cy="366685"/>
+            <a:off x="2998470" y="2540806"/>
+            <a:ext cx="784863" cy="366683"/>
           </a:xfrm>
           <a:prstGeom prst="rect">
             <a:avLst/>
@@ -14977,7 +16401,14 @@
           <a:bodyPr lIns="0" tIns="0" rIns="0" bIns="0"/>
           <a:lstStyle/>
           <a:p>
-            <a:pPr/>
+            <a:pPr>
+              <a:defRPr>
+                <a:latin typeface="+mn-lt"/>
+                <a:ea typeface="+mn-ea"/>
+                <a:cs typeface="+mn-cs"/>
+                <a:sym typeface="Helvetica"/>
+              </a:defRPr>
+            </a:pPr>
           </a:p>
         </p:txBody>
       </p:sp>
@@ -15006,7 +16437,14 @@
           <a:bodyPr lIns="0" tIns="0" rIns="0" bIns="0"/>
           <a:lstStyle/>
           <a:p>
-            <a:pPr/>
+            <a:pPr>
+              <a:defRPr>
+                <a:latin typeface="+mn-lt"/>
+                <a:ea typeface="+mn-ea"/>
+                <a:cs typeface="+mn-cs"/>
+                <a:sym typeface="Helvetica"/>
+              </a:defRPr>
+            </a:pPr>
           </a:p>
         </p:txBody>
       </p:sp>
@@ -15035,7 +16473,14 @@
           <a:bodyPr lIns="0" tIns="0" rIns="0" bIns="0"/>
           <a:lstStyle/>
           <a:p>
-            <a:pPr/>
+            <a:pPr>
+              <a:defRPr>
+                <a:latin typeface="+mn-lt"/>
+                <a:ea typeface="+mn-ea"/>
+                <a:cs typeface="+mn-cs"/>
+                <a:sym typeface="Helvetica"/>
+              </a:defRPr>
+            </a:pPr>
           </a:p>
         </p:txBody>
       </p:sp>
@@ -15064,7 +16509,14 @@
           <a:bodyPr lIns="0" tIns="0" rIns="0" bIns="0"/>
           <a:lstStyle/>
           <a:p>
-            <a:pPr/>
+            <a:pPr>
+              <a:defRPr>
+                <a:latin typeface="+mn-lt"/>
+                <a:ea typeface="+mn-ea"/>
+                <a:cs typeface="+mn-cs"/>
+                <a:sym typeface="Helvetica"/>
+              </a:defRPr>
+            </a:pPr>
           </a:p>
         </p:txBody>
       </p:sp>
@@ -15093,7 +16545,14 @@
           <a:bodyPr lIns="0" tIns="0" rIns="0" bIns="0"/>
           <a:lstStyle/>
           <a:p>
-            <a:pPr/>
+            <a:pPr>
+              <a:defRPr>
+                <a:latin typeface="+mn-lt"/>
+                <a:ea typeface="+mn-ea"/>
+                <a:cs typeface="+mn-cs"/>
+                <a:sym typeface="Helvetica"/>
+              </a:defRPr>
+            </a:pPr>
           </a:p>
         </p:txBody>
       </p:sp>
@@ -15105,8 +16564,8 @@
         </p:nvSpPr>
         <p:spPr>
           <a:xfrm>
-            <a:off x="2507851" y="2376488"/>
-            <a:ext cx="311152" cy="2"/>
+            <a:off x="2507850" y="2376488"/>
+            <a:ext cx="311153" cy="3"/>
           </a:xfrm>
           <a:prstGeom prst="line">
             <a:avLst/>
@@ -15119,7 +16578,7 @@
           </a:ln>
         </p:spPr>
         <p:txBody>
-          <a:bodyPr lIns="0" tIns="0" rIns="0" bIns="0"/>
+          <a:bodyPr lIns="45718" tIns="45718" rIns="45718" bIns="45718"/>
           <a:lstStyle/>
           <a:p>
             <a:pPr/>
@@ -15135,7 +16594,7 @@
         <p:spPr>
           <a:xfrm>
             <a:off x="457675" y="2304894"/>
-            <a:ext cx="1813563" cy="276537"/>
+            <a:ext cx="1813563" cy="276535"/>
           </a:xfrm>
           <a:prstGeom prst="rect">
             <a:avLst/>
@@ -15208,8 +16667,8 @@
         </p:nvSpPr>
         <p:spPr>
           <a:xfrm>
-            <a:off x="0" y="-2"/>
-            <a:ext cx="9144001" cy="5143503"/>
+            <a:off x="0" y="-3"/>
+            <a:ext cx="9144001" cy="5143505"/>
           </a:xfrm>
           <a:prstGeom prst="rect">
             <a:avLst/>
@@ -15225,7 +16684,14 @@
           <a:bodyPr lIns="0" tIns="0" rIns="0" bIns="0"/>
           <a:lstStyle/>
           <a:p>
-            <a:pPr/>
+            <a:pPr>
+              <a:defRPr>
+                <a:latin typeface="+mn-lt"/>
+                <a:ea typeface="+mn-ea"/>
+                <a:cs typeface="+mn-cs"/>
+                <a:sym typeface="Helvetica"/>
+              </a:defRPr>
+            </a:pPr>
           </a:p>
         </p:txBody>
       </p:sp>
@@ -15306,7 +16772,14 @@
           <a:bodyPr lIns="0" tIns="0" rIns="0" bIns="0"/>
           <a:lstStyle/>
           <a:p>
-            <a:pPr/>
+            <a:pPr>
+              <a:defRPr>
+                <a:latin typeface="+mn-lt"/>
+                <a:ea typeface="+mn-ea"/>
+                <a:cs typeface="+mn-cs"/>
+                <a:sym typeface="Helvetica"/>
+              </a:defRPr>
+            </a:pPr>
           </a:p>
         </p:txBody>
       </p:sp>
@@ -15318,8 +16791,8 @@
         </p:nvSpPr>
         <p:spPr>
           <a:xfrm>
-            <a:off x="4195445" y="1149949"/>
-            <a:ext cx="2289812" cy="214700"/>
+            <a:off x="4195445" y="1149948"/>
+            <a:ext cx="2289813" cy="214698"/>
           </a:xfrm>
           <a:prstGeom prst="rect">
             <a:avLst/>
@@ -15383,7 +16856,14 @@
           <a:bodyPr lIns="0" tIns="0" rIns="0" bIns="0"/>
           <a:lstStyle/>
           <a:p>
-            <a:pPr/>
+            <a:pPr>
+              <a:defRPr>
+                <a:latin typeface="+mn-lt"/>
+                <a:ea typeface="+mn-ea"/>
+                <a:cs typeface="+mn-cs"/>
+                <a:sym typeface="Helvetica"/>
+              </a:defRPr>
+            </a:pPr>
           </a:p>
         </p:txBody>
       </p:sp>
@@ -15412,7 +16892,14 @@
           <a:bodyPr lIns="0" tIns="0" rIns="0" bIns="0"/>
           <a:lstStyle/>
           <a:p>
-            <a:pPr/>
+            <a:pPr>
+              <a:defRPr>
+                <a:latin typeface="+mn-lt"/>
+                <a:ea typeface="+mn-ea"/>
+                <a:cs typeface="+mn-cs"/>
+                <a:sym typeface="Helvetica"/>
+              </a:defRPr>
+            </a:pPr>
           </a:p>
         </p:txBody>
       </p:sp>
@@ -15441,7 +16928,14 @@
           <a:bodyPr lIns="0" tIns="0" rIns="0" bIns="0"/>
           <a:lstStyle/>
           <a:p>
-            <a:pPr/>
+            <a:pPr>
+              <a:defRPr>
+                <a:latin typeface="+mn-lt"/>
+                <a:ea typeface="+mn-ea"/>
+                <a:cs typeface="+mn-cs"/>
+                <a:sym typeface="Helvetica"/>
+              </a:defRPr>
+            </a:pPr>
           </a:p>
         </p:txBody>
       </p:sp>
@@ -15470,7 +16964,14 @@
           <a:bodyPr lIns="0" tIns="0" rIns="0" bIns="0"/>
           <a:lstStyle/>
           <a:p>
-            <a:pPr/>
+            <a:pPr>
+              <a:defRPr>
+                <a:latin typeface="+mn-lt"/>
+                <a:ea typeface="+mn-ea"/>
+                <a:cs typeface="+mn-cs"/>
+                <a:sym typeface="Helvetica"/>
+              </a:defRPr>
+            </a:pPr>
           </a:p>
         </p:txBody>
       </p:sp>
@@ -15499,7 +17000,14 @@
           <a:bodyPr lIns="0" tIns="0" rIns="0" bIns="0"/>
           <a:lstStyle/>
           <a:p>
-            <a:pPr/>
+            <a:pPr>
+              <a:defRPr>
+                <a:latin typeface="+mn-lt"/>
+                <a:ea typeface="+mn-ea"/>
+                <a:cs typeface="+mn-cs"/>
+                <a:sym typeface="Helvetica"/>
+              </a:defRPr>
+            </a:pPr>
           </a:p>
         </p:txBody>
       </p:sp>
@@ -15528,7 +17036,14 @@
           <a:bodyPr lIns="0" tIns="0" rIns="0" bIns="0"/>
           <a:lstStyle/>
           <a:p>
-            <a:pPr/>
+            <a:pPr>
+              <a:defRPr>
+                <a:latin typeface="+mn-lt"/>
+                <a:ea typeface="+mn-ea"/>
+                <a:cs typeface="+mn-cs"/>
+                <a:sym typeface="Helvetica"/>
+              </a:defRPr>
+            </a:pPr>
           </a:p>
         </p:txBody>
       </p:sp>
@@ -15557,7 +17072,14 @@
           <a:bodyPr lIns="0" tIns="0" rIns="0" bIns="0"/>
           <a:lstStyle/>
           <a:p>
-            <a:pPr/>
+            <a:pPr>
+              <a:defRPr>
+                <a:latin typeface="+mn-lt"/>
+                <a:ea typeface="+mn-ea"/>
+                <a:cs typeface="+mn-cs"/>
+                <a:sym typeface="Helvetica"/>
+              </a:defRPr>
+            </a:pPr>
           </a:p>
         </p:txBody>
       </p:sp>
@@ -15586,7 +17108,14 @@
           <a:bodyPr lIns="0" tIns="0" rIns="0" bIns="0"/>
           <a:lstStyle/>
           <a:p>
-            <a:pPr/>
+            <a:pPr>
+              <a:defRPr>
+                <a:latin typeface="+mn-lt"/>
+                <a:ea typeface="+mn-ea"/>
+                <a:cs typeface="+mn-cs"/>
+                <a:sym typeface="Helvetica"/>
+              </a:defRPr>
+            </a:pPr>
           </a:p>
         </p:txBody>
       </p:sp>
@@ -15615,7 +17144,14 @@
           <a:bodyPr lIns="0" tIns="0" rIns="0" bIns="0"/>
           <a:lstStyle/>
           <a:p>
-            <a:pPr/>
+            <a:pPr>
+              <a:defRPr>
+                <a:latin typeface="+mn-lt"/>
+                <a:ea typeface="+mn-ea"/>
+                <a:cs typeface="+mn-cs"/>
+                <a:sym typeface="Helvetica"/>
+              </a:defRPr>
+            </a:pPr>
           </a:p>
         </p:txBody>
       </p:sp>
@@ -15628,7 +17164,7 @@
         <p:spPr>
           <a:xfrm>
             <a:off x="4873625" y="2781300"/>
-            <a:ext cx="2981326" cy="0"/>
+            <a:ext cx="2981327" cy="0"/>
           </a:xfrm>
           <a:prstGeom prst="line">
             <a:avLst/>
@@ -15640,7 +17176,7 @@
           </a:ln>
         </p:spPr>
         <p:txBody>
-          <a:bodyPr lIns="0" tIns="0" rIns="0" bIns="0"/>
+          <a:bodyPr lIns="45718" tIns="45718" rIns="45718" bIns="45718"/>
           <a:lstStyle/>
           <a:p>
             <a:pPr/>
@@ -15656,7 +17192,7 @@
         <p:spPr>
           <a:xfrm>
             <a:off x="4873625" y="2781300"/>
-            <a:ext cx="2981326" cy="0"/>
+            <a:ext cx="2981327" cy="0"/>
           </a:xfrm>
           <a:prstGeom prst="line">
             <a:avLst/>
@@ -15669,7 +17205,7 @@
           </a:ln>
         </p:spPr>
         <p:txBody>
-          <a:bodyPr lIns="0" tIns="0" rIns="0" bIns="0"/>
+          <a:bodyPr lIns="45718" tIns="45718" rIns="45718" bIns="45718"/>
           <a:lstStyle/>
           <a:p>
             <a:pPr/>
@@ -15685,7 +17221,7 @@
         <p:spPr>
           <a:xfrm>
             <a:off x="4873625" y="2781300"/>
-            <a:ext cx="1666876" cy="0"/>
+            <a:ext cx="1666877" cy="0"/>
           </a:xfrm>
           <a:prstGeom prst="line">
             <a:avLst/>
@@ -15698,7 +17234,7 @@
           </a:ln>
         </p:spPr>
         <p:txBody>
-          <a:bodyPr lIns="0" tIns="0" rIns="0" bIns="0"/>
+          <a:bodyPr lIns="45718" tIns="45718" rIns="45718" bIns="45718"/>
           <a:lstStyle/>
           <a:p>
             <a:pPr/>
@@ -15714,7 +17250,7 @@
         <p:spPr>
           <a:xfrm flipH="1">
             <a:off x="5635623" y="2781300"/>
-            <a:ext cx="904877" cy="323851"/>
+            <a:ext cx="904878" cy="323852"/>
           </a:xfrm>
           <a:prstGeom prst="line">
             <a:avLst/>
@@ -15727,7 +17263,7 @@
           </a:ln>
         </p:spPr>
         <p:txBody>
-          <a:bodyPr lIns="0" tIns="0" rIns="0" bIns="0"/>
+          <a:bodyPr lIns="45718" tIns="45718" rIns="45718" bIns="45718"/>
           <a:lstStyle/>
           <a:p>
             <a:pPr/>
@@ -15761,7 +17297,14 @@
           <a:bodyPr lIns="0" tIns="0" rIns="0" bIns="0"/>
           <a:lstStyle/>
           <a:p>
-            <a:pPr/>
+            <a:pPr>
+              <a:defRPr>
+                <a:latin typeface="+mn-lt"/>
+                <a:ea typeface="+mn-ea"/>
+                <a:cs typeface="+mn-cs"/>
+                <a:sym typeface="Helvetica"/>
+              </a:defRPr>
+            </a:pPr>
           </a:p>
         </p:txBody>
       </p:sp>
@@ -15773,8 +17316,8 @@
         </p:nvSpPr>
         <p:spPr>
           <a:xfrm>
-            <a:off x="4490720" y="2893024"/>
-            <a:ext cx="727712" cy="214700"/>
+            <a:off x="4490720" y="2893023"/>
+            <a:ext cx="727713" cy="214698"/>
           </a:xfrm>
           <a:prstGeom prst="rect">
             <a:avLst/>
@@ -15840,7 +17383,14 @@
           <a:bodyPr lIns="0" tIns="0" rIns="0" bIns="0"/>
           <a:lstStyle/>
           <a:p>
-            <a:pPr/>
+            <a:pPr>
+              <a:defRPr>
+                <a:latin typeface="+mn-lt"/>
+                <a:ea typeface="+mn-ea"/>
+                <a:cs typeface="+mn-cs"/>
+                <a:sym typeface="Helvetica"/>
+              </a:defRPr>
+            </a:pPr>
           </a:p>
         </p:txBody>
       </p:sp>
@@ -15852,8 +17402,8 @@
         </p:nvSpPr>
         <p:spPr>
           <a:xfrm>
-            <a:off x="8081643" y="2630747"/>
-            <a:ext cx="632462" cy="301106"/>
+            <a:off x="8081643" y="2630746"/>
+            <a:ext cx="632463" cy="301105"/>
           </a:xfrm>
           <a:prstGeom prst="rect">
             <a:avLst/>
@@ -15917,7 +17467,14 @@
           <a:bodyPr lIns="0" tIns="0" rIns="0" bIns="0"/>
           <a:lstStyle/>
           <a:p>
-            <a:pPr/>
+            <a:pPr>
+              <a:defRPr>
+                <a:latin typeface="+mn-lt"/>
+                <a:ea typeface="+mn-ea"/>
+                <a:cs typeface="+mn-cs"/>
+                <a:sym typeface="Helvetica"/>
+              </a:defRPr>
+            </a:pPr>
           </a:p>
         </p:txBody>
       </p:sp>
@@ -15948,7 +17505,14 @@
           <a:bodyPr lIns="0" tIns="0" rIns="0" bIns="0"/>
           <a:lstStyle/>
           <a:p>
-            <a:pPr/>
+            <a:pPr>
+              <a:defRPr>
+                <a:latin typeface="+mn-lt"/>
+                <a:ea typeface="+mn-ea"/>
+                <a:cs typeface="+mn-cs"/>
+                <a:sym typeface="Helvetica"/>
+              </a:defRPr>
+            </a:pPr>
           </a:p>
         </p:txBody>
       </p:sp>
@@ -15960,8 +17524,8 @@
         </p:nvSpPr>
         <p:spPr>
           <a:xfrm>
-            <a:off x="6005195" y="2998007"/>
-            <a:ext cx="1108712" cy="366685"/>
+            <a:off x="6005195" y="2998006"/>
+            <a:ext cx="1108713" cy="366683"/>
           </a:xfrm>
           <a:prstGeom prst="rect">
             <a:avLst/>
@@ -16024,7 +17588,14 @@
           <a:bodyPr lIns="0" tIns="0" rIns="0" bIns="0"/>
           <a:lstStyle/>
           <a:p>
-            <a:pPr/>
+            <a:pPr>
+              <a:defRPr>
+                <a:latin typeface="+mn-lt"/>
+                <a:ea typeface="+mn-ea"/>
+                <a:cs typeface="+mn-cs"/>
+                <a:sym typeface="Helvetica"/>
+              </a:defRPr>
+            </a:pPr>
           </a:p>
         </p:txBody>
       </p:sp>
@@ -16036,8 +17607,8 @@
         </p:nvSpPr>
         <p:spPr>
           <a:xfrm>
-            <a:off x="4300220" y="1778599"/>
-            <a:ext cx="1261112" cy="214700"/>
+            <a:off x="4300220" y="1778598"/>
+            <a:ext cx="1261113" cy="214698"/>
           </a:xfrm>
           <a:prstGeom prst="rect">
             <a:avLst/>
@@ -16084,8 +17655,8 @@
         </p:nvSpPr>
         <p:spPr>
           <a:xfrm>
-            <a:off x="5976620" y="2363007"/>
-            <a:ext cx="1470662" cy="226985"/>
+            <a:off x="5976620" y="2363006"/>
+            <a:ext cx="1470663" cy="226983"/>
           </a:xfrm>
           <a:prstGeom prst="rect">
             <a:avLst/>
@@ -16132,8 +17703,8 @@
         </p:nvSpPr>
         <p:spPr>
           <a:xfrm>
-            <a:off x="5760720" y="4804167"/>
-            <a:ext cx="2918462" cy="202415"/>
+            <a:off x="5760720" y="4804166"/>
+            <a:ext cx="2918463" cy="202414"/>
           </a:xfrm>
           <a:prstGeom prst="rect">
             <a:avLst/>
@@ -16181,7 +17752,7 @@
         <p:spPr>
           <a:xfrm>
             <a:off x="269081" y="1938338"/>
-            <a:ext cx="2190751" cy="876302"/>
+            <a:ext cx="2190751" cy="876303"/>
           </a:xfrm>
           <a:prstGeom prst="roundRect">
             <a:avLst>
@@ -16201,7 +17772,14 @@
           <a:bodyPr lIns="0" tIns="0" rIns="0" bIns="0"/>
           <a:lstStyle/>
           <a:p>
-            <a:pPr/>
+            <a:pPr>
+              <a:defRPr>
+                <a:latin typeface="+mn-lt"/>
+                <a:ea typeface="+mn-ea"/>
+                <a:cs typeface="+mn-cs"/>
+                <a:sym typeface="Helvetica"/>
+              </a:defRPr>
+            </a:pPr>
           </a:p>
         </p:txBody>
       </p:sp>
@@ -16214,7 +17792,7 @@
         <p:spPr>
           <a:xfrm>
             <a:off x="457675" y="1983388"/>
-            <a:ext cx="594362" cy="214699"/>
+            <a:ext cx="594363" cy="214697"/>
           </a:xfrm>
           <a:prstGeom prst="rect">
             <a:avLst/>
@@ -16282,7 +17860,14 @@
           <a:bodyPr lIns="0" tIns="0" rIns="0" bIns="0"/>
           <a:lstStyle/>
           <a:p>
-            <a:pPr/>
+            <a:pPr>
+              <a:defRPr>
+                <a:latin typeface="+mn-lt"/>
+                <a:ea typeface="+mn-ea"/>
+                <a:cs typeface="+mn-cs"/>
+                <a:sym typeface="Helvetica"/>
+              </a:defRPr>
+            </a:pPr>
           </a:p>
         </p:txBody>
       </p:sp>
@@ -16294,8 +17879,8 @@
         </p:nvSpPr>
         <p:spPr>
           <a:xfrm>
-            <a:off x="3055620" y="2085477"/>
-            <a:ext cx="670562" cy="362945"/>
+            <a:off x="3055620" y="2085476"/>
+            <a:ext cx="670563" cy="362943"/>
           </a:xfrm>
           <a:prstGeom prst="rect">
             <a:avLst/>
@@ -16342,8 +17927,8 @@
         </p:nvSpPr>
         <p:spPr>
           <a:xfrm>
-            <a:off x="2998470" y="2540807"/>
-            <a:ext cx="784862" cy="366685"/>
+            <a:off x="2998470" y="2540806"/>
+            <a:ext cx="784863" cy="366683"/>
           </a:xfrm>
           <a:prstGeom prst="rect">
             <a:avLst/>
@@ -16421,7 +18006,14 @@
           <a:bodyPr lIns="0" tIns="0" rIns="0" bIns="0"/>
           <a:lstStyle/>
           <a:p>
-            <a:pPr/>
+            <a:pPr>
+              <a:defRPr>
+                <a:latin typeface="+mn-lt"/>
+                <a:ea typeface="+mn-ea"/>
+                <a:cs typeface="+mn-cs"/>
+                <a:sym typeface="Helvetica"/>
+              </a:defRPr>
+            </a:pPr>
           </a:p>
         </p:txBody>
       </p:sp>
@@ -16450,7 +18042,14 @@
           <a:bodyPr lIns="0" tIns="0" rIns="0" bIns="0"/>
           <a:lstStyle/>
           <a:p>
-            <a:pPr/>
+            <a:pPr>
+              <a:defRPr>
+                <a:latin typeface="+mn-lt"/>
+                <a:ea typeface="+mn-ea"/>
+                <a:cs typeface="+mn-cs"/>
+                <a:sym typeface="Helvetica"/>
+              </a:defRPr>
+            </a:pPr>
           </a:p>
         </p:txBody>
       </p:sp>
@@ -16479,7 +18078,14 @@
           <a:bodyPr lIns="0" tIns="0" rIns="0" bIns="0"/>
           <a:lstStyle/>
           <a:p>
-            <a:pPr/>
+            <a:pPr>
+              <a:defRPr>
+                <a:latin typeface="+mn-lt"/>
+                <a:ea typeface="+mn-ea"/>
+                <a:cs typeface="+mn-cs"/>
+                <a:sym typeface="Helvetica"/>
+              </a:defRPr>
+            </a:pPr>
           </a:p>
         </p:txBody>
       </p:sp>
@@ -16508,7 +18114,14 @@
           <a:bodyPr lIns="0" tIns="0" rIns="0" bIns="0"/>
           <a:lstStyle/>
           <a:p>
-            <a:pPr/>
+            <a:pPr>
+              <a:defRPr>
+                <a:latin typeface="+mn-lt"/>
+                <a:ea typeface="+mn-ea"/>
+                <a:cs typeface="+mn-cs"/>
+                <a:sym typeface="Helvetica"/>
+              </a:defRPr>
+            </a:pPr>
           </a:p>
         </p:txBody>
       </p:sp>
@@ -16537,7 +18150,14 @@
           <a:bodyPr lIns="0" tIns="0" rIns="0" bIns="0"/>
           <a:lstStyle/>
           <a:p>
-            <a:pPr/>
+            <a:pPr>
+              <a:defRPr>
+                <a:latin typeface="+mn-lt"/>
+                <a:ea typeface="+mn-ea"/>
+                <a:cs typeface="+mn-cs"/>
+                <a:sym typeface="Helvetica"/>
+              </a:defRPr>
+            </a:pPr>
           </a:p>
         </p:txBody>
       </p:sp>
@@ -16549,8 +18169,8 @@
         </p:nvSpPr>
         <p:spPr>
           <a:xfrm>
-            <a:off x="2507851" y="2376488"/>
-            <a:ext cx="311152" cy="2"/>
+            <a:off x="2507850" y="2376488"/>
+            <a:ext cx="311153" cy="3"/>
           </a:xfrm>
           <a:prstGeom prst="line">
             <a:avLst/>
@@ -16563,7 +18183,7 @@
           </a:ln>
         </p:spPr>
         <p:txBody>
-          <a:bodyPr lIns="0" tIns="0" rIns="0" bIns="0"/>
+          <a:bodyPr lIns="45718" tIns="45718" rIns="45718" bIns="45718"/>
           <a:lstStyle/>
           <a:p>
             <a:pPr/>
@@ -16579,7 +18199,7 @@
         <p:spPr>
           <a:xfrm>
             <a:off x="3889959" y="2532307"/>
-            <a:ext cx="2288592" cy="191845"/>
+            <a:ext cx="2288593" cy="191846"/>
           </a:xfrm>
           <a:prstGeom prst="line">
             <a:avLst/>
@@ -16593,7 +18213,7 @@
           </a:ln>
         </p:spPr>
         <p:txBody>
-          <a:bodyPr lIns="0" tIns="0" rIns="0" bIns="0"/>
+          <a:bodyPr lIns="45718" tIns="45718" rIns="45718" bIns="45718"/>
           <a:lstStyle/>
           <a:p>
             <a:pPr/>
@@ -16609,7 +18229,7 @@
         <p:spPr>
           <a:xfrm>
             <a:off x="457675" y="2304894"/>
-            <a:ext cx="1813563" cy="276537"/>
+            <a:ext cx="1813563" cy="276535"/>
           </a:xfrm>
           <a:prstGeom prst="rect">
             <a:avLst/>
@@ -16682,8 +18302,8 @@
         </p:nvSpPr>
         <p:spPr>
           <a:xfrm>
-            <a:off x="0" y="-2"/>
-            <a:ext cx="9144001" cy="5143503"/>
+            <a:off x="0" y="-3"/>
+            <a:ext cx="9144001" cy="5143505"/>
           </a:xfrm>
           <a:prstGeom prst="rect">
             <a:avLst/>
@@ -16699,7 +18319,14 @@
           <a:bodyPr lIns="0" tIns="0" rIns="0" bIns="0"/>
           <a:lstStyle/>
           <a:p>
-            <a:pPr/>
+            <a:pPr>
+              <a:defRPr>
+                <a:latin typeface="+mn-lt"/>
+                <a:ea typeface="+mn-ea"/>
+                <a:cs typeface="+mn-cs"/>
+                <a:sym typeface="Helvetica"/>
+              </a:defRPr>
+            </a:pPr>
           </a:p>
         </p:txBody>
       </p:sp>
@@ -16780,7 +18407,14 @@
           <a:bodyPr lIns="0" tIns="0" rIns="0" bIns="0"/>
           <a:lstStyle/>
           <a:p>
-            <a:pPr/>
+            <a:pPr>
+              <a:defRPr>
+                <a:latin typeface="+mn-lt"/>
+                <a:ea typeface="+mn-ea"/>
+                <a:cs typeface="+mn-cs"/>
+                <a:sym typeface="Helvetica"/>
+              </a:defRPr>
+            </a:pPr>
           </a:p>
         </p:txBody>
       </p:sp>
@@ -16792,8 +18426,8 @@
         </p:nvSpPr>
         <p:spPr>
           <a:xfrm>
-            <a:off x="4195443" y="1149949"/>
-            <a:ext cx="2289813" cy="214700"/>
+            <a:off x="4195443" y="1149948"/>
+            <a:ext cx="2289814" cy="214698"/>
           </a:xfrm>
           <a:prstGeom prst="rect">
             <a:avLst/>
@@ -16857,7 +18491,14 @@
           <a:bodyPr lIns="0" tIns="0" rIns="0" bIns="0"/>
           <a:lstStyle/>
           <a:p>
-            <a:pPr/>
+            <a:pPr>
+              <a:defRPr>
+                <a:latin typeface="+mn-lt"/>
+                <a:ea typeface="+mn-ea"/>
+                <a:cs typeface="+mn-cs"/>
+                <a:sym typeface="Helvetica"/>
+              </a:defRPr>
+            </a:pPr>
           </a:p>
         </p:txBody>
       </p:sp>
@@ -16886,7 +18527,14 @@
           <a:bodyPr lIns="0" tIns="0" rIns="0" bIns="0"/>
           <a:lstStyle/>
           <a:p>
-            <a:pPr/>
+            <a:pPr>
+              <a:defRPr>
+                <a:latin typeface="+mn-lt"/>
+                <a:ea typeface="+mn-ea"/>
+                <a:cs typeface="+mn-cs"/>
+                <a:sym typeface="Helvetica"/>
+              </a:defRPr>
+            </a:pPr>
           </a:p>
         </p:txBody>
       </p:sp>
@@ -16915,7 +18563,14 @@
           <a:bodyPr lIns="0" tIns="0" rIns="0" bIns="0"/>
           <a:lstStyle/>
           <a:p>
-            <a:pPr/>
+            <a:pPr>
+              <a:defRPr>
+                <a:latin typeface="+mn-lt"/>
+                <a:ea typeface="+mn-ea"/>
+                <a:cs typeface="+mn-cs"/>
+                <a:sym typeface="Helvetica"/>
+              </a:defRPr>
+            </a:pPr>
           </a:p>
         </p:txBody>
       </p:sp>
@@ -16944,7 +18599,14 @@
           <a:bodyPr lIns="0" tIns="0" rIns="0" bIns="0"/>
           <a:lstStyle/>
           <a:p>
-            <a:pPr/>
+            <a:pPr>
+              <a:defRPr>
+                <a:latin typeface="+mn-lt"/>
+                <a:ea typeface="+mn-ea"/>
+                <a:cs typeface="+mn-cs"/>
+                <a:sym typeface="Helvetica"/>
+              </a:defRPr>
+            </a:pPr>
           </a:p>
         </p:txBody>
       </p:sp>
@@ -16973,7 +18635,14 @@
           <a:bodyPr lIns="0" tIns="0" rIns="0" bIns="0"/>
           <a:lstStyle/>
           <a:p>
-            <a:pPr/>
+            <a:pPr>
+              <a:defRPr>
+                <a:latin typeface="+mn-lt"/>
+                <a:ea typeface="+mn-ea"/>
+                <a:cs typeface="+mn-cs"/>
+                <a:sym typeface="Helvetica"/>
+              </a:defRPr>
+            </a:pPr>
           </a:p>
         </p:txBody>
       </p:sp>
@@ -17002,7 +18671,14 @@
           <a:bodyPr lIns="0" tIns="0" rIns="0" bIns="0"/>
           <a:lstStyle/>
           <a:p>
-            <a:pPr/>
+            <a:pPr>
+              <a:defRPr>
+                <a:latin typeface="+mn-lt"/>
+                <a:ea typeface="+mn-ea"/>
+                <a:cs typeface="+mn-cs"/>
+                <a:sym typeface="Helvetica"/>
+              </a:defRPr>
+            </a:pPr>
           </a:p>
         </p:txBody>
       </p:sp>
@@ -17031,7 +18707,14 @@
           <a:bodyPr lIns="0" tIns="0" rIns="0" bIns="0"/>
           <a:lstStyle/>
           <a:p>
-            <a:pPr/>
+            <a:pPr>
+              <a:defRPr>
+                <a:latin typeface="+mn-lt"/>
+                <a:ea typeface="+mn-ea"/>
+                <a:cs typeface="+mn-cs"/>
+                <a:sym typeface="Helvetica"/>
+              </a:defRPr>
+            </a:pPr>
           </a:p>
         </p:txBody>
       </p:sp>
@@ -17060,7 +18743,14 @@
           <a:bodyPr lIns="0" tIns="0" rIns="0" bIns="0"/>
           <a:lstStyle/>
           <a:p>
-            <a:pPr/>
+            <a:pPr>
+              <a:defRPr>
+                <a:latin typeface="+mn-lt"/>
+                <a:ea typeface="+mn-ea"/>
+                <a:cs typeface="+mn-cs"/>
+                <a:sym typeface="Helvetica"/>
+              </a:defRPr>
+            </a:pPr>
           </a:p>
         </p:txBody>
       </p:sp>
@@ -17089,7 +18779,14 @@
           <a:bodyPr lIns="0" tIns="0" rIns="0" bIns="0"/>
           <a:lstStyle/>
           <a:p>
-            <a:pPr/>
+            <a:pPr>
+              <a:defRPr>
+                <a:latin typeface="+mn-lt"/>
+                <a:ea typeface="+mn-ea"/>
+                <a:cs typeface="+mn-cs"/>
+                <a:sym typeface="Helvetica"/>
+              </a:defRPr>
+            </a:pPr>
           </a:p>
         </p:txBody>
       </p:sp>
@@ -17102,7 +18799,7 @@
         <p:spPr>
           <a:xfrm flipV="1">
             <a:off x="4868045" y="1670818"/>
-            <a:ext cx="2659111" cy="1097011"/>
+            <a:ext cx="2659112" cy="1097012"/>
           </a:xfrm>
           <a:prstGeom prst="line">
             <a:avLst/>
@@ -17114,7 +18811,7 @@
           </a:ln>
         </p:spPr>
         <p:txBody>
-          <a:bodyPr lIns="0" tIns="0" rIns="0" bIns="0"/>
+          <a:bodyPr lIns="45718" tIns="45718" rIns="45718" bIns="45718"/>
           <a:lstStyle/>
           <a:p>
             <a:pPr/>
@@ -17130,7 +18827,7 @@
         <p:spPr>
           <a:xfrm flipV="1">
             <a:off x="4868045" y="1670818"/>
-            <a:ext cx="2659111" cy="1097011"/>
+            <a:ext cx="2659112" cy="1097012"/>
           </a:xfrm>
           <a:prstGeom prst="line">
             <a:avLst/>
@@ -17143,7 +18840,7 @@
           </a:ln>
         </p:spPr>
         <p:txBody>
-          <a:bodyPr lIns="0" tIns="0" rIns="0" bIns="0"/>
+          <a:bodyPr lIns="45718" tIns="45718" rIns="45718" bIns="45718"/>
           <a:lstStyle/>
           <a:p>
             <a:pPr/>
@@ -17158,8 +18855,8 @@
         </p:nvSpPr>
         <p:spPr>
           <a:xfrm>
-            <a:off x="4873625" y="2781300"/>
-            <a:ext cx="2981327" cy="0"/>
+            <a:off x="4873624" y="2781300"/>
+            <a:ext cx="2981328" cy="0"/>
           </a:xfrm>
           <a:prstGeom prst="line">
             <a:avLst/>
@@ -17171,7 +18868,7 @@
           </a:ln>
         </p:spPr>
         <p:txBody>
-          <a:bodyPr lIns="0" tIns="0" rIns="0" bIns="0"/>
+          <a:bodyPr lIns="45718" tIns="45718" rIns="45718" bIns="45718"/>
           <a:lstStyle/>
           <a:p>
             <a:pPr/>
@@ -17186,8 +18883,8 @@
         </p:nvSpPr>
         <p:spPr>
           <a:xfrm>
-            <a:off x="4873625" y="2781300"/>
-            <a:ext cx="2981327" cy="0"/>
+            <a:off x="4873624" y="2781300"/>
+            <a:ext cx="2981328" cy="0"/>
           </a:xfrm>
           <a:prstGeom prst="line">
             <a:avLst/>
@@ -17200,7 +18897,7 @@
           </a:ln>
         </p:spPr>
         <p:txBody>
-          <a:bodyPr lIns="0" tIns="0" rIns="0" bIns="0"/>
+          <a:bodyPr lIns="45718" tIns="45718" rIns="45718" bIns="45718"/>
           <a:lstStyle/>
           <a:p>
             <a:pPr/>
@@ -17229,7 +18926,7 @@
           </a:ln>
         </p:spPr>
         <p:txBody>
-          <a:bodyPr lIns="0" tIns="0" rIns="0" bIns="0"/>
+          <a:bodyPr lIns="45718" tIns="45718" rIns="45718" bIns="45718"/>
           <a:lstStyle/>
           <a:p>
             <a:pPr/>
@@ -17245,7 +18942,7 @@
         <p:spPr>
           <a:xfrm flipH="1" flipV="1">
             <a:off x="5683248" y="2438399"/>
-            <a:ext cx="857252" cy="342902"/>
+            <a:ext cx="857253" cy="342903"/>
           </a:xfrm>
           <a:prstGeom prst="line">
             <a:avLst/>
@@ -17258,7 +18955,7 @@
           </a:ln>
         </p:spPr>
         <p:txBody>
-          <a:bodyPr lIns="0" tIns="0" rIns="0" bIns="0"/>
+          <a:bodyPr lIns="45718" tIns="45718" rIns="45718" bIns="45718"/>
           <a:lstStyle/>
           <a:p>
             <a:pPr/>
@@ -17292,7 +18989,14 @@
           <a:bodyPr lIns="0" tIns="0" rIns="0" bIns="0"/>
           <a:lstStyle/>
           <a:p>
-            <a:pPr/>
+            <a:pPr>
+              <a:defRPr>
+                <a:latin typeface="+mn-lt"/>
+                <a:ea typeface="+mn-ea"/>
+                <a:cs typeface="+mn-cs"/>
+                <a:sym typeface="Helvetica"/>
+              </a:defRPr>
+            </a:pPr>
           </a:p>
         </p:txBody>
       </p:sp>
@@ -17304,8 +19008,8 @@
         </p:nvSpPr>
         <p:spPr>
           <a:xfrm>
-            <a:off x="4490718" y="2893024"/>
-            <a:ext cx="727713" cy="214700"/>
+            <a:off x="4490718" y="2893023"/>
+            <a:ext cx="727714" cy="214698"/>
           </a:xfrm>
           <a:prstGeom prst="rect">
             <a:avLst/>
@@ -17371,7 +19075,14 @@
           <a:bodyPr lIns="0" tIns="0" rIns="0" bIns="0"/>
           <a:lstStyle/>
           <a:p>
-            <a:pPr/>
+            <a:pPr>
+              <a:defRPr>
+                <a:latin typeface="+mn-lt"/>
+                <a:ea typeface="+mn-ea"/>
+                <a:cs typeface="+mn-cs"/>
+                <a:sym typeface="Helvetica"/>
+              </a:defRPr>
+            </a:pPr>
           </a:p>
         </p:txBody>
       </p:sp>
@@ -17383,8 +19094,8 @@
         </p:nvSpPr>
         <p:spPr>
           <a:xfrm>
-            <a:off x="7776843" y="1512938"/>
-            <a:ext cx="441962" cy="288823"/>
+            <a:off x="7776843" y="1512937"/>
+            <a:ext cx="441962" cy="288821"/>
           </a:xfrm>
           <a:prstGeom prst="rect">
             <a:avLst/>
@@ -17450,7 +19161,14 @@
           <a:bodyPr lIns="0" tIns="0" rIns="0" bIns="0"/>
           <a:lstStyle/>
           <a:p>
-            <a:pPr/>
+            <a:pPr>
+              <a:defRPr>
+                <a:latin typeface="+mn-lt"/>
+                <a:ea typeface="+mn-ea"/>
+                <a:cs typeface="+mn-cs"/>
+                <a:sym typeface="Helvetica"/>
+              </a:defRPr>
+            </a:pPr>
           </a:p>
         </p:txBody>
       </p:sp>
@@ -17462,8 +19180,8 @@
         </p:nvSpPr>
         <p:spPr>
           <a:xfrm>
-            <a:off x="8081643" y="2630747"/>
-            <a:ext cx="632463" cy="301106"/>
+            <a:off x="8081643" y="2630746"/>
+            <a:ext cx="632464" cy="301105"/>
           </a:xfrm>
           <a:prstGeom prst="rect">
             <a:avLst/>
@@ -17527,7 +19245,14 @@
           <a:bodyPr lIns="0" tIns="0" rIns="0" bIns="0"/>
           <a:lstStyle/>
           <a:p>
-            <a:pPr/>
+            <a:pPr>
+              <a:defRPr>
+                <a:latin typeface="+mn-lt"/>
+                <a:ea typeface="+mn-ea"/>
+                <a:cs typeface="+mn-cs"/>
+                <a:sym typeface="Helvetica"/>
+              </a:defRPr>
+            </a:pPr>
           </a:p>
         </p:txBody>
       </p:sp>
@@ -17558,7 +19283,14 @@
           <a:bodyPr lIns="0" tIns="0" rIns="0" bIns="0"/>
           <a:lstStyle/>
           <a:p>
-            <a:pPr/>
+            <a:pPr>
+              <a:defRPr>
+                <a:latin typeface="+mn-lt"/>
+                <a:ea typeface="+mn-ea"/>
+                <a:cs typeface="+mn-cs"/>
+                <a:sym typeface="Helvetica"/>
+              </a:defRPr>
+            </a:pPr>
           </a:p>
         </p:txBody>
       </p:sp>
@@ -17570,8 +19302,8 @@
         </p:nvSpPr>
         <p:spPr>
           <a:xfrm>
-            <a:off x="6005193" y="2998007"/>
-            <a:ext cx="1108713" cy="366685"/>
+            <a:off x="6005193" y="2998006"/>
+            <a:ext cx="1108714" cy="366683"/>
           </a:xfrm>
           <a:prstGeom prst="rect">
             <a:avLst/>
@@ -17637,7 +19369,14 @@
           <a:bodyPr lIns="0" tIns="0" rIns="0" bIns="0"/>
           <a:lstStyle/>
           <a:p>
-            <a:pPr/>
+            <a:pPr>
+              <a:defRPr>
+                <a:latin typeface="+mn-lt"/>
+                <a:ea typeface="+mn-ea"/>
+                <a:cs typeface="+mn-cs"/>
+                <a:sym typeface="Helvetica"/>
+              </a:defRPr>
+            </a:pPr>
           </a:p>
         </p:txBody>
       </p:sp>
@@ -17665,7 +19404,14 @@
           <a:bodyPr lIns="0" tIns="0" rIns="0" bIns="0"/>
           <a:lstStyle/>
           <a:p>
-            <a:pPr/>
+            <a:pPr>
+              <a:defRPr>
+                <a:latin typeface="+mn-lt"/>
+                <a:ea typeface="+mn-ea"/>
+                <a:cs typeface="+mn-cs"/>
+                <a:sym typeface="Helvetica"/>
+              </a:defRPr>
+            </a:pPr>
           </a:p>
         </p:txBody>
       </p:sp>
@@ -17677,8 +19423,8 @@
         </p:nvSpPr>
         <p:spPr>
           <a:xfrm>
-            <a:off x="4300218" y="1778599"/>
-            <a:ext cx="1261113" cy="214700"/>
+            <a:off x="4300218" y="1778598"/>
+            <a:ext cx="1261114" cy="214698"/>
           </a:xfrm>
           <a:prstGeom prst="rect">
             <a:avLst/>
@@ -17725,8 +19471,8 @@
         </p:nvSpPr>
         <p:spPr>
           <a:xfrm>
-            <a:off x="5976618" y="2363007"/>
-            <a:ext cx="1470663" cy="226985"/>
+            <a:off x="5976618" y="2363006"/>
+            <a:ext cx="1470664" cy="226983"/>
           </a:xfrm>
           <a:prstGeom prst="rect">
             <a:avLst/>
@@ -17773,8 +19519,8 @@
         </p:nvSpPr>
         <p:spPr>
           <a:xfrm>
-            <a:off x="5760718" y="4804167"/>
-            <a:ext cx="2918463" cy="202415"/>
+            <a:off x="5760718" y="4804166"/>
+            <a:ext cx="2918464" cy="202414"/>
           </a:xfrm>
           <a:prstGeom prst="rect">
             <a:avLst/>
@@ -17822,7 +19568,7 @@
         <p:spPr>
           <a:xfrm>
             <a:off x="269081" y="1938338"/>
-            <a:ext cx="2190751" cy="876302"/>
+            <a:ext cx="2190751" cy="876303"/>
           </a:xfrm>
           <a:prstGeom prst="roundRect">
             <a:avLst>
@@ -17842,7 +19588,14 @@
           <a:bodyPr lIns="0" tIns="0" rIns="0" bIns="0"/>
           <a:lstStyle/>
           <a:p>
-            <a:pPr/>
+            <a:pPr>
+              <a:defRPr>
+                <a:latin typeface="+mn-lt"/>
+                <a:ea typeface="+mn-ea"/>
+                <a:cs typeface="+mn-cs"/>
+                <a:sym typeface="Helvetica"/>
+              </a:defRPr>
+            </a:pPr>
           </a:p>
         </p:txBody>
       </p:sp>
@@ -17855,7 +19608,7 @@
         <p:spPr>
           <a:xfrm>
             <a:off x="457675" y="1983388"/>
-            <a:ext cx="594362" cy="214699"/>
+            <a:ext cx="594363" cy="214697"/>
           </a:xfrm>
           <a:prstGeom prst="rect">
             <a:avLst/>
@@ -17923,7 +19676,14 @@
           <a:bodyPr lIns="0" tIns="0" rIns="0" bIns="0"/>
           <a:lstStyle/>
           <a:p>
-            <a:pPr/>
+            <a:pPr>
+              <a:defRPr>
+                <a:latin typeface="+mn-lt"/>
+                <a:ea typeface="+mn-ea"/>
+                <a:cs typeface="+mn-cs"/>
+                <a:sym typeface="Helvetica"/>
+              </a:defRPr>
+            </a:pPr>
           </a:p>
         </p:txBody>
       </p:sp>
@@ -17935,8 +19695,8 @@
         </p:nvSpPr>
         <p:spPr>
           <a:xfrm>
-            <a:off x="3055620" y="2085477"/>
-            <a:ext cx="670562" cy="362945"/>
+            <a:off x="3055620" y="2085476"/>
+            <a:ext cx="670563" cy="362943"/>
           </a:xfrm>
           <a:prstGeom prst="rect">
             <a:avLst/>
@@ -17983,8 +19743,8 @@
         </p:nvSpPr>
         <p:spPr>
           <a:xfrm>
-            <a:off x="2998470" y="2540807"/>
-            <a:ext cx="784862" cy="366685"/>
+            <a:off x="2998470" y="2540806"/>
+            <a:ext cx="784863" cy="366683"/>
           </a:xfrm>
           <a:prstGeom prst="rect">
             <a:avLst/>
@@ -18062,7 +19822,14 @@
           <a:bodyPr lIns="0" tIns="0" rIns="0" bIns="0"/>
           <a:lstStyle/>
           <a:p>
-            <a:pPr/>
+            <a:pPr>
+              <a:defRPr>
+                <a:latin typeface="+mn-lt"/>
+                <a:ea typeface="+mn-ea"/>
+                <a:cs typeface="+mn-cs"/>
+                <a:sym typeface="Helvetica"/>
+              </a:defRPr>
+            </a:pPr>
           </a:p>
         </p:txBody>
       </p:sp>
@@ -18091,7 +19858,14 @@
           <a:bodyPr lIns="0" tIns="0" rIns="0" bIns="0"/>
           <a:lstStyle/>
           <a:p>
-            <a:pPr/>
+            <a:pPr>
+              <a:defRPr>
+                <a:latin typeface="+mn-lt"/>
+                <a:ea typeface="+mn-ea"/>
+                <a:cs typeface="+mn-cs"/>
+                <a:sym typeface="Helvetica"/>
+              </a:defRPr>
+            </a:pPr>
           </a:p>
         </p:txBody>
       </p:sp>
@@ -18120,7 +19894,14 @@
           <a:bodyPr lIns="0" tIns="0" rIns="0" bIns="0"/>
           <a:lstStyle/>
           <a:p>
-            <a:pPr/>
+            <a:pPr>
+              <a:defRPr>
+                <a:latin typeface="+mn-lt"/>
+                <a:ea typeface="+mn-ea"/>
+                <a:cs typeface="+mn-cs"/>
+                <a:sym typeface="Helvetica"/>
+              </a:defRPr>
+            </a:pPr>
           </a:p>
         </p:txBody>
       </p:sp>
@@ -18149,7 +19930,14 @@
           <a:bodyPr lIns="0" tIns="0" rIns="0" bIns="0"/>
           <a:lstStyle/>
           <a:p>
-            <a:pPr/>
+            <a:pPr>
+              <a:defRPr>
+                <a:latin typeface="+mn-lt"/>
+                <a:ea typeface="+mn-ea"/>
+                <a:cs typeface="+mn-cs"/>
+                <a:sym typeface="Helvetica"/>
+              </a:defRPr>
+            </a:pPr>
           </a:p>
         </p:txBody>
       </p:sp>
@@ -18178,7 +19966,14 @@
           <a:bodyPr lIns="0" tIns="0" rIns="0" bIns="0"/>
           <a:lstStyle/>
           <a:p>
-            <a:pPr/>
+            <a:pPr>
+              <a:defRPr>
+                <a:latin typeface="+mn-lt"/>
+                <a:ea typeface="+mn-ea"/>
+                <a:cs typeface="+mn-cs"/>
+                <a:sym typeface="Helvetica"/>
+              </a:defRPr>
+            </a:pPr>
           </a:p>
         </p:txBody>
       </p:sp>
@@ -18190,8 +19985,8 @@
         </p:nvSpPr>
         <p:spPr>
           <a:xfrm>
-            <a:off x="2507851" y="2376488"/>
-            <a:ext cx="311152" cy="2"/>
+            <a:off x="2507850" y="2376488"/>
+            <a:ext cx="311153" cy="3"/>
           </a:xfrm>
           <a:prstGeom prst="line">
             <a:avLst/>
@@ -18204,7 +19999,7 @@
           </a:ln>
         </p:spPr>
         <p:txBody>
-          <a:bodyPr lIns="0" tIns="0" rIns="0" bIns="0"/>
+          <a:bodyPr lIns="45718" tIns="45718" rIns="45718" bIns="45718"/>
           <a:lstStyle/>
           <a:p>
             <a:pPr/>
@@ -18220,7 +20015,7 @@
         <p:spPr>
           <a:xfrm>
             <a:off x="3889959" y="2532307"/>
-            <a:ext cx="2288593" cy="191844"/>
+            <a:ext cx="2288594" cy="191845"/>
           </a:xfrm>
           <a:prstGeom prst="line">
             <a:avLst/>
@@ -18234,7 +20029,7 @@
           </a:ln>
         </p:spPr>
         <p:txBody>
-          <a:bodyPr lIns="0" tIns="0" rIns="0" bIns="0"/>
+          <a:bodyPr lIns="45718" tIns="45718" rIns="45718" bIns="45718"/>
           <a:lstStyle/>
           <a:p>
             <a:pPr/>
@@ -18250,7 +20045,7 @@
         <p:spPr>
           <a:xfrm>
             <a:off x="457675" y="2304894"/>
-            <a:ext cx="1813563" cy="276537"/>
+            <a:ext cx="1813563" cy="276535"/>
           </a:xfrm>
           <a:prstGeom prst="rect">
             <a:avLst/>
@@ -18341,14 +20136,14 @@
     </a:clrScheme>
     <a:fontScheme name="Office Theme">
       <a:majorFont>
+        <a:latin typeface="Helvetica Neue"/>
+        <a:ea typeface="Helvetica Neue"/>
+        <a:cs typeface="Helvetica Neue"/>
+      </a:majorFont>
+      <a:minorFont>
         <a:latin typeface="Helvetica"/>
         <a:ea typeface="Helvetica"/>
         <a:cs typeface="Helvetica"/>
-      </a:majorFont>
-      <a:minorFont>
-        <a:latin typeface="Helvetica Neue"/>
-        <a:ea typeface="Helvetica Neue"/>
-        <a:cs typeface="Helvetica Neue"/>
       </a:minorFont>
     </a:fontScheme>
     <a:fmtScheme name="Office Theme">
@@ -18532,7 +20327,7 @@
             <a:latin typeface="+mj-lt"/>
             <a:ea typeface="+mj-ea"/>
             <a:cs typeface="+mj-cs"/>
-            <a:sym typeface="Helvetica"/>
+            <a:sym typeface="Helvetica Neue"/>
           </a:defRPr>
         </a:defPPr>
         <a:lvl1pPr marL="0" marR="0" indent="0" algn="l" defTabSz="914400" rtl="0" fontAlgn="auto" latinLnBrk="1" hangingPunct="0">
@@ -19103,7 +20898,7 @@
             <a:latin typeface="+mj-lt"/>
             <a:ea typeface="+mj-ea"/>
             <a:cs typeface="+mj-cs"/>
-            <a:sym typeface="Helvetica"/>
+            <a:sym typeface="Helvetica Neue"/>
           </a:defRPr>
         </a:defPPr>
         <a:lvl1pPr marL="0" marR="0" indent="0" algn="l" defTabSz="914400" rtl="0" fontAlgn="auto" latinLnBrk="1" hangingPunct="0">
@@ -19395,14 +21190,14 @@
     </a:clrScheme>
     <a:fontScheme name="Office Theme">
       <a:majorFont>
+        <a:latin typeface="Helvetica Neue"/>
+        <a:ea typeface="Helvetica Neue"/>
+        <a:cs typeface="Helvetica Neue"/>
+      </a:majorFont>
+      <a:minorFont>
         <a:latin typeface="Helvetica"/>
         <a:ea typeface="Helvetica"/>
         <a:cs typeface="Helvetica"/>
-      </a:majorFont>
-      <a:minorFont>
-        <a:latin typeface="Helvetica Neue"/>
-        <a:ea typeface="Helvetica Neue"/>
-        <a:cs typeface="Helvetica Neue"/>
       </a:minorFont>
     </a:fontScheme>
     <a:fmtScheme name="Office Theme">
@@ -19586,7 +21381,7 @@
             <a:latin typeface="+mj-lt"/>
             <a:ea typeface="+mj-ea"/>
             <a:cs typeface="+mj-cs"/>
-            <a:sym typeface="Helvetica"/>
+            <a:sym typeface="Helvetica Neue"/>
           </a:defRPr>
         </a:defPPr>
         <a:lvl1pPr marL="0" marR="0" indent="0" algn="l" defTabSz="914400" rtl="0" fontAlgn="auto" latinLnBrk="1" hangingPunct="0">
@@ -20157,7 +21952,7 @@
             <a:latin typeface="+mj-lt"/>
             <a:ea typeface="+mj-ea"/>
             <a:cs typeface="+mj-cs"/>
-            <a:sym typeface="Helvetica"/>
+            <a:sym typeface="Helvetica Neue"/>
           </a:defRPr>
         </a:defPPr>
         <a:lvl1pPr marL="0" marR="0" indent="0" algn="l" defTabSz="914400" rtl="0" fontAlgn="auto" latinLnBrk="1" hangingPunct="0">
